--- a/slides/CSC270-Lecture-29-Database-Transactions-and-ACID-Properties.pptx
+++ b/slides/CSC270-Lecture-29-Database-Transactions-and-ACID-Properties.pptx
@@ -14,9 +14,15 @@
     <p:sldId id="262" r:id="rId8"/>
     <p:sldId id="263" r:id="rId9"/>
     <p:sldId id="264" r:id="rId10"/>
+    <p:sldId id="269" r:id="rId20"/>
+    <p:sldId id="270" r:id="rId21"/>
+    <p:sldId id="271" r:id="rId22"/>
+    <p:sldId id="272" r:id="rId23"/>
+    <p:sldId id="273" r:id="rId24"/>
     <p:sldId id="265" r:id="rId11"/>
     <p:sldId id="266" r:id="rId12"/>
     <p:sldId id="267" r:id="rId13"/>
+    <p:sldId id="274" r:id="rId25"/>
     <p:sldId id="268" r:id="rId14"/>
   </p:sldIdLst>
   <p:notesMasterIdLst>
@@ -2034,7 +2040,7 @@
               <a:buNone/>
             </a:pPr>
             <a:r>
-              <a:rPr lang="en-US" sz="1400" b="1" spc="200" kern="0" dirty="0">
+              <a:rPr lang="en-US" sz="2000" b="1" spc="200" kern="0" dirty="0">
                 <a:solidFill>
                   <a:srgbClr val="2FE6C4"/>
                 </a:solidFill>
@@ -2044,7 +2050,7 @@
               </a:rPr>
               <a:t>CSC270 · DATABASE SYSTEMS · LECTURE 29</a:t>
             </a:r>
-            <a:endParaRPr lang="en-US" sz="1400" dirty="0"/>
+            <a:endParaRPr lang="en-US" sz="2000" dirty="0"/>
           </a:p>
         </p:txBody>
       </p:sp>
@@ -2073,7 +2079,7 @@
               <a:buNone/>
             </a:pPr>
             <a:r>
-              <a:rPr lang="en-US" sz="1400" dirty="0">
+              <a:rPr lang="en-US" sz="1800" dirty="0">
                 <a:solidFill>
                   <a:srgbClr val="8A939B"/>
                 </a:solidFill>
@@ -2083,7 +2089,7 @@
               </a:rPr>
               <a:t>Unit 8 · Transaction Management</a:t>
             </a:r>
-            <a:endParaRPr lang="en-US" sz="1400" dirty="0"/>
+            <a:endParaRPr lang="en-US" sz="1800" dirty="0"/>
           </a:p>
         </p:txBody>
       </p:sp>
@@ -2151,7 +2157,7 @@
               <a:buNone/>
             </a:pPr>
             <a:r>
-              <a:rPr lang="en-US" sz="1600" dirty="0">
+              <a:rPr lang="en-US" sz="1800" dirty="0">
                 <a:solidFill>
                   <a:srgbClr val="8A939B"/>
                 </a:solidFill>
@@ -2161,7 +2167,7 @@
               </a:rPr>
               <a:t>What a transaction is, the states it moves through, and the four guarantees every DBMS makes about it.</a:t>
             </a:r>
-            <a:endParaRPr lang="en-US" sz="1600" dirty="0"/>
+            <a:endParaRPr lang="en-US" sz="1800" dirty="0"/>
           </a:p>
         </p:txBody>
       </p:sp>
@@ -2190,7 +2196,7 @@
               <a:buNone/>
             </a:pPr>
             <a:r>
-              <a:rPr lang="en-US" sz="1000" u="sng" dirty="0">
+              <a:rPr lang="en-US" sz="1200" u="sng" dirty="0">
                 <a:solidFill>
                   <a:srgbClr val="8A939B"/>
                 </a:solidFill>
@@ -2211,7 +2217,7 @@
               <a:buNone/>
             </a:pPr>
             <a:r>
-              <a:rPr lang="en-US" sz="1000" dirty="0">
+              <a:rPr lang="en-US" sz="1200" dirty="0">
                 <a:solidFill>
                   <a:srgbClr val="8A939B"/>
                 </a:solidFill>
@@ -2221,7 +2227,7 @@
               </a:rPr>
               <a:t>  ·  1</a:t>
             </a:r>
-            <a:endParaRPr lang="en-US" sz="1000" dirty="0"/>
+            <a:endParaRPr lang="en-US" sz="1200" dirty="0"/>
           </a:p>
         </p:txBody>
       </p:sp>
@@ -2360,7 +2366,7 @@
               <a:buNone/>
             </a:pPr>
             <a:r>
-              <a:rPr lang="en-US" sz="1000" u="sng" dirty="0">
+              <a:rPr lang="en-US" sz="1200" u="sng" dirty="0">
                 <a:solidFill>
                   <a:srgbClr val="8A939B"/>
                 </a:solidFill>
@@ -2381,7 +2387,7 @@
               <a:buNone/>
             </a:pPr>
             <a:r>
-              <a:rPr lang="en-US" sz="1000" dirty="0">
+              <a:rPr lang="en-US" sz="1200" dirty="0">
                 <a:solidFill>
                   <a:srgbClr val="8A939B"/>
                 </a:solidFill>
@@ -2389,9 +2395,9 @@
                 <a:ea typeface="Calibri" pitchFamily="34" charset="-122"/>
                 <a:cs typeface="Calibri" pitchFamily="34" charset="-120"/>
               </a:rPr>
-              <a:t>  ·  10</a:t>
-            </a:r>
-            <a:endParaRPr lang="en-US" sz="1000" dirty="0"/>
+              <a:t>  ·  15</a:t>
+            </a:r>
+            <a:endParaRPr lang="en-US" sz="1200" dirty="0"/>
           </a:p>
         </p:txBody>
       </p:sp>
@@ -2420,7 +2426,7 @@
               <a:buNone/>
             </a:pPr>
             <a:r>
-              <a:rPr lang="en-US" sz="1250" b="1" dirty="0">
+              <a:rPr lang="en-US" sz="2000" b="1" dirty="0">
                 <a:solidFill>
                   <a:srgbClr val="2FE6C4"/>
                 </a:solidFill>
@@ -2430,7 +2436,7 @@
               </a:rPr>
               <a:t>Outcome 1 — both statements succeed</a:t>
             </a:r>
-            <a:endParaRPr lang="en-US" sz="1250" dirty="0"/>
+            <a:endParaRPr lang="en-US" sz="2000" dirty="0"/>
           </a:p>
         </p:txBody>
       </p:sp>
@@ -2471,7 +2477,7 @@
                         <a:buNone/>
                       </a:pPr>
                       <a:r>
-                        <a:rPr lang="en-US" sz="1100" b="1" dirty="0">
+                        <a:rPr lang="en-US" sz="1400" b="1" dirty="0">
                           <a:solidFill>
                             <a:srgbClr val="FFFFFF"/>
                           </a:solidFill>
@@ -2481,7 +2487,7 @@
                         </a:rPr>
                         <a:t>Step</a:t>
                       </a:r>
-                      <a:endParaRPr lang="en-US" sz="1100" dirty="0">
+                      <a:endParaRPr lang="en-US" sz="1400" dirty="0">
                         <a:latin typeface="Calibri" charset="0"/>
                         <a:ea typeface="Calibri" charset="0"/>
                         <a:cs typeface="Calibri" charset="0"/>
@@ -2539,7 +2545,7 @@
                         <a:buNone/>
                       </a:pPr>
                       <a:r>
-                        <a:rPr lang="en-US" sz="1100" b="1" dirty="0">
+                        <a:rPr lang="en-US" sz="1400" b="1" dirty="0">
                           <a:solidFill>
                             <a:srgbClr val="FFFFFF"/>
                           </a:solidFill>
@@ -2549,7 +2555,7 @@
                         </a:rPr>
                         <a:t>Operation</a:t>
                       </a:r>
-                      <a:endParaRPr lang="en-US" sz="1100" dirty="0">
+                      <a:endParaRPr lang="en-US" sz="1400" dirty="0">
                         <a:latin typeface="Calibri" charset="0"/>
                         <a:ea typeface="Calibri" charset="0"/>
                         <a:cs typeface="Calibri" charset="0"/>
@@ -2607,7 +2613,7 @@
                         <a:buNone/>
                       </a:pPr>
                       <a:r>
-                        <a:rPr lang="en-US" sz="1100" b="1" dirty="0">
+                        <a:rPr lang="en-US" sz="1400" b="1" dirty="0">
                           <a:solidFill>
                             <a:srgbClr val="FFFFFF"/>
                           </a:solidFill>
@@ -2617,7 +2623,7 @@
                         </a:rPr>
                         <a:t>State</a:t>
                       </a:r>
-                      <a:endParaRPr lang="en-US" sz="1100" dirty="0">
+                      <a:endParaRPr lang="en-US" sz="1400" dirty="0">
                         <a:latin typeface="Calibri" charset="0"/>
                         <a:ea typeface="Calibri" charset="0"/>
                         <a:cs typeface="Calibri" charset="0"/>
@@ -2677,7 +2683,7 @@
                         <a:buNone/>
                       </a:pPr>
                       <a:r>
-                        <a:rPr lang="en-US" sz="1100" dirty="0">
+                        <a:rPr lang="en-US" sz="1400" dirty="0">
                           <a:solidFill>
                             <a:srgbClr val="1F2429"/>
                           </a:solidFill>
@@ -2687,7 +2693,7 @@
                         </a:rPr>
                         <a:t>1</a:t>
                       </a:r>
-                      <a:endParaRPr lang="en-US" sz="1100" dirty="0">
+                      <a:endParaRPr lang="en-US" sz="1400" dirty="0">
                         <a:latin typeface="Calibri" charset="0"/>
                         <a:ea typeface="Calibri" charset="0"/>
                         <a:cs typeface="Calibri" charset="0"/>
@@ -2745,7 +2751,7 @@
                         <a:buNone/>
                       </a:pPr>
                       <a:r>
-                        <a:rPr lang="en-US" sz="1100" dirty="0">
+                        <a:rPr lang="en-US" sz="1400" dirty="0">
                           <a:solidFill>
                             <a:srgbClr val="1F2429"/>
                           </a:solidFill>
@@ -2755,7 +2761,7 @@
                         </a:rPr>
                         <a:t>BEGIN TRANSACTION</a:t>
                       </a:r>
-                      <a:endParaRPr lang="en-US" sz="1100" dirty="0">
+                      <a:endParaRPr lang="en-US" sz="1400" dirty="0">
                         <a:latin typeface="Calibri" charset="0"/>
                         <a:ea typeface="Calibri" charset="0"/>
                         <a:cs typeface="Calibri" charset="0"/>
@@ -2813,7 +2819,7 @@
                         <a:buNone/>
                       </a:pPr>
                       <a:r>
-                        <a:rPr lang="en-US" sz="1100" dirty="0">
+                        <a:rPr lang="en-US" sz="1400" dirty="0">
                           <a:solidFill>
                             <a:srgbClr val="1F2429"/>
                           </a:solidFill>
@@ -2823,7 +2829,7 @@
                         </a:rPr>
                         <a:t>Active</a:t>
                       </a:r>
-                      <a:endParaRPr lang="en-US" sz="1100" dirty="0">
+                      <a:endParaRPr lang="en-US" sz="1400" dirty="0">
                         <a:latin typeface="Calibri" charset="0"/>
                         <a:ea typeface="Calibri" charset="0"/>
                         <a:cs typeface="Calibri" charset="0"/>
@@ -2883,7 +2889,7 @@
                         <a:buNone/>
                       </a:pPr>
                       <a:r>
-                        <a:rPr lang="en-US" sz="1100" dirty="0">
+                        <a:rPr lang="en-US" sz="1400" dirty="0">
                           <a:solidFill>
                             <a:srgbClr val="1F2429"/>
                           </a:solidFill>
@@ -2893,7 +2899,7 @@
                         </a:rPr>
                         <a:t>2</a:t>
                       </a:r>
-                      <a:endParaRPr lang="en-US" sz="1100" dirty="0">
+                      <a:endParaRPr lang="en-US" sz="1400" dirty="0">
                         <a:latin typeface="Calibri" charset="0"/>
                         <a:ea typeface="Calibri" charset="0"/>
                         <a:cs typeface="Calibri" charset="0"/>
@@ -2951,7 +2957,7 @@
                         <a:buNone/>
                       </a:pPr>
                       <a:r>
-                        <a:rPr lang="en-US" sz="1100" dirty="0">
+                        <a:rPr lang="en-US" sz="1400" dirty="0">
                           <a:solidFill>
                             <a:srgbClr val="1F2429"/>
                           </a:solidFill>
@@ -2961,7 +2967,7 @@
                         </a:rPr>
                         <a:t>Debit A101 by 10,000</a:t>
                       </a:r>
-                      <a:endParaRPr lang="en-US" sz="1100" dirty="0">
+                      <a:endParaRPr lang="en-US" sz="1400" dirty="0">
                         <a:latin typeface="Calibri" charset="0"/>
                         <a:ea typeface="Calibri" charset="0"/>
                         <a:cs typeface="Calibri" charset="0"/>
@@ -3019,7 +3025,7 @@
                         <a:buNone/>
                       </a:pPr>
                       <a:r>
-                        <a:rPr lang="en-US" sz="1100" dirty="0">
+                        <a:rPr lang="en-US" sz="1400" dirty="0">
                           <a:solidFill>
                             <a:srgbClr val="1F2429"/>
                           </a:solidFill>
@@ -3029,7 +3035,7 @@
                         </a:rPr>
                         <a:t>Active</a:t>
                       </a:r>
-                      <a:endParaRPr lang="en-US" sz="1100" dirty="0">
+                      <a:endParaRPr lang="en-US" sz="1400" dirty="0">
                         <a:latin typeface="Calibri" charset="0"/>
                         <a:ea typeface="Calibri" charset="0"/>
                         <a:cs typeface="Calibri" charset="0"/>
@@ -3089,7 +3095,7 @@
                         <a:buNone/>
                       </a:pPr>
                       <a:r>
-                        <a:rPr lang="en-US" sz="1100" dirty="0">
+                        <a:rPr lang="en-US" sz="1400" dirty="0">
                           <a:solidFill>
                             <a:srgbClr val="1F2429"/>
                           </a:solidFill>
@@ -3099,7 +3105,7 @@
                         </a:rPr>
                         <a:t>3</a:t>
                       </a:r>
-                      <a:endParaRPr lang="en-US" sz="1100" dirty="0">
+                      <a:endParaRPr lang="en-US" sz="1400" dirty="0">
                         <a:latin typeface="Calibri" charset="0"/>
                         <a:ea typeface="Calibri" charset="0"/>
                         <a:cs typeface="Calibri" charset="0"/>
@@ -3157,7 +3163,7 @@
                         <a:buNone/>
                       </a:pPr>
                       <a:r>
-                        <a:rPr lang="en-US" sz="1100" dirty="0">
+                        <a:rPr lang="en-US" sz="1400" dirty="0">
                           <a:solidFill>
                             <a:srgbClr val="1F2429"/>
                           </a:solidFill>
@@ -3167,7 +3173,7 @@
                         </a:rPr>
                         <a:t>Credit A205 by 10,000</a:t>
                       </a:r>
-                      <a:endParaRPr lang="en-US" sz="1100" dirty="0">
+                      <a:endParaRPr lang="en-US" sz="1400" dirty="0">
                         <a:latin typeface="Calibri" charset="0"/>
                         <a:ea typeface="Calibri" charset="0"/>
                         <a:cs typeface="Calibri" charset="0"/>
@@ -3225,7 +3231,7 @@
                         <a:buNone/>
                       </a:pPr>
                       <a:r>
-                        <a:rPr lang="en-US" sz="1100" dirty="0">
+                        <a:rPr lang="en-US" sz="1400" dirty="0">
                           <a:solidFill>
                             <a:srgbClr val="1F2429"/>
                           </a:solidFill>
@@ -3235,7 +3241,7 @@
                         </a:rPr>
                         <a:t>Active</a:t>
                       </a:r>
-                      <a:endParaRPr lang="en-US" sz="1100" dirty="0">
+                      <a:endParaRPr lang="en-US" sz="1400" dirty="0">
                         <a:latin typeface="Calibri" charset="0"/>
                         <a:ea typeface="Calibri" charset="0"/>
                         <a:cs typeface="Calibri" charset="0"/>
@@ -3295,7 +3301,7 @@
                         <a:buNone/>
                       </a:pPr>
                       <a:r>
-                        <a:rPr lang="en-US" sz="1100" dirty="0">
+                        <a:rPr lang="en-US" sz="1400" dirty="0">
                           <a:solidFill>
                             <a:srgbClr val="1F2429"/>
                           </a:solidFill>
@@ -3305,7 +3311,7 @@
                         </a:rPr>
                         <a:t>4</a:t>
                       </a:r>
-                      <a:endParaRPr lang="en-US" sz="1100" dirty="0">
+                      <a:endParaRPr lang="en-US" sz="1400" dirty="0">
                         <a:latin typeface="Calibri" charset="0"/>
                         <a:ea typeface="Calibri" charset="0"/>
                         <a:cs typeface="Calibri" charset="0"/>
@@ -3363,7 +3369,7 @@
                         <a:buNone/>
                       </a:pPr>
                       <a:r>
-                        <a:rPr lang="en-US" sz="1100" dirty="0">
+                        <a:rPr lang="en-US" sz="1400" dirty="0">
                           <a:solidFill>
                             <a:srgbClr val="1F2429"/>
                           </a:solidFill>
@@ -3373,7 +3379,7 @@
                         </a:rPr>
                         <a:t>Final operation done</a:t>
                       </a:r>
-                      <a:endParaRPr lang="en-US" sz="1100" dirty="0">
+                      <a:endParaRPr lang="en-US" sz="1400" dirty="0">
                         <a:latin typeface="Calibri" charset="0"/>
                         <a:ea typeface="Calibri" charset="0"/>
                         <a:cs typeface="Calibri" charset="0"/>
@@ -3431,7 +3437,7 @@
                         <a:buNone/>
                       </a:pPr>
                       <a:r>
-                        <a:rPr lang="en-US" sz="1100" dirty="0">
+                        <a:rPr lang="en-US" sz="1400" dirty="0">
                           <a:solidFill>
                             <a:srgbClr val="1F2429"/>
                           </a:solidFill>
@@ -3441,7 +3447,7 @@
                         </a:rPr>
                         <a:t>Partially Committed</a:t>
                       </a:r>
-                      <a:endParaRPr lang="en-US" sz="1100" dirty="0">
+                      <a:endParaRPr lang="en-US" sz="1400" dirty="0">
                         <a:latin typeface="Calibri" charset="0"/>
                         <a:ea typeface="Calibri" charset="0"/>
                         <a:cs typeface="Calibri" charset="0"/>
@@ -3501,7 +3507,7 @@
                         <a:buNone/>
                       </a:pPr>
                       <a:r>
-                        <a:rPr lang="en-US" sz="1100" dirty="0">
+                        <a:rPr lang="en-US" sz="1400" dirty="0">
                           <a:solidFill>
                             <a:srgbClr val="1F2429"/>
                           </a:solidFill>
@@ -3511,7 +3517,7 @@
                         </a:rPr>
                         <a:t>5</a:t>
                       </a:r>
-                      <a:endParaRPr lang="en-US" sz="1100" dirty="0">
+                      <a:endParaRPr lang="en-US" sz="1400" dirty="0">
                         <a:latin typeface="Calibri" charset="0"/>
                         <a:ea typeface="Calibri" charset="0"/>
                         <a:cs typeface="Calibri" charset="0"/>
@@ -3569,7 +3575,7 @@
                         <a:buNone/>
                       </a:pPr>
                       <a:r>
-                        <a:rPr lang="en-US" sz="1100" dirty="0">
+                        <a:rPr lang="en-US" sz="1400" dirty="0">
                           <a:solidFill>
                             <a:srgbClr val="1F2429"/>
                           </a:solidFill>
@@ -3579,7 +3585,7 @@
                         </a:rPr>
                         <a:t>Log flushed to disk</a:t>
                       </a:r>
-                      <a:endParaRPr lang="en-US" sz="1100" dirty="0">
+                      <a:endParaRPr lang="en-US" sz="1400" dirty="0">
                         <a:latin typeface="Calibri" charset="0"/>
                         <a:ea typeface="Calibri" charset="0"/>
                         <a:cs typeface="Calibri" charset="0"/>
@@ -3637,7 +3643,7 @@
                         <a:buNone/>
                       </a:pPr>
                       <a:r>
-                        <a:rPr lang="en-US" sz="1100" dirty="0">
+                        <a:rPr lang="en-US" sz="1400" dirty="0">
                           <a:solidFill>
                             <a:srgbClr val="1F2429"/>
                           </a:solidFill>
@@ -3647,7 +3653,7 @@
                         </a:rPr>
                         <a:t>Committed</a:t>
                       </a:r>
-                      <a:endParaRPr lang="en-US" sz="1100" dirty="0">
+                      <a:endParaRPr lang="en-US" sz="1400" dirty="0">
                         <a:latin typeface="Calibri" charset="0"/>
                         <a:ea typeface="Calibri" charset="0"/>
                         <a:cs typeface="Calibri" charset="0"/>
@@ -3726,7 +3732,7 @@
               <a:buNone/>
             </a:pPr>
             <a:r>
-              <a:rPr lang="en-US" sz="1250" b="1" dirty="0">
+              <a:rPr lang="en-US" sz="1800" b="1" dirty="0">
                 <a:solidFill>
                   <a:srgbClr val="E8A33D"/>
                 </a:solidFill>
@@ -3736,7 +3742,7 @@
               </a:rPr>
               <a:t>Outcome 2 — crash after debit, before credit</a:t>
             </a:r>
-            <a:endParaRPr lang="en-US" sz="1250" dirty="0"/>
+            <a:endParaRPr lang="en-US" sz="1800" dirty="0"/>
           </a:p>
         </p:txBody>
       </p:sp>
@@ -3777,7 +3783,7 @@
                         <a:buNone/>
                       </a:pPr>
                       <a:r>
-                        <a:rPr lang="en-US" sz="1050" b="1" dirty="0">
+                        <a:rPr lang="en-US" sz="1400" b="1" dirty="0">
                           <a:solidFill>
                             <a:srgbClr val="FFFFFF"/>
                           </a:solidFill>
@@ -3787,7 +3793,7 @@
                         </a:rPr>
                         <a:t>Step</a:t>
                       </a:r>
-                      <a:endParaRPr lang="en-US" sz="1050" dirty="0">
+                      <a:endParaRPr lang="en-US" sz="1400" dirty="0">
                         <a:latin typeface="Calibri" charset="0"/>
                         <a:ea typeface="Calibri" charset="0"/>
                         <a:cs typeface="Calibri" charset="0"/>
@@ -3845,7 +3851,7 @@
                         <a:buNone/>
                       </a:pPr>
                       <a:r>
-                        <a:rPr lang="en-US" sz="1050" b="1" dirty="0">
+                        <a:rPr lang="en-US" sz="1400" b="1" dirty="0">
                           <a:solidFill>
                             <a:srgbClr val="FFFFFF"/>
                           </a:solidFill>
@@ -3855,7 +3861,7 @@
                         </a:rPr>
                         <a:t>Operation</a:t>
                       </a:r>
-                      <a:endParaRPr lang="en-US" sz="1050" dirty="0">
+                      <a:endParaRPr lang="en-US" sz="1400" dirty="0">
                         <a:latin typeface="Calibri" charset="0"/>
                         <a:ea typeface="Calibri" charset="0"/>
                         <a:cs typeface="Calibri" charset="0"/>
@@ -3913,7 +3919,7 @@
                         <a:buNone/>
                       </a:pPr>
                       <a:r>
-                        <a:rPr lang="en-US" sz="1050" b="1" dirty="0">
+                        <a:rPr lang="en-US" sz="1400" b="1" dirty="0">
                           <a:solidFill>
                             <a:srgbClr val="FFFFFF"/>
                           </a:solidFill>
@@ -3923,7 +3929,7 @@
                         </a:rPr>
                         <a:t>State</a:t>
                       </a:r>
-                      <a:endParaRPr lang="en-US" sz="1050" dirty="0">
+                      <a:endParaRPr lang="en-US" sz="1400" dirty="0">
                         <a:latin typeface="Calibri" charset="0"/>
                         <a:ea typeface="Calibri" charset="0"/>
                         <a:cs typeface="Calibri" charset="0"/>
@@ -3983,7 +3989,7 @@
                         <a:buNone/>
                       </a:pPr>
                       <a:r>
-                        <a:rPr lang="en-US" sz="1050" dirty="0">
+                        <a:rPr lang="en-US" sz="1400" dirty="0">
                           <a:solidFill>
                             <a:srgbClr val="1F2429"/>
                           </a:solidFill>
@@ -3993,7 +3999,7 @@
                         </a:rPr>
                         <a:t>1</a:t>
                       </a:r>
-                      <a:endParaRPr lang="en-US" sz="1050" dirty="0">
+                      <a:endParaRPr lang="en-US" sz="1400" dirty="0">
                         <a:latin typeface="Calibri" charset="0"/>
                         <a:ea typeface="Calibri" charset="0"/>
                         <a:cs typeface="Calibri" charset="0"/>
@@ -4051,7 +4057,7 @@
                         <a:buNone/>
                       </a:pPr>
                       <a:r>
-                        <a:rPr lang="en-US" sz="1050" dirty="0">
+                        <a:rPr lang="en-US" sz="1400" dirty="0">
                           <a:solidFill>
                             <a:srgbClr val="1F2429"/>
                           </a:solidFill>
@@ -4061,7 +4067,7 @@
                         </a:rPr>
                         <a:t>BEGIN TRANSACTION</a:t>
                       </a:r>
-                      <a:endParaRPr lang="en-US" sz="1050" dirty="0">
+                      <a:endParaRPr lang="en-US" sz="1400" dirty="0">
                         <a:latin typeface="Calibri" charset="0"/>
                         <a:ea typeface="Calibri" charset="0"/>
                         <a:cs typeface="Calibri" charset="0"/>
@@ -4119,7 +4125,7 @@
                         <a:buNone/>
                       </a:pPr>
                       <a:r>
-                        <a:rPr lang="en-US" sz="1050" dirty="0">
+                        <a:rPr lang="en-US" sz="1400" dirty="0">
                           <a:solidFill>
                             <a:srgbClr val="1F2429"/>
                           </a:solidFill>
@@ -4129,7 +4135,7 @@
                         </a:rPr>
                         <a:t>Active</a:t>
                       </a:r>
-                      <a:endParaRPr lang="en-US" sz="1050" dirty="0">
+                      <a:endParaRPr lang="en-US" sz="1400" dirty="0">
                         <a:latin typeface="Calibri" charset="0"/>
                         <a:ea typeface="Calibri" charset="0"/>
                         <a:cs typeface="Calibri" charset="0"/>
@@ -4189,7 +4195,7 @@
                         <a:buNone/>
                       </a:pPr>
                       <a:r>
-                        <a:rPr lang="en-US" sz="1050" dirty="0">
+                        <a:rPr lang="en-US" sz="1400" dirty="0">
                           <a:solidFill>
                             <a:srgbClr val="1F2429"/>
                           </a:solidFill>
@@ -4199,7 +4205,7 @@
                         </a:rPr>
                         <a:t>2</a:t>
                       </a:r>
-                      <a:endParaRPr lang="en-US" sz="1050" dirty="0">
+                      <a:endParaRPr lang="en-US" sz="1400" dirty="0">
                         <a:latin typeface="Calibri" charset="0"/>
                         <a:ea typeface="Calibri" charset="0"/>
                         <a:cs typeface="Calibri" charset="0"/>
@@ -4257,7 +4263,7 @@
                         <a:buNone/>
                       </a:pPr>
                       <a:r>
-                        <a:rPr lang="en-US" sz="1050" dirty="0">
+                        <a:rPr lang="en-US" sz="1400" dirty="0">
                           <a:solidFill>
                             <a:srgbClr val="1F2429"/>
                           </a:solidFill>
@@ -4267,7 +4273,7 @@
                         </a:rPr>
                         <a:t>Debit A101 by 10,000</a:t>
                       </a:r>
-                      <a:endParaRPr lang="en-US" sz="1050" dirty="0">
+                      <a:endParaRPr lang="en-US" sz="1400" dirty="0">
                         <a:latin typeface="Calibri" charset="0"/>
                         <a:ea typeface="Calibri" charset="0"/>
                         <a:cs typeface="Calibri" charset="0"/>
@@ -4325,7 +4331,7 @@
                         <a:buNone/>
                       </a:pPr>
                       <a:r>
-                        <a:rPr lang="en-US" sz="1050" dirty="0">
+                        <a:rPr lang="en-US" sz="1400" dirty="0">
                           <a:solidFill>
                             <a:srgbClr val="1F2429"/>
                           </a:solidFill>
@@ -4335,7 +4341,7 @@
                         </a:rPr>
                         <a:t>Active</a:t>
                       </a:r>
-                      <a:endParaRPr lang="en-US" sz="1050" dirty="0">
+                      <a:endParaRPr lang="en-US" sz="1400" dirty="0">
                         <a:latin typeface="Calibri" charset="0"/>
                         <a:ea typeface="Calibri" charset="0"/>
                         <a:cs typeface="Calibri" charset="0"/>
@@ -4395,7 +4401,7 @@
                         <a:buNone/>
                       </a:pPr>
                       <a:r>
-                        <a:rPr lang="en-US" sz="1050" dirty="0">
+                        <a:rPr lang="en-US" sz="1400" dirty="0">
                           <a:solidFill>
                             <a:srgbClr val="1F2429"/>
                           </a:solidFill>
@@ -4405,7 +4411,7 @@
                         </a:rPr>
                         <a:t>3</a:t>
                       </a:r>
-                      <a:endParaRPr lang="en-US" sz="1050" dirty="0">
+                      <a:endParaRPr lang="en-US" sz="1400" dirty="0">
                         <a:latin typeface="Calibri" charset="0"/>
                         <a:ea typeface="Calibri" charset="0"/>
                         <a:cs typeface="Calibri" charset="0"/>
@@ -4463,7 +4469,7 @@
                         <a:buNone/>
                       </a:pPr>
                       <a:r>
-                        <a:rPr lang="en-US" sz="1050" dirty="0">
+                        <a:rPr lang="en-US" sz="1400" dirty="0">
                           <a:solidFill>
                             <a:srgbClr val="1F2429"/>
                           </a:solidFill>
@@ -4473,7 +4479,7 @@
                         </a:rPr>
                         <a:t>(system crash)</a:t>
                       </a:r>
-                      <a:endParaRPr lang="en-US" sz="1050" dirty="0">
+                      <a:endParaRPr lang="en-US" sz="1400" dirty="0">
                         <a:latin typeface="Calibri" charset="0"/>
                         <a:ea typeface="Calibri" charset="0"/>
                         <a:cs typeface="Calibri" charset="0"/>
@@ -4531,7 +4537,7 @@
                         <a:buNone/>
                       </a:pPr>
                       <a:r>
-                        <a:rPr lang="en-US" sz="1050" dirty="0">
+                        <a:rPr lang="en-US" sz="1400" dirty="0">
                           <a:solidFill>
                             <a:srgbClr val="1F2429"/>
                           </a:solidFill>
@@ -4541,7 +4547,7 @@
                         </a:rPr>
                         <a:t>Failed</a:t>
                       </a:r>
-                      <a:endParaRPr lang="en-US" sz="1050" dirty="0">
+                      <a:endParaRPr lang="en-US" sz="1400" dirty="0">
                         <a:latin typeface="Calibri" charset="0"/>
                         <a:ea typeface="Calibri" charset="0"/>
                         <a:cs typeface="Calibri" charset="0"/>
@@ -4601,7 +4607,7 @@
                         <a:buNone/>
                       </a:pPr>
                       <a:r>
-                        <a:rPr lang="en-US" sz="1050" dirty="0">
+                        <a:rPr lang="en-US" sz="1400" dirty="0">
                           <a:solidFill>
                             <a:srgbClr val="1F2429"/>
                           </a:solidFill>
@@ -4611,7 +4617,7 @@
                         </a:rPr>
                         <a:t>4</a:t>
                       </a:r>
-                      <a:endParaRPr lang="en-US" sz="1050" dirty="0">
+                      <a:endParaRPr lang="en-US" sz="1400" dirty="0">
                         <a:latin typeface="Calibri" charset="0"/>
                         <a:ea typeface="Calibri" charset="0"/>
                         <a:cs typeface="Calibri" charset="0"/>
@@ -4669,7 +4675,7 @@
                         <a:buNone/>
                       </a:pPr>
                       <a:r>
-                        <a:rPr lang="en-US" sz="1050" dirty="0">
+                        <a:rPr lang="en-US" sz="1400" dirty="0">
                           <a:solidFill>
                             <a:srgbClr val="1F2429"/>
                           </a:solidFill>
@@ -4679,7 +4685,7 @@
                         </a:rPr>
                         <a:t>Recovery manager undoes step 2</a:t>
                       </a:r>
-                      <a:endParaRPr lang="en-US" sz="1050" dirty="0">
+                      <a:endParaRPr lang="en-US" sz="1400" dirty="0">
                         <a:latin typeface="Calibri" charset="0"/>
                         <a:ea typeface="Calibri" charset="0"/>
                         <a:cs typeface="Calibri" charset="0"/>
@@ -4737,7 +4743,7 @@
                         <a:buNone/>
                       </a:pPr>
                       <a:r>
-                        <a:rPr lang="en-US" sz="1050" dirty="0">
+                        <a:rPr lang="en-US" sz="1400" dirty="0">
                           <a:solidFill>
                             <a:srgbClr val="1F2429"/>
                           </a:solidFill>
@@ -4747,7 +4753,7 @@
                         </a:rPr>
                         <a:t>Aborted</a:t>
                       </a:r>
-                      <a:endParaRPr lang="en-US" sz="1050" dirty="0">
+                      <a:endParaRPr lang="en-US" sz="1400" dirty="0">
                         <a:latin typeface="Calibri" charset="0"/>
                         <a:ea typeface="Calibri" charset="0"/>
                         <a:cs typeface="Calibri" charset="0"/>
@@ -4807,7 +4813,7 @@
                         <a:buNone/>
                       </a:pPr>
                       <a:r>
-                        <a:rPr lang="en-US" sz="1050" dirty="0">
+                        <a:rPr lang="en-US" sz="1400" dirty="0">
                           <a:solidFill>
                             <a:srgbClr val="1F2429"/>
                           </a:solidFill>
@@ -4817,7 +4823,7 @@
                         </a:rPr>
                         <a:t>5</a:t>
                       </a:r>
-                      <a:endParaRPr lang="en-US" sz="1050" dirty="0">
+                      <a:endParaRPr lang="en-US" sz="1400" dirty="0">
                         <a:latin typeface="Calibri" charset="0"/>
                         <a:ea typeface="Calibri" charset="0"/>
                         <a:cs typeface="Calibri" charset="0"/>
@@ -4875,7 +4881,7 @@
                         <a:buNone/>
                       </a:pPr>
                       <a:r>
-                        <a:rPr lang="en-US" sz="1050" dirty="0">
+                        <a:rPr lang="en-US" sz="1400" dirty="0">
                           <a:solidFill>
                             <a:srgbClr val="1F2429"/>
                           </a:solidFill>
@@ -4885,7 +4891,7 @@
                         </a:rPr>
                         <a:t>A101 restored to original balance</a:t>
                       </a:r>
-                      <a:endParaRPr lang="en-US" sz="1050" dirty="0">
+                      <a:endParaRPr lang="en-US" sz="1400" dirty="0">
                         <a:latin typeface="Calibri" charset="0"/>
                         <a:ea typeface="Calibri" charset="0"/>
                         <a:cs typeface="Calibri" charset="0"/>
@@ -4943,7 +4949,7 @@
                         <a:buNone/>
                       </a:pPr>
                       <a:r>
-                        <a:rPr lang="en-US" sz="1050" dirty="0">
+                        <a:rPr lang="en-US" sz="1400" dirty="0">
                           <a:solidFill>
                             <a:srgbClr val="1F2429"/>
                           </a:solidFill>
@@ -4953,7 +4959,7 @@
                         </a:rPr>
                         <a:t>(over)</a:t>
                       </a:r>
-                      <a:endParaRPr lang="en-US" sz="1050" dirty="0">
+                      <a:endParaRPr lang="en-US" sz="1400" dirty="0">
                         <a:latin typeface="Calibri" charset="0"/>
                         <a:ea typeface="Calibri" charset="0"/>
                         <a:cs typeface="Calibri" charset="0"/>
@@ -5142,7 +5148,7 @@
               <a:buNone/>
             </a:pPr>
             <a:r>
-              <a:rPr lang="en-US" sz="1000" u="sng" dirty="0">
+              <a:rPr lang="en-US" sz="1200" u="sng" dirty="0">
                 <a:solidFill>
                   <a:srgbClr val="8A939B"/>
                 </a:solidFill>
@@ -5163,7 +5169,7 @@
               <a:buNone/>
             </a:pPr>
             <a:r>
-              <a:rPr lang="en-US" sz="1000" dirty="0">
+              <a:rPr lang="en-US" sz="1200" dirty="0">
                 <a:solidFill>
                   <a:srgbClr val="8A939B"/>
                 </a:solidFill>
@@ -5171,9 +5177,9 @@
                 <a:ea typeface="Calibri" pitchFamily="34" charset="-122"/>
                 <a:cs typeface="Calibri" pitchFamily="34" charset="-120"/>
               </a:rPr>
-              <a:t>  ·  11</a:t>
-            </a:r>
-            <a:endParaRPr lang="en-US" sz="1000" dirty="0"/>
+              <a:t>  ·  16</a:t>
+            </a:r>
+            <a:endParaRPr lang="en-US" sz="1200" dirty="0"/>
           </a:p>
         </p:txBody>
       </p:sp>
@@ -5256,7 +5262,7 @@
               <a:buNone/>
             </a:pPr>
             <a:r>
-              <a:rPr lang="en-US" sz="1350" b="1" dirty="0">
+              <a:rPr lang="en-US" sz="2000" b="1" dirty="0">
                 <a:solidFill>
                   <a:srgbClr val="1F2429"/>
                 </a:solidFill>
@@ -5266,7 +5272,7 @@
               </a:rPr>
               <a:t>Without Atomicity</a:t>
             </a:r>
-            <a:endParaRPr lang="en-US" sz="1350" dirty="0"/>
+            <a:endParaRPr lang="en-US" sz="2000" dirty="0"/>
           </a:p>
         </p:txBody>
       </p:sp>
@@ -5298,7 +5304,7 @@
               <a:buNone/>
             </a:pPr>
             <a:r>
-              <a:rPr lang="en-US" sz="1050" dirty="0">
+              <a:rPr lang="en-US" sz="1800" dirty="0">
                 <a:solidFill>
                   <a:srgbClr val="6B7480"/>
                 </a:solidFill>
@@ -5308,7 +5314,7 @@
               </a:rPr>
               <a:t>Outcome 2 would leave A101 debited and A205 never credited — PKR 10,000 simply gone, with no record of where it went.</a:t>
             </a:r>
-            <a:endParaRPr lang="en-US" sz="1050" dirty="0"/>
+            <a:endParaRPr lang="en-US" sz="1800" dirty="0"/>
           </a:p>
         </p:txBody>
       </p:sp>
@@ -5391,7 +5397,7 @@
               <a:buNone/>
             </a:pPr>
             <a:r>
-              <a:rPr lang="en-US" sz="1350" b="1" dirty="0">
+              <a:rPr lang="en-US" sz="2000" b="1" dirty="0">
                 <a:solidFill>
                   <a:srgbClr val="1F2429"/>
                 </a:solidFill>
@@ -5401,7 +5407,7 @@
               </a:rPr>
               <a:t>With Atomicity</a:t>
             </a:r>
-            <a:endParaRPr lang="en-US" sz="1350" dirty="0"/>
+            <a:endParaRPr lang="en-US" sz="2000" dirty="0"/>
           </a:p>
         </p:txBody>
       </p:sp>
@@ -5433,7 +5439,7 @@
               <a:buNone/>
             </a:pPr>
             <a:r>
-              <a:rPr lang="en-US" sz="1050" dirty="0">
+              <a:rPr lang="en-US" sz="1800" dirty="0">
                 <a:solidFill>
                   <a:srgbClr val="6B7480"/>
                 </a:solidFill>
@@ -5443,7 +5449,7 @@
               </a:rPr>
               <a:t>The recovery manager detects the incomplete transaction on restart, reverses the debit using the log — the books are exactly as if the transfer never happened.</a:t>
             </a:r>
-            <a:endParaRPr lang="en-US" sz="1050" dirty="0"/>
+            <a:endParaRPr lang="en-US" sz="1800" dirty="0"/>
           </a:p>
         </p:txBody>
       </p:sp>
@@ -5502,7 +5508,7 @@
               <a:buNone/>
             </a:pPr>
             <a:r>
-              <a:rPr lang="en-US" sz="1250" b="1" dirty="0">
+              <a:rPr lang="en-US" sz="1800" b="1" dirty="0">
                 <a:solidFill>
                   <a:srgbClr val="1F2429"/>
                 </a:solidFill>
@@ -5519,7 +5525,7 @@
               <a:buNone/>
             </a:pPr>
             <a:r>
-              <a:rPr lang="en-US" sz="1250" dirty="0">
+              <a:rPr lang="en-US" sz="1800" dirty="0">
                 <a:solidFill>
                   <a:srgbClr val="1F2429"/>
                 </a:solidFill>
@@ -5529,7 +5535,7 @@
               </a:rPr>
               <a:t>even perfect isolation between transactions says nothing about whether this transfer itself gets fully applied or fully reversed. All four ACID properties are independently necessary; none can substitute for another.</a:t>
             </a:r>
-            <a:endParaRPr lang="en-US" sz="1250" dirty="0"/>
+            <a:endParaRPr lang="en-US" sz="1800" dirty="0"/>
           </a:p>
         </p:txBody>
       </p:sp>
@@ -5668,7 +5674,7 @@
               <a:buNone/>
             </a:pPr>
             <a:r>
-              <a:rPr lang="en-US" sz="1000" u="sng" dirty="0">
+              <a:rPr lang="en-US" sz="1200" u="sng" dirty="0">
                 <a:solidFill>
                   <a:srgbClr val="8A939B"/>
                 </a:solidFill>
@@ -5689,7 +5695,7 @@
               <a:buNone/>
             </a:pPr>
             <a:r>
-              <a:rPr lang="en-US" sz="1000" dirty="0">
+              <a:rPr lang="en-US" sz="1200" dirty="0">
                 <a:solidFill>
                   <a:srgbClr val="8A939B"/>
                 </a:solidFill>
@@ -5697,9 +5703,9 @@
                 <a:ea typeface="Calibri" pitchFamily="34" charset="-122"/>
                 <a:cs typeface="Calibri" pitchFamily="34" charset="-120"/>
               </a:rPr>
-              <a:t>  ·  12</a:t>
-            </a:r>
-            <a:endParaRPr lang="en-US" sz="1000" dirty="0"/>
+              <a:t>  ·  17</a:t>
+            </a:r>
+            <a:endParaRPr lang="en-US" sz="1200" dirty="0"/>
           </a:p>
         </p:txBody>
       </p:sp>
@@ -5731,7 +5737,7 @@
               <a:buNone/>
             </a:pPr>
             <a:r>
-              <a:rPr lang="en-US" sz="1400" dirty="0">
+              <a:rPr lang="en-US" sz="1800" dirty="0">
                 <a:solidFill>
                   <a:srgbClr val="1F2429"/>
                 </a:solidFill>
@@ -5741,7 +5747,7 @@
               </a:rPr>
               <a:t>The DBMS subsystem that tracks every transaction's state, enforces atomicity and consistency on commit or abort, and coordinates with two supporting subsystems.</a:t>
             </a:r>
-            <a:endParaRPr lang="en-US" sz="1400" dirty="0"/>
+            <a:endParaRPr lang="en-US" sz="1800" dirty="0"/>
           </a:p>
         </p:txBody>
       </p:sp>
@@ -5753,8 +5759,8 @@
         </p:nvSpPr>
         <p:spPr>
           <a:xfrm>
-            <a:off x="548640" y="2286000"/>
-            <a:ext cx="3413760" cy="1828800"/>
+            <a:off x="548640" y="2286120"/>
+            <a:ext cx="3413760" cy="2194560"/>
           </a:xfrm>
           <a:prstGeom prst="roundRect">
             <a:avLst>
@@ -5787,7 +5793,7 @@
         </p:nvSpPr>
         <p:spPr>
           <a:xfrm>
-            <a:off x="694944" y="2414016"/>
+            <a:off x="694944" y="2414136"/>
             <a:ext cx="310896" cy="91440"/>
           </a:xfrm>
           <a:prstGeom prst="rect">
@@ -5807,7 +5813,7 @@
         </p:nvSpPr>
         <p:spPr>
           <a:xfrm>
-            <a:off x="694944" y="2560320"/>
+            <a:off x="694944" y="2560440"/>
             <a:ext cx="3121152" cy="731520"/>
           </a:xfrm>
           <a:prstGeom prst="rect">
@@ -5824,7 +5830,7 @@
               <a:buNone/>
             </a:pPr>
             <a:r>
-              <a:rPr lang="en-US" sz="1350" b="1" dirty="0">
+              <a:rPr lang="en-US" sz="2000" b="1" dirty="0">
                 <a:solidFill>
                   <a:srgbClr val="1F2429"/>
                 </a:solidFill>
@@ -5834,7 +5840,7 @@
               </a:rPr>
               <a:t>Transaction Manager</a:t>
             </a:r>
-            <a:endParaRPr lang="en-US" sz="1350" dirty="0"/>
+            <a:endParaRPr lang="en-US" sz="2000" dirty="0"/>
           </a:p>
         </p:txBody>
       </p:sp>
@@ -5846,7 +5852,7 @@
         </p:nvSpPr>
         <p:spPr>
           <a:xfrm>
-            <a:off x="694944" y="3255264"/>
+            <a:off x="694944" y="3255384"/>
             <a:ext cx="3121152" cy="749808"/>
           </a:xfrm>
           <a:prstGeom prst="rect">
@@ -5866,7 +5872,7 @@
               <a:buNone/>
             </a:pPr>
             <a:r>
-              <a:rPr lang="en-US" sz="1050" dirty="0">
+              <a:rPr lang="en-US" sz="1800" dirty="0">
                 <a:solidFill>
                   <a:srgbClr val="6B7480"/>
                 </a:solidFill>
@@ -5876,7 +5882,7 @@
               </a:rPr>
               <a:t>Tracks transaction state; enforces commit/abort semantics.</a:t>
             </a:r>
-            <a:endParaRPr lang="en-US" sz="1050" dirty="0"/>
+            <a:endParaRPr lang="en-US" sz="1800" dirty="0"/>
           </a:p>
         </p:txBody>
       </p:sp>
@@ -5888,7 +5894,7 @@
         </p:nvSpPr>
         <p:spPr>
           <a:xfrm>
-            <a:off x="3962400" y="3200400"/>
+            <a:off x="3962400" y="3383400"/>
             <a:ext cx="411480" cy="0"/>
           </a:xfrm>
           <a:prstGeom prst="line">
@@ -5912,8 +5918,8 @@
         </p:nvSpPr>
         <p:spPr>
           <a:xfrm>
-            <a:off x="4373880" y="2286000"/>
-            <a:ext cx="3413760" cy="1828800"/>
+            <a:off x="4373880" y="2286120"/>
+            <a:ext cx="3413760" cy="2194560"/>
           </a:xfrm>
           <a:prstGeom prst="roundRect">
             <a:avLst>
@@ -5946,7 +5952,7 @@
         </p:nvSpPr>
         <p:spPr>
           <a:xfrm>
-            <a:off x="4520184" y="2414016"/>
+            <a:off x="4520184" y="2414136"/>
             <a:ext cx="310896" cy="91440"/>
           </a:xfrm>
           <a:prstGeom prst="rect">
@@ -5966,7 +5972,7 @@
         </p:nvSpPr>
         <p:spPr>
           <a:xfrm>
-            <a:off x="4520184" y="2560320"/>
+            <a:off x="4520184" y="2560440"/>
             <a:ext cx="3121152" cy="731520"/>
           </a:xfrm>
           <a:prstGeom prst="rect">
@@ -5983,7 +5989,7 @@
               <a:buNone/>
             </a:pPr>
             <a:r>
-              <a:rPr lang="en-US" sz="1350" b="1" dirty="0">
+              <a:rPr lang="en-US" sz="2000" b="1" dirty="0">
                 <a:solidFill>
                   <a:srgbClr val="1F2429"/>
                 </a:solidFill>
@@ -5993,7 +5999,7 @@
               </a:rPr>
               <a:t>Concurrency Control</a:t>
             </a:r>
-            <a:endParaRPr lang="en-US" sz="1350" dirty="0"/>
+            <a:endParaRPr lang="en-US" sz="2000" dirty="0"/>
           </a:p>
         </p:txBody>
       </p:sp>
@@ -6005,7 +6011,7 @@
         </p:nvSpPr>
         <p:spPr>
           <a:xfrm>
-            <a:off x="4520184" y="3255264"/>
+            <a:off x="4520184" y="3255384"/>
             <a:ext cx="3121152" cy="749808"/>
           </a:xfrm>
           <a:prstGeom prst="rect">
@@ -6025,7 +6031,7 @@
               <a:buNone/>
             </a:pPr>
             <a:r>
-              <a:rPr lang="en-US" sz="1050" dirty="0">
+              <a:rPr lang="en-US" sz="1800" dirty="0">
                 <a:solidFill>
                   <a:srgbClr val="6B7480"/>
                 </a:solidFill>
@@ -6035,7 +6041,7 @@
               </a:rPr>
               <a:t>Delivers Isolation — Lecture 30.</a:t>
             </a:r>
-            <a:endParaRPr lang="en-US" sz="1050" dirty="0"/>
+            <a:endParaRPr lang="en-US" sz="1800" dirty="0"/>
           </a:p>
         </p:txBody>
       </p:sp>
@@ -6047,7 +6053,7 @@
         </p:nvSpPr>
         <p:spPr>
           <a:xfrm>
-            <a:off x="7787640" y="3200400"/>
+            <a:off x="7787640" y="3383400"/>
             <a:ext cx="411480" cy="0"/>
           </a:xfrm>
           <a:prstGeom prst="line">
@@ -6071,8 +6077,8 @@
         </p:nvSpPr>
         <p:spPr>
           <a:xfrm>
-            <a:off x="8199120" y="2286000"/>
-            <a:ext cx="3413760" cy="1828800"/>
+            <a:off x="8199120" y="2286120"/>
+            <a:ext cx="3413760" cy="2194560"/>
           </a:xfrm>
           <a:prstGeom prst="roundRect">
             <a:avLst>
@@ -6105,7 +6111,7 @@
         </p:nvSpPr>
         <p:spPr>
           <a:xfrm>
-            <a:off x="8345424" y="2414016"/>
+            <a:off x="8345424" y="2414136"/>
             <a:ext cx="310896" cy="91440"/>
           </a:xfrm>
           <a:prstGeom prst="rect">
@@ -6125,7 +6131,7 @@
         </p:nvSpPr>
         <p:spPr>
           <a:xfrm>
-            <a:off x="8345424" y="2560320"/>
+            <a:off x="8345424" y="2560440"/>
             <a:ext cx="3121152" cy="731520"/>
           </a:xfrm>
           <a:prstGeom prst="rect">
@@ -6142,7 +6148,7 @@
               <a:buNone/>
             </a:pPr>
             <a:r>
-              <a:rPr lang="en-US" sz="1350" b="1" dirty="0">
+              <a:rPr lang="en-US" sz="2000" b="1" dirty="0">
                 <a:solidFill>
                   <a:srgbClr val="1F2429"/>
                 </a:solidFill>
@@ -6152,7 +6158,7 @@
               </a:rPr>
               <a:t>Recovery Manager</a:t>
             </a:r>
-            <a:endParaRPr lang="en-US" sz="1350" dirty="0"/>
+            <a:endParaRPr lang="en-US" sz="2000" dirty="0"/>
           </a:p>
         </p:txBody>
       </p:sp>
@@ -6164,7 +6170,7 @@
         </p:nvSpPr>
         <p:spPr>
           <a:xfrm>
-            <a:off x="8345424" y="3255264"/>
+            <a:off x="8345424" y="3255384"/>
             <a:ext cx="3121152" cy="749808"/>
           </a:xfrm>
           <a:prstGeom prst="rect">
@@ -6184,7 +6190,7 @@
               <a:buNone/>
             </a:pPr>
             <a:r>
-              <a:rPr lang="en-US" sz="1050" dirty="0">
+              <a:rPr lang="en-US" sz="1800" dirty="0">
                 <a:solidFill>
                   <a:srgbClr val="6B7480"/>
                 </a:solidFill>
@@ -6194,7 +6200,7 @@
               </a:rPr>
               <a:t>Delivers Durability — Lecture 31.</a:t>
             </a:r>
-            <a:endParaRPr lang="en-US" sz="1050" dirty="0"/>
+            <a:endParaRPr lang="en-US" sz="1800" dirty="0"/>
           </a:p>
         </p:txBody>
       </p:sp>
@@ -6293,13 +6299,13 @@
       </p:sp>
       <p:sp>
         <p:nvSpPr>
-          <p:cNvPr id="4" name="Shape 2"/>
+          <p:cNvPr id="4" name="Shape"/>
           <p:cNvSpPr/>
           <p:nvPr/>
         </p:nvSpPr>
         <p:spPr>
           <a:xfrm>
-            <a:off x="822960" y="2025396"/>
+            <a:off x="822960" y="1832863"/>
             <a:ext cx="109728" cy="109728"/>
           </a:xfrm>
           <a:prstGeom prst="rect">
@@ -6313,14 +6319,14 @@
       </p:sp>
       <p:sp>
         <p:nvSpPr>
-          <p:cNvPr id="5" name="Text 3"/>
+          <p:cNvPr id="5" name="Text"/>
           <p:cNvSpPr txBox="1"/>
           <p:nvPr/>
         </p:nvSpPr>
         <p:spPr>
           <a:xfrm>
-            <a:off x="1143000" y="1600200"/>
-            <a:ext cx="9875520" cy="941832"/>
+            <a:off x="1143000" y="1480000"/>
+            <a:ext cx="9875520" cy="781667"/>
           </a:xfrm>
           <a:prstGeom prst="rect">
             <a:avLst/>
@@ -6336,7 +6342,7 @@
               <a:buNone/>
             </a:pPr>
             <a:r>
-              <a:rPr lang="en-US" sz="1550" dirty="0">
+              <a:rPr lang="en-US" sz="1800" dirty="0">
                 <a:solidFill>
                   <a:srgbClr val="FFFFFF"/>
                 </a:solidFill>
@@ -6346,19 +6352,19 @@
               </a:rPr>
               <a:t>A transaction is a logical unit of work — one or more read/write operations that must succeed or fail as a whole.</a:t>
             </a:r>
-            <a:endParaRPr lang="en-US" sz="1550" dirty="0"/>
-          </a:p>
-        </p:txBody>
-      </p:sp>
-      <p:sp>
-        <p:nvSpPr>
-          <p:cNvPr id="6" name="Shape 4"/>
+            <a:endParaRPr lang="en-US" sz="1800" dirty="0"/>
+          </a:p>
+        </p:txBody>
+      </p:sp>
+      <p:sp>
+        <p:nvSpPr>
+          <p:cNvPr id="6" name="Shape"/>
           <p:cNvSpPr/>
           <p:nvPr/>
         </p:nvSpPr>
         <p:spPr>
           <a:xfrm>
-            <a:off x="822960" y="2967228"/>
+            <a:off x="822960" y="2614530"/>
             <a:ext cx="109728" cy="109728"/>
           </a:xfrm>
           <a:prstGeom prst="rect">
@@ -6372,14 +6378,14 @@
       </p:sp>
       <p:sp>
         <p:nvSpPr>
-          <p:cNvPr id="7" name="Text 5"/>
+          <p:cNvPr id="7" name="Text"/>
           <p:cNvSpPr txBox="1"/>
           <p:nvPr/>
         </p:nvSpPr>
         <p:spPr>
           <a:xfrm>
-            <a:off x="1143000" y="2542032"/>
-            <a:ext cx="9875520" cy="941832"/>
+            <a:off x="1143000" y="2261667"/>
+            <a:ext cx="9875520" cy="781667"/>
           </a:xfrm>
           <a:prstGeom prst="rect">
             <a:avLst/>
@@ -6395,7 +6401,7 @@
               <a:buNone/>
             </a:pPr>
             <a:r>
-              <a:rPr lang="en-US" sz="1550" dirty="0">
+              <a:rPr lang="en-US" sz="1800" dirty="0">
                 <a:solidFill>
                   <a:srgbClr val="FFFFFF"/>
                 </a:solidFill>
@@ -6405,19 +6411,19 @@
               </a:rPr>
               <a:t>A transaction moves through well-defined states: Active, Partially Committed, and either Committed or (via Failed) Aborted.</a:t>
             </a:r>
-            <a:endParaRPr lang="en-US" sz="1550" dirty="0"/>
-          </a:p>
-        </p:txBody>
-      </p:sp>
-      <p:sp>
-        <p:nvSpPr>
-          <p:cNvPr id="8" name="Shape 6"/>
+            <a:endParaRPr lang="en-US" sz="1800" dirty="0"/>
+          </a:p>
+        </p:txBody>
+      </p:sp>
+      <p:sp>
+        <p:nvSpPr>
+          <p:cNvPr id="8" name="Shape"/>
           <p:cNvSpPr/>
           <p:nvPr/>
         </p:nvSpPr>
         <p:spPr>
           <a:xfrm>
-            <a:off x="822960" y="3909060"/>
+            <a:off x="822960" y="3396197"/>
             <a:ext cx="109728" cy="109728"/>
           </a:xfrm>
           <a:prstGeom prst="rect">
@@ -6431,14 +6437,14 @@
       </p:sp>
       <p:sp>
         <p:nvSpPr>
-          <p:cNvPr id="9" name="Text 7"/>
+          <p:cNvPr id="9" name="Text"/>
           <p:cNvSpPr txBox="1"/>
           <p:nvPr/>
         </p:nvSpPr>
         <p:spPr>
           <a:xfrm>
-            <a:off x="1143000" y="3483864"/>
-            <a:ext cx="9875520" cy="941832"/>
+            <a:off x="1143000" y="3043334"/>
+            <a:ext cx="9875520" cy="781667"/>
           </a:xfrm>
           <a:prstGeom prst="rect">
             <a:avLst/>
@@ -6454,7 +6460,7 @@
               <a:buNone/>
             </a:pPr>
             <a:r>
-              <a:rPr lang="en-US" sz="1550" dirty="0">
+              <a:rPr lang="en-US" sz="1800" dirty="0">
                 <a:solidFill>
                   <a:srgbClr val="FFFFFF"/>
                 </a:solidFill>
@@ -6464,19 +6470,19 @@
               </a:rPr>
               <a:t>ACID — Atomicity, Consistency, Isolation, Durability — is the precise definition of a correctly executed transaction.</a:t>
             </a:r>
-            <a:endParaRPr lang="en-US" sz="1550" dirty="0"/>
-          </a:p>
-        </p:txBody>
-      </p:sp>
-      <p:sp>
-        <p:nvSpPr>
-          <p:cNvPr id="10" name="Shape 8"/>
+            <a:endParaRPr lang="en-US" sz="1800" dirty="0"/>
+          </a:p>
+        </p:txBody>
+      </p:sp>
+      <p:sp>
+        <p:nvSpPr>
+          <p:cNvPr id="10" name="Shape"/>
           <p:cNvSpPr/>
           <p:nvPr/>
         </p:nvSpPr>
         <p:spPr>
           <a:xfrm>
-            <a:off x="822960" y="4850892"/>
+            <a:off x="822960" y="4177864"/>
             <a:ext cx="109728" cy="109728"/>
           </a:xfrm>
           <a:prstGeom prst="rect">
@@ -6490,14 +6496,14 @@
       </p:sp>
       <p:sp>
         <p:nvSpPr>
-          <p:cNvPr id="11" name="Text 9"/>
+          <p:cNvPr id="11" name="Text"/>
           <p:cNvSpPr txBox="1"/>
           <p:nvPr/>
         </p:nvSpPr>
         <p:spPr>
           <a:xfrm>
-            <a:off x="1143000" y="4425696"/>
-            <a:ext cx="9875520" cy="941832"/>
+            <a:off x="1143000" y="3825001"/>
+            <a:ext cx="9875520" cy="781667"/>
           </a:xfrm>
           <a:prstGeom prst="rect">
             <a:avLst/>
@@ -6513,7 +6519,7 @@
               <a:buNone/>
             </a:pPr>
             <a:r>
-              <a:rPr lang="en-US" sz="1550" dirty="0">
+              <a:rPr lang="en-US" sz="1800" dirty="0">
                 <a:solidFill>
                   <a:srgbClr val="FFFFFF"/>
                 </a:solidFill>
@@ -6523,19 +6529,19 @@
               </a:rPr>
               <a:t>The bank-transfer trace showed what atomicity prevents: without it, a crash mid-transfer silently destroys money.</a:t>
             </a:r>
-            <a:endParaRPr lang="en-US" sz="1550" dirty="0"/>
-          </a:p>
-        </p:txBody>
-      </p:sp>
-      <p:sp>
-        <p:nvSpPr>
-          <p:cNvPr id="12" name="Shape 10"/>
+            <a:endParaRPr lang="en-US" sz="1800" dirty="0"/>
+          </a:p>
+        </p:txBody>
+      </p:sp>
+      <p:sp>
+        <p:nvSpPr>
+          <p:cNvPr id="12" name="Shape"/>
           <p:cNvSpPr/>
           <p:nvPr/>
         </p:nvSpPr>
         <p:spPr>
           <a:xfrm>
-            <a:off x="822960" y="5792724"/>
+            <a:off x="822960" y="4959531"/>
             <a:ext cx="109728" cy="109728"/>
           </a:xfrm>
           <a:prstGeom prst="rect">
@@ -6549,14 +6555,14 @@
       </p:sp>
       <p:sp>
         <p:nvSpPr>
-          <p:cNvPr id="13" name="Text 11"/>
+          <p:cNvPr id="13" name="Text"/>
           <p:cNvSpPr txBox="1"/>
           <p:nvPr/>
         </p:nvSpPr>
         <p:spPr>
           <a:xfrm>
-            <a:off x="1143000" y="5367528"/>
-            <a:ext cx="9875520" cy="941832"/>
+            <a:off x="1143000" y="4606668"/>
+            <a:ext cx="9875520" cy="781667"/>
           </a:xfrm>
           <a:prstGeom prst="rect">
             <a:avLst/>
@@ -6572,7 +6578,7 @@
               <a:buNone/>
             </a:pPr>
             <a:r>
-              <a:rPr lang="en-US" sz="1550" dirty="0">
+              <a:rPr lang="en-US" sz="1800" dirty="0">
                 <a:solidFill>
                   <a:srgbClr val="FFFFFF"/>
                 </a:solidFill>
@@ -6582,7 +6588,66 @@
               </a:rPr>
               <a:t>Transaction management coordinates concurrency control and the recovery manager to deliver the full ACID guarantee.</a:t>
             </a:r>
-            <a:endParaRPr lang="en-US" sz="1550" dirty="0"/>
+            <a:endParaRPr lang="en-US" sz="1800" dirty="0"/>
+          </a:p>
+        </p:txBody>
+      </p:sp>
+      <p:sp>
+        <p:nvSpPr>
+          <p:cNvPr id="14" name="Shape"/>
+          <p:cNvSpPr/>
+          <p:nvPr/>
+        </p:nvSpPr>
+        <p:spPr>
+          <a:xfrm>
+            <a:off x="822960" y="5741198"/>
+            <a:ext cx="109728" cy="109728"/>
+          </a:xfrm>
+          <a:prstGeom prst="rect">
+            <a:avLst/>
+          </a:prstGeom>
+          <a:solidFill>
+            <a:srgbClr val="E8A33D"/>
+          </a:solidFill>
+          <a:ln/>
+        </p:spPr>
+      </p:sp>
+      <p:sp>
+        <p:nvSpPr>
+          <p:cNvPr id="15" name="Text"/>
+          <p:cNvSpPr txBox="1"/>
+          <p:nvPr/>
+        </p:nvSpPr>
+        <p:spPr>
+          <a:xfrm>
+            <a:off x="1143000" y="5388335"/>
+            <a:ext cx="9875520" cy="781667"/>
+          </a:xfrm>
+          <a:prstGeom prst="rect">
+            <a:avLst/>
+          </a:prstGeom>
+          <a:noFill/>
+          <a:ln/>
+        </p:spPr>
+        <p:txBody>
+          <a:bodyPr wrap="square" rtlCol="0" anchor="ctr"/>
+          <a:lstStyle/>
+          <a:p>
+            <a:pPr indent="0" marL="0">
+              <a:buNone/>
+            </a:pPr>
+            <a:r>
+              <a:rPr lang="en-US" sz="1800" dirty="0">
+                <a:solidFill>
+                  <a:srgbClr val="FFFFFF"/>
+                </a:solidFill>
+                <a:latin typeface="Calibri" pitchFamily="34" charset="0"/>
+                <a:ea typeface="Calibri" pitchFamily="34" charset="-122"/>
+                <a:cs typeface="Calibri" pitchFamily="34" charset="-120"/>
+              </a:rPr>
+              <a:t>All four ACID properties were demonstrated with concrete violation scenarios, not just defined.</a:t>
+            </a:r>
+            <a:endParaRPr lang="en-US" sz="1800" dirty="0"/>
           </a:p>
         </p:txBody>
       </p:sp>
@@ -6611,7 +6676,7 @@
               <a:buNone/>
             </a:pPr>
             <a:r>
-              <a:rPr lang="en-US" sz="1000" u="sng" dirty="0">
+              <a:rPr lang="en-US" sz="1200" u="sng" dirty="0">
                 <a:solidFill>
                   <a:srgbClr val="8A939B"/>
                 </a:solidFill>
@@ -6632,7 +6697,7 @@
               <a:buNone/>
             </a:pPr>
             <a:r>
-              <a:rPr lang="en-US" sz="1000" dirty="0">
+              <a:rPr lang="en-US" sz="1200" dirty="0">
                 <a:solidFill>
                   <a:srgbClr val="8A939B"/>
                 </a:solidFill>
@@ -6640,9 +6705,6047 @@
                 <a:ea typeface="Calibri" pitchFamily="34" charset="-122"/>
                 <a:cs typeface="Calibri" pitchFamily="34" charset="-120"/>
               </a:rPr>
+              <a:t>  ·  19</a:t>
+            </a:r>
+            <a:endParaRPr lang="en-US" sz="1200" dirty="0"/>
+          </a:p>
+        </p:txBody>
+      </p:sp>
+    </p:spTree>
+  </p:cSld>
+  <p:clrMapOvr>
+    <a:masterClrMapping/>
+  </p:clrMapOvr>
+</p:sld>
+</file>
+
+<file path=ppt/slides/slide14.xml><?xml version="1.0" encoding="utf-8"?>
+<p:sld xmlns:a="http://schemas.openxmlformats.org/drawingml/2006/main" xmlns:r="http://schemas.openxmlformats.org/officeDocument/2006/relationships" xmlns:p="http://schemas.openxmlformats.org/presentationml/2006/main">
+  <p:cSld name="Slide 14">
+    <p:bg>
+      <p:bgPr>
+        <a:solidFill>
+          <a:srgbClr val="F7F8F9"/>
+        </a:solidFill>
+      </p:bgPr>
+    </p:bg>
+    <p:spTree>
+      <p:nvGrpSpPr>
+        <p:cNvPr id="1" name=""/>
+        <p:cNvGrpSpPr/>
+        <p:nvPr/>
+      </p:nvGrpSpPr>
+      <p:grpSpPr>
+        <a:xfrm>
+          <a:off x="0" y="0"/>
+          <a:ext cx="0" cy="0"/>
+          <a:chOff x="0" y="0"/>
+          <a:chExt cx="0" cy="0"/>
+        </a:xfrm>
+      </p:grpSpPr>
+      <p:sp>
+        <p:nvSpPr>
+          <p:cNvPr id="2" name="Text 0"/>
+          <p:cNvSpPr txBox="1"/>
+          <p:nvPr/>
+        </p:nvSpPr>
+        <p:spPr>
+          <a:xfrm>
+            <a:off x="548640" y="320040"/>
+            <a:ext cx="9144000" cy="292608"/>
+          </a:xfrm>
+          <a:prstGeom prst="rect">
+            <a:avLst/>
+          </a:prstGeom>
+          <a:noFill/>
+          <a:ln/>
+        </p:spPr>
+        <p:txBody>
+          <a:bodyPr wrap="square" rtlCol="0" anchor="ctr"/>
+          <a:lstStyle/>
+          <a:p>
+            <a:pPr algn="l" indent="0" marL="0">
+              <a:buNone/>
+            </a:pPr>
+            <a:r>
+              <a:rPr lang="en-US" sz="1200" b="1" dirty="0" spc="150" kern="0">
+                <a:solidFill>
+                  <a:srgbClr val="8B7FD9"/>
+                </a:solidFill>
+                <a:latin typeface="Calibri" pitchFamily="34" charset="0"/>
+                <a:ea typeface="Calibri" pitchFamily="34" charset="-122"/>
+                <a:cs typeface="Calibri" pitchFamily="34" charset="-120"/>
+              </a:rPr>
+              <a:t>ISOLATION, VIOLATED</a:t>
+            </a:r>
+            <a:endParaRPr lang="en-US" sz="1200" dirty="0"/>
+          </a:p>
+        </p:txBody>
+      </p:sp>
+      <p:sp>
+        <p:nvSpPr>
+          <p:cNvPr id="3" name="Text 1"/>
+          <p:cNvSpPr txBox="1"/>
+          <p:nvPr/>
+        </p:nvSpPr>
+        <p:spPr>
+          <a:xfrm>
+            <a:off x="548640" y="566928"/>
+            <a:ext cx="11064240" cy="640080"/>
+          </a:xfrm>
+          <a:prstGeom prst="rect">
+            <a:avLst/>
+          </a:prstGeom>
+          <a:noFill/>
+          <a:ln/>
+        </p:spPr>
+        <p:txBody>
+          <a:bodyPr wrap="square" rtlCol="0" anchor="ctr"/>
+          <a:lstStyle/>
+          <a:p>
+            <a:pPr algn="l" indent="0" marL="0">
+              <a:buNone/>
+            </a:pPr>
+            <a:r>
+              <a:rPr lang="en-US" sz="2500" b="1" dirty="0">
+                <a:solidFill>
+                  <a:srgbClr val="1F2429"/>
+                </a:solidFill>
+                <a:latin typeface="Calibri" pitchFamily="34" charset="0"/>
+                <a:ea typeface="Calibri" pitchFamily="34" charset="-122"/>
+                <a:cs typeface="Calibri" pitchFamily="34" charset="-120"/>
+              </a:rPr>
+              <a:t>Isolation Violation: A Lost Update</a:t>
+            </a:r>
+            <a:endParaRPr lang="en-US" sz="2000" dirty="0"/>
+          </a:p>
+        </p:txBody>
+      </p:sp>
+      <p:sp>
+        <p:nvSpPr>
+          <p:cNvPr id="4" name="Text 2"/>
+          <p:cNvSpPr txBox="1"/>
+          <p:nvPr/>
+        </p:nvSpPr>
+        <p:spPr>
+          <a:xfrm>
+            <a:off x="9951415" y="6455664"/>
+            <a:ext cx="2011680" cy="292608"/>
+          </a:xfrm>
+          <a:prstGeom prst="rect">
+            <a:avLst/>
+          </a:prstGeom>
+          <a:noFill/>
+          <a:ln/>
+        </p:spPr>
+        <p:txBody>
+          <a:bodyPr wrap="square" rtlCol="0" anchor="ctr"/>
+          <a:lstStyle/>
+          <a:p>
+            <a:pPr algn="r" indent="0" marL="0">
+              <a:buNone/>
+            </a:pPr>
+            <a:r>
+              <a:rPr lang="en-US" sz="1200" u="sng" dirty="0">
+                <a:solidFill>
+                  <a:srgbClr val="8A939B"/>
+                </a:solidFill>
+                <a:latin typeface="Calibri" pitchFamily="34" charset="0"/>
+                <a:ea typeface="Calibri" pitchFamily="34" charset="-122"/>
+                <a:cs typeface="Calibri" pitchFamily="34" charset="-120"/>
+                <a:hlinkClick r:id="rId1" invalidUrl="" action="" tgtFrame="" tooltip="" history="1" highlightClick="0" endSnd="0">
+                  <a:extLst>
+                    <a:ext uri="{A12FA001-AC4F-418D-AE19-62706E023703}">
+                      <ahyp:hlinkClr xmlns:ahyp="http://schemas.microsoft.com/office/drawing/2018/hyperlinkcolor" val="tx"/>
+                    </a:ext>
+                  </a:extLst>
+                </a:hlinkClick>
+              </a:rPr>
+              <a:t>cuinotes.com</a:t>
+            </a:r>
+            <a:pPr algn="r" indent="0" marL="0">
+              <a:buNone/>
+            </a:pPr>
+            <a:r>
+              <a:rPr lang="en-US" sz="1200" dirty="0">
+                <a:solidFill>
+                  <a:srgbClr val="8A939B"/>
+                </a:solidFill>
+                <a:latin typeface="Calibri" pitchFamily="34" charset="0"/>
+                <a:ea typeface="Calibri" pitchFamily="34" charset="-122"/>
+                <a:cs typeface="Calibri" pitchFamily="34" charset="-120"/>
+              </a:rPr>
+              <a:t>  ·  10</a:t>
+            </a:r>
+            <a:endParaRPr lang="en-US" sz="1200" dirty="0"/>
+          </a:p>
+        </p:txBody>
+      </p:sp>
+      <p:sp>
+        <p:nvSpPr>
+          <p:cNvPr id="5" name="Text"/>
+          <p:cNvSpPr txBox="1"/>
+          <p:nvPr/>
+        </p:nvSpPr>
+        <p:spPr>
+          <a:xfrm>
+            <a:off x="548640" y="1240000"/>
+            <a:ext cx="11064240" cy="380000"/>
+          </a:xfrm>
+          <a:prstGeom prst="rect">
+            <a:avLst/>
+          </a:prstGeom>
+          <a:noFill/>
+          <a:ln/>
+        </p:spPr>
+        <p:txBody>
+          <a:bodyPr wrap="square" rtlCol="0" anchor="t"/>
+          <a:lstStyle/>
+          <a:p>
+            <a:pPr algn="l" indent="0" marL="0">
+              <a:lnSpc>
+                <a:spcPct val="120000"/>
+              </a:lnSpc>
+              <a:buNone/>
+            </a:pPr>
+            <a:r>
+              <a:rPr lang="en-US" sz="1800" dirty="0">
+                <a:solidFill>
+                  <a:srgbClr val="1F2429"/>
+                </a:solidFill>
+                <a:latin typeface="Calibri" pitchFamily="34" charset="0"/>
+                <a:ea typeface="Calibri" pitchFamily="34" charset="-122"/>
+                <a:cs typeface="Calibri" pitchFamily="34" charset="-120"/>
+              </a:rPr>
+              <a:t>A101 starts at 1000. T1 deposits 100; T2 deposits 50. Run serially, the correct final balance is 1150.</a:t>
+            </a:r>
+            <a:endParaRPr lang="en-US" sz="1800" dirty="0"/>
+          </a:p>
+        </p:txBody>
+      </p:sp>
+      <p:graphicFrame>
+        <p:nvGraphicFramePr>
+          <p:cNvPr id="6" name="Table"/>
+          <p:cNvGraphicFramePr>
+            <a:graphicFrameLocks noGrp="1"/>
+          </p:cNvGraphicFramePr>
+          <p:nvPr/>
+        </p:nvGraphicFramePr>
+        <p:xfrm>
+          <a:off x="548640" y="1680000"/>
+          <a:ext cx="11064240" cy="3605000"/>
+        </p:xfrm>
+        <a:graphic>
+          <a:graphicData uri="http://schemas.openxmlformats.org/drawingml/2006/table">
+            <a:tbl>
+              <a:tblPr/>
+              <a:tblGrid>
+                <a:gridCol w="850000"/>
+                <a:gridCol w="4300000"/>
+                <a:gridCol w="4300000"/>
+                <a:gridCol w="1614240"/>
+              </a:tblGrid>
+              <a:tr h="515000">
+                <a:tc>
+                  <a:txBody>
+                    <a:bodyPr/>
+                    <a:lstStyle/>
+                    <a:p>
+                      <a:pPr algn="l" indent="0" marL="0">
+                        <a:buNone/>
+                      </a:pPr>
+                      <a:r>
+                        <a:rPr lang="en-US" sz="1400" b="1" dirty="0">
+                          <a:solidFill>
+                            <a:srgbClr val="FFFFFF"/>
+                          </a:solidFill>
+                          <a:latin typeface="Calibri" pitchFamily="34" charset="0"/>
+                          <a:ea typeface="Calibri" pitchFamily="34" charset="-122"/>
+                          <a:cs typeface="Calibri" pitchFamily="34" charset="-120"/>
+                        </a:rPr>
+                        <a:t>Time</a:t>
+                      </a:r>
+                      <a:endParaRPr lang="en-US" sz="1400" dirty="0">
+                        <a:latin typeface="Calibri" pitchFamily="34" charset="0"/>
+                        <a:ea typeface="Calibri" pitchFamily="34" charset="-122"/>
+                        <a:cs typeface="Calibri" pitchFamily="34" charset="-120"/>
+                      </a:endParaRPr>
+                    </a:p>
+                  </a:txBody>
+                  <a:tcPr marL="91440" marR="91440" marT="45720" marB="45720" anchor="ctr">
+                    <a:lnL w="9525" cap="flat" cmpd="sng" algn="ctr">
+                      <a:solidFill>
+                        <a:srgbClr val="E1E4E8"/>
+                      </a:solidFill>
+                      <a:prstDash val="solid"/>
+                      <a:round/>
+                      <a:headEnd type="none" w="med" len="med"/>
+                      <a:tailEnd type="none" w="med" len="med"/>
+                    </a:lnL>
+                    <a:lnR w="9525" cap="flat" cmpd="sng" algn="ctr">
+                      <a:solidFill>
+                        <a:srgbClr val="E1E4E8"/>
+                      </a:solidFill>
+                      <a:prstDash val="solid"/>
+                      <a:round/>
+                      <a:headEnd type="none" w="med" len="med"/>
+                      <a:tailEnd type="none" w="med" len="med"/>
+                    </a:lnR>
+                    <a:lnT w="9525" cap="flat" cmpd="sng" algn="ctr">
+                      <a:solidFill>
+                        <a:srgbClr val="E1E4E8"/>
+                      </a:solidFill>
+                      <a:prstDash val="solid"/>
+                      <a:round/>
+                      <a:headEnd type="none" w="med" len="med"/>
+                      <a:tailEnd type="none" w="med" len="med"/>
+                    </a:lnT>
+                    <a:lnB w="9525" cap="flat" cmpd="sng" algn="ctr">
+                      <a:solidFill>
+                        <a:srgbClr val="E1E4E8"/>
+                      </a:solidFill>
+                      <a:prstDash val="solid"/>
+                      <a:round/>
+                      <a:headEnd type="none" w="med" len="med"/>
+                      <a:tailEnd type="none" w="med" len="med"/>
+                    </a:lnB>
+                    <a:solidFill>
+                      <a:srgbClr val="B5761F"/>
+                    </a:solidFill>
+                  </a:tcPr>
+                </a:tc>
+                <a:tc>
+                  <a:txBody>
+                    <a:bodyPr/>
+                    <a:lstStyle/>
+                    <a:p>
+                      <a:pPr algn="l" indent="0" marL="0">
+                        <a:buNone/>
+                      </a:pPr>
+                      <a:r>
+                        <a:rPr lang="en-US" sz="1400" b="1" dirty="0">
+                          <a:solidFill>
+                            <a:srgbClr val="FFFFFF"/>
+                          </a:solidFill>
+                          <a:latin typeface="Calibri" pitchFamily="34" charset="0"/>
+                          <a:ea typeface="Calibri" pitchFamily="34" charset="-122"/>
+                          <a:cs typeface="Calibri" pitchFamily="34" charset="-120"/>
+                        </a:rPr>
+                        <a:t>T1</a:t>
+                      </a:r>
+                      <a:endParaRPr lang="en-US" sz="1400" dirty="0">
+                        <a:latin typeface="Calibri" pitchFamily="34" charset="0"/>
+                        <a:ea typeface="Calibri" pitchFamily="34" charset="-122"/>
+                        <a:cs typeface="Calibri" pitchFamily="34" charset="-120"/>
+                      </a:endParaRPr>
+                    </a:p>
+                  </a:txBody>
+                  <a:tcPr marL="91440" marR="91440" marT="45720" marB="45720" anchor="ctr">
+                    <a:lnL w="9525" cap="flat" cmpd="sng" algn="ctr">
+                      <a:solidFill>
+                        <a:srgbClr val="E1E4E8"/>
+                      </a:solidFill>
+                      <a:prstDash val="solid"/>
+                      <a:round/>
+                      <a:headEnd type="none" w="med" len="med"/>
+                      <a:tailEnd type="none" w="med" len="med"/>
+                    </a:lnL>
+                    <a:lnR w="9525" cap="flat" cmpd="sng" algn="ctr">
+                      <a:solidFill>
+                        <a:srgbClr val="E1E4E8"/>
+                      </a:solidFill>
+                      <a:prstDash val="solid"/>
+                      <a:round/>
+                      <a:headEnd type="none" w="med" len="med"/>
+                      <a:tailEnd type="none" w="med" len="med"/>
+                    </a:lnR>
+                    <a:lnT w="9525" cap="flat" cmpd="sng" algn="ctr">
+                      <a:solidFill>
+                        <a:srgbClr val="E1E4E8"/>
+                      </a:solidFill>
+                      <a:prstDash val="solid"/>
+                      <a:round/>
+                      <a:headEnd type="none" w="med" len="med"/>
+                      <a:tailEnd type="none" w="med" len="med"/>
+                    </a:lnT>
+                    <a:lnB w="9525" cap="flat" cmpd="sng" algn="ctr">
+                      <a:solidFill>
+                        <a:srgbClr val="E1E4E8"/>
+                      </a:solidFill>
+                      <a:prstDash val="solid"/>
+                      <a:round/>
+                      <a:headEnd type="none" w="med" len="med"/>
+                      <a:tailEnd type="none" w="med" len="med"/>
+                    </a:lnB>
+                    <a:solidFill>
+                      <a:srgbClr val="B5761F"/>
+                    </a:solidFill>
+                  </a:tcPr>
+                </a:tc>
+                <a:tc>
+                  <a:txBody>
+                    <a:bodyPr/>
+                    <a:lstStyle/>
+                    <a:p>
+                      <a:pPr algn="l" indent="0" marL="0">
+                        <a:buNone/>
+                      </a:pPr>
+                      <a:r>
+                        <a:rPr lang="en-US" sz="1400" b="1" dirty="0">
+                          <a:solidFill>
+                            <a:srgbClr val="FFFFFF"/>
+                          </a:solidFill>
+                          <a:latin typeface="Calibri" pitchFamily="34" charset="0"/>
+                          <a:ea typeface="Calibri" pitchFamily="34" charset="-122"/>
+                          <a:cs typeface="Calibri" pitchFamily="34" charset="-120"/>
+                        </a:rPr>
+                        <a:t>T2</a:t>
+                      </a:r>
+                      <a:endParaRPr lang="en-US" sz="1400" dirty="0">
+                        <a:latin typeface="Calibri" pitchFamily="34" charset="0"/>
+                        <a:ea typeface="Calibri" pitchFamily="34" charset="-122"/>
+                        <a:cs typeface="Calibri" pitchFamily="34" charset="-120"/>
+                      </a:endParaRPr>
+                    </a:p>
+                  </a:txBody>
+                  <a:tcPr marL="91440" marR="91440" marT="45720" marB="45720" anchor="ctr">
+                    <a:lnL w="9525" cap="flat" cmpd="sng" algn="ctr">
+                      <a:solidFill>
+                        <a:srgbClr val="E1E4E8"/>
+                      </a:solidFill>
+                      <a:prstDash val="solid"/>
+                      <a:round/>
+                      <a:headEnd type="none" w="med" len="med"/>
+                      <a:tailEnd type="none" w="med" len="med"/>
+                    </a:lnL>
+                    <a:lnR w="9525" cap="flat" cmpd="sng" algn="ctr">
+                      <a:solidFill>
+                        <a:srgbClr val="E1E4E8"/>
+                      </a:solidFill>
+                      <a:prstDash val="solid"/>
+                      <a:round/>
+                      <a:headEnd type="none" w="med" len="med"/>
+                      <a:tailEnd type="none" w="med" len="med"/>
+                    </a:lnR>
+                    <a:lnT w="9525" cap="flat" cmpd="sng" algn="ctr">
+                      <a:solidFill>
+                        <a:srgbClr val="E1E4E8"/>
+                      </a:solidFill>
+                      <a:prstDash val="solid"/>
+                      <a:round/>
+                      <a:headEnd type="none" w="med" len="med"/>
+                      <a:tailEnd type="none" w="med" len="med"/>
+                    </a:lnT>
+                    <a:lnB w="9525" cap="flat" cmpd="sng" algn="ctr">
+                      <a:solidFill>
+                        <a:srgbClr val="E1E4E8"/>
+                      </a:solidFill>
+                      <a:prstDash val="solid"/>
+                      <a:round/>
+                      <a:headEnd type="none" w="med" len="med"/>
+                      <a:tailEnd type="none" w="med" len="med"/>
+                    </a:lnB>
+                    <a:solidFill>
+                      <a:srgbClr val="B5761F"/>
+                    </a:solidFill>
+                  </a:tcPr>
+                </a:tc>
+                <a:tc>
+                  <a:txBody>
+                    <a:bodyPr/>
+                    <a:lstStyle/>
+                    <a:p>
+                      <a:pPr algn="l" indent="0" marL="0">
+                        <a:buNone/>
+                      </a:pPr>
+                      <a:r>
+                        <a:rPr lang="en-US" sz="1400" b="1" dirty="0">
+                          <a:solidFill>
+                            <a:srgbClr val="FFFFFF"/>
+                          </a:solidFill>
+                          <a:latin typeface="Calibri" pitchFamily="34" charset="0"/>
+                          <a:ea typeface="Calibri" pitchFamily="34" charset="-122"/>
+                          <a:cs typeface="Calibri" pitchFamily="34" charset="-120"/>
+                        </a:rPr>
+                        <a:t>balance</a:t>
+                      </a:r>
+                      <a:endParaRPr lang="en-US" sz="1400" dirty="0">
+                        <a:latin typeface="Calibri" pitchFamily="34" charset="0"/>
+                        <a:ea typeface="Calibri" pitchFamily="34" charset="-122"/>
+                        <a:cs typeface="Calibri" pitchFamily="34" charset="-120"/>
+                      </a:endParaRPr>
+                    </a:p>
+                  </a:txBody>
+                  <a:tcPr marL="91440" marR="91440" marT="45720" marB="45720" anchor="ctr">
+                    <a:lnL w="9525" cap="flat" cmpd="sng" algn="ctr">
+                      <a:solidFill>
+                        <a:srgbClr val="E1E4E8"/>
+                      </a:solidFill>
+                      <a:prstDash val="solid"/>
+                      <a:round/>
+                      <a:headEnd type="none" w="med" len="med"/>
+                      <a:tailEnd type="none" w="med" len="med"/>
+                    </a:lnL>
+                    <a:lnR w="9525" cap="flat" cmpd="sng" algn="ctr">
+                      <a:solidFill>
+                        <a:srgbClr val="E1E4E8"/>
+                      </a:solidFill>
+                      <a:prstDash val="solid"/>
+                      <a:round/>
+                      <a:headEnd type="none" w="med" len="med"/>
+                      <a:tailEnd type="none" w="med" len="med"/>
+                    </a:lnR>
+                    <a:lnT w="9525" cap="flat" cmpd="sng" algn="ctr">
+                      <a:solidFill>
+                        <a:srgbClr val="E1E4E8"/>
+                      </a:solidFill>
+                      <a:prstDash val="solid"/>
+                      <a:round/>
+                      <a:headEnd type="none" w="med" len="med"/>
+                      <a:tailEnd type="none" w="med" len="med"/>
+                    </a:lnT>
+                    <a:lnB w="9525" cap="flat" cmpd="sng" algn="ctr">
+                      <a:solidFill>
+                        <a:srgbClr val="E1E4E8"/>
+                      </a:solidFill>
+                      <a:prstDash val="solid"/>
+                      <a:round/>
+                      <a:headEnd type="none" w="med" len="med"/>
+                      <a:tailEnd type="none" w="med" len="med"/>
+                    </a:lnB>
+                    <a:solidFill>
+                      <a:srgbClr val="B5761F"/>
+                    </a:solidFill>
+                  </a:tcPr>
+                </a:tc>
+              </a:tr>
+              <a:tr h="515000">
+                <a:tc>
+                  <a:txBody>
+                    <a:bodyPr/>
+                    <a:lstStyle/>
+                    <a:p>
+                      <a:pPr algn="l" indent="0" marL="0">
+                        <a:buNone/>
+                      </a:pPr>
+                      <a:r>
+                        <a:rPr lang="en-US" sz="1400" dirty="0">
+                          <a:solidFill>
+                            <a:srgbClr val="1F2429"/>
+                          </a:solidFill>
+                          <a:latin typeface="Calibri" pitchFamily="34" charset="0"/>
+                          <a:ea typeface="Calibri" pitchFamily="34" charset="-122"/>
+                          <a:cs typeface="Calibri" pitchFamily="34" charset="-120"/>
+                        </a:rPr>
+                        <a:t>t1</a:t>
+                      </a:r>
+                      <a:endParaRPr lang="en-US" sz="1400" dirty="0">
+                        <a:latin typeface="Calibri" pitchFamily="34" charset="0"/>
+                        <a:ea typeface="Calibri" pitchFamily="34" charset="-122"/>
+                        <a:cs typeface="Calibri" pitchFamily="34" charset="-120"/>
+                      </a:endParaRPr>
+                    </a:p>
+                  </a:txBody>
+                  <a:tcPr marL="91440" marR="91440" marT="45720" marB="45720" anchor="ctr">
+                    <a:lnL w="9525" cap="flat" cmpd="sng" algn="ctr">
+                      <a:solidFill>
+                        <a:srgbClr val="E1E4E8"/>
+                      </a:solidFill>
+                      <a:prstDash val="solid"/>
+                      <a:round/>
+                      <a:headEnd type="none" w="med" len="med"/>
+                      <a:tailEnd type="none" w="med" len="med"/>
+                    </a:lnL>
+                    <a:lnR w="9525" cap="flat" cmpd="sng" algn="ctr">
+                      <a:solidFill>
+                        <a:srgbClr val="E1E4E8"/>
+                      </a:solidFill>
+                      <a:prstDash val="solid"/>
+                      <a:round/>
+                      <a:headEnd type="none" w="med" len="med"/>
+                      <a:tailEnd type="none" w="med" len="med"/>
+                    </a:lnR>
+                    <a:lnT w="9525" cap="flat" cmpd="sng" algn="ctr">
+                      <a:solidFill>
+                        <a:srgbClr val="E1E4E8"/>
+                      </a:solidFill>
+                      <a:prstDash val="solid"/>
+                      <a:round/>
+                      <a:headEnd type="none" w="med" len="med"/>
+                      <a:tailEnd type="none" w="med" len="med"/>
+                    </a:lnT>
+                    <a:lnB w="9525" cap="flat" cmpd="sng" algn="ctr">
+                      <a:solidFill>
+                        <a:srgbClr val="E1E4E8"/>
+                      </a:solidFill>
+                      <a:prstDash val="solid"/>
+                      <a:round/>
+                      <a:headEnd type="none" w="med" len="med"/>
+                      <a:tailEnd type="none" w="med" len="med"/>
+                    </a:lnB>
+                    <a:solidFill>
+                      <a:srgbClr val="FFFFFF"/>
+                    </a:solidFill>
+                  </a:tcPr>
+                </a:tc>
+                <a:tc>
+                  <a:txBody>
+                    <a:bodyPr/>
+                    <a:lstStyle/>
+                    <a:p>
+                      <a:pPr algn="l" indent="0" marL="0">
+                        <a:buNone/>
+                      </a:pPr>
+                      <a:r>
+                        <a:rPr lang="en-US" sz="1400" dirty="0">
+                          <a:solidFill>
+                            <a:srgbClr val="1F2429"/>
+                          </a:solidFill>
+                          <a:latin typeface="Calibri" pitchFamily="34" charset="0"/>
+                          <a:ea typeface="Calibri" pitchFamily="34" charset="-122"/>
+                          <a:cs typeface="Calibri" pitchFamily="34" charset="-120"/>
+                        </a:rPr>
+                        <a:t>T1 READ balance → 1000</a:t>
+                      </a:r>
+                      <a:endParaRPr lang="en-US" sz="1400" dirty="0">
+                        <a:latin typeface="Calibri" pitchFamily="34" charset="0"/>
+                        <a:ea typeface="Calibri" pitchFamily="34" charset="-122"/>
+                        <a:cs typeface="Calibri" pitchFamily="34" charset="-120"/>
+                      </a:endParaRPr>
+                    </a:p>
+                  </a:txBody>
+                  <a:tcPr marL="91440" marR="91440" marT="45720" marB="45720" anchor="ctr">
+                    <a:lnL w="9525" cap="flat" cmpd="sng" algn="ctr">
+                      <a:solidFill>
+                        <a:srgbClr val="E1E4E8"/>
+                      </a:solidFill>
+                      <a:prstDash val="solid"/>
+                      <a:round/>
+                      <a:headEnd type="none" w="med" len="med"/>
+                      <a:tailEnd type="none" w="med" len="med"/>
+                    </a:lnL>
+                    <a:lnR w="9525" cap="flat" cmpd="sng" algn="ctr">
+                      <a:solidFill>
+                        <a:srgbClr val="E1E4E8"/>
+                      </a:solidFill>
+                      <a:prstDash val="solid"/>
+                      <a:round/>
+                      <a:headEnd type="none" w="med" len="med"/>
+                      <a:tailEnd type="none" w="med" len="med"/>
+                    </a:lnR>
+                    <a:lnT w="9525" cap="flat" cmpd="sng" algn="ctr">
+                      <a:solidFill>
+                        <a:srgbClr val="E1E4E8"/>
+                      </a:solidFill>
+                      <a:prstDash val="solid"/>
+                      <a:round/>
+                      <a:headEnd type="none" w="med" len="med"/>
+                      <a:tailEnd type="none" w="med" len="med"/>
+                    </a:lnT>
+                    <a:lnB w="9525" cap="flat" cmpd="sng" algn="ctr">
+                      <a:solidFill>
+                        <a:srgbClr val="E1E4E8"/>
+                      </a:solidFill>
+                      <a:prstDash val="solid"/>
+                      <a:round/>
+                      <a:headEnd type="none" w="med" len="med"/>
+                      <a:tailEnd type="none" w="med" len="med"/>
+                    </a:lnB>
+                    <a:solidFill>
+                      <a:srgbClr val="FFFFFF"/>
+                    </a:solidFill>
+                  </a:tcPr>
+                </a:tc>
+                <a:tc>
+                  <a:txBody>
+                    <a:bodyPr/>
+                    <a:lstStyle/>
+                    <a:p>
+                      <a:pPr algn="l" indent="0" marL="0">
+                        <a:buNone/>
+                      </a:pPr>
+                      <a:endParaRPr lang="en-US" sz="1400" dirty="0">
+                        <a:latin typeface="Calibri" pitchFamily="34" charset="0"/>
+                        <a:ea typeface="Calibri" pitchFamily="34" charset="-122"/>
+                        <a:cs typeface="Calibri" pitchFamily="34" charset="-120"/>
+                      </a:endParaRPr>
+                    </a:p>
+                  </a:txBody>
+                  <a:tcPr marL="91440" marR="91440" marT="45720" marB="45720" anchor="ctr">
+                    <a:lnL w="9525" cap="flat" cmpd="sng" algn="ctr">
+                      <a:solidFill>
+                        <a:srgbClr val="E1E4E8"/>
+                      </a:solidFill>
+                      <a:prstDash val="solid"/>
+                      <a:round/>
+                      <a:headEnd type="none" w="med" len="med"/>
+                      <a:tailEnd type="none" w="med" len="med"/>
+                    </a:lnL>
+                    <a:lnR w="9525" cap="flat" cmpd="sng" algn="ctr">
+                      <a:solidFill>
+                        <a:srgbClr val="E1E4E8"/>
+                      </a:solidFill>
+                      <a:prstDash val="solid"/>
+                      <a:round/>
+                      <a:headEnd type="none" w="med" len="med"/>
+                      <a:tailEnd type="none" w="med" len="med"/>
+                    </a:lnR>
+                    <a:lnT w="9525" cap="flat" cmpd="sng" algn="ctr">
+                      <a:solidFill>
+                        <a:srgbClr val="E1E4E8"/>
+                      </a:solidFill>
+                      <a:prstDash val="solid"/>
+                      <a:round/>
+                      <a:headEnd type="none" w="med" len="med"/>
+                      <a:tailEnd type="none" w="med" len="med"/>
+                    </a:lnT>
+                    <a:lnB w="9525" cap="flat" cmpd="sng" algn="ctr">
+                      <a:solidFill>
+                        <a:srgbClr val="E1E4E8"/>
+                      </a:solidFill>
+                      <a:prstDash val="solid"/>
+                      <a:round/>
+                      <a:headEnd type="none" w="med" len="med"/>
+                      <a:tailEnd type="none" w="med" len="med"/>
+                    </a:lnB>
+                    <a:solidFill>
+                      <a:srgbClr val="FFFFFF"/>
+                    </a:solidFill>
+                  </a:tcPr>
+                </a:tc>
+                <a:tc>
+                  <a:txBody>
+                    <a:bodyPr/>
+                    <a:lstStyle/>
+                    <a:p>
+                      <a:pPr algn="l" indent="0" marL="0">
+                        <a:buNone/>
+                      </a:pPr>
+                      <a:r>
+                        <a:rPr lang="en-US" sz="1400" dirty="0">
+                          <a:solidFill>
+                            <a:srgbClr val="1F2429"/>
+                          </a:solidFill>
+                          <a:latin typeface="Calibri" pitchFamily="34" charset="0"/>
+                          <a:ea typeface="Calibri" pitchFamily="34" charset="-122"/>
+                          <a:cs typeface="Calibri" pitchFamily="34" charset="-120"/>
+                        </a:rPr>
+                        <a:t>1000</a:t>
+                      </a:r>
+                      <a:endParaRPr lang="en-US" sz="1400" dirty="0">
+                        <a:latin typeface="Calibri" pitchFamily="34" charset="0"/>
+                        <a:ea typeface="Calibri" pitchFamily="34" charset="-122"/>
+                        <a:cs typeface="Calibri" pitchFamily="34" charset="-120"/>
+                      </a:endParaRPr>
+                    </a:p>
+                  </a:txBody>
+                  <a:tcPr marL="91440" marR="91440" marT="45720" marB="45720" anchor="ctr">
+                    <a:lnL w="9525" cap="flat" cmpd="sng" algn="ctr">
+                      <a:solidFill>
+                        <a:srgbClr val="E1E4E8"/>
+                      </a:solidFill>
+                      <a:prstDash val="solid"/>
+                      <a:round/>
+                      <a:headEnd type="none" w="med" len="med"/>
+                      <a:tailEnd type="none" w="med" len="med"/>
+                    </a:lnL>
+                    <a:lnR w="9525" cap="flat" cmpd="sng" algn="ctr">
+                      <a:solidFill>
+                        <a:srgbClr val="E1E4E8"/>
+                      </a:solidFill>
+                      <a:prstDash val="solid"/>
+                      <a:round/>
+                      <a:headEnd type="none" w="med" len="med"/>
+                      <a:tailEnd type="none" w="med" len="med"/>
+                    </a:lnR>
+                    <a:lnT w="9525" cap="flat" cmpd="sng" algn="ctr">
+                      <a:solidFill>
+                        <a:srgbClr val="E1E4E8"/>
+                      </a:solidFill>
+                      <a:prstDash val="solid"/>
+                      <a:round/>
+                      <a:headEnd type="none" w="med" len="med"/>
+                      <a:tailEnd type="none" w="med" len="med"/>
+                    </a:lnT>
+                    <a:lnB w="9525" cap="flat" cmpd="sng" algn="ctr">
+                      <a:solidFill>
+                        <a:srgbClr val="E1E4E8"/>
+                      </a:solidFill>
+                      <a:prstDash val="solid"/>
+                      <a:round/>
+                      <a:headEnd type="none" w="med" len="med"/>
+                      <a:tailEnd type="none" w="med" len="med"/>
+                    </a:lnB>
+                    <a:solidFill>
+                      <a:srgbClr val="FFFFFF"/>
+                    </a:solidFill>
+                  </a:tcPr>
+                </a:tc>
+              </a:tr>
+              <a:tr h="515000">
+                <a:tc>
+                  <a:txBody>
+                    <a:bodyPr/>
+                    <a:lstStyle/>
+                    <a:p>
+                      <a:pPr algn="l" indent="0" marL="0">
+                        <a:buNone/>
+                      </a:pPr>
+                      <a:r>
+                        <a:rPr lang="en-US" sz="1400" dirty="0">
+                          <a:solidFill>
+                            <a:srgbClr val="1F2429"/>
+                          </a:solidFill>
+                          <a:latin typeface="Calibri" pitchFamily="34" charset="0"/>
+                          <a:ea typeface="Calibri" pitchFamily="34" charset="-122"/>
+                          <a:cs typeface="Calibri" pitchFamily="34" charset="-120"/>
+                        </a:rPr>
+                        <a:t>t2</a:t>
+                      </a:r>
+                      <a:endParaRPr lang="en-US" sz="1400" dirty="0">
+                        <a:latin typeface="Calibri" pitchFamily="34" charset="0"/>
+                        <a:ea typeface="Calibri" pitchFamily="34" charset="-122"/>
+                        <a:cs typeface="Calibri" pitchFamily="34" charset="-120"/>
+                      </a:endParaRPr>
+                    </a:p>
+                  </a:txBody>
+                  <a:tcPr marL="91440" marR="91440" marT="45720" marB="45720" anchor="ctr">
+                    <a:lnL w="9525" cap="flat" cmpd="sng" algn="ctr">
+                      <a:solidFill>
+                        <a:srgbClr val="E1E4E8"/>
+                      </a:solidFill>
+                      <a:prstDash val="solid"/>
+                      <a:round/>
+                      <a:headEnd type="none" w="med" len="med"/>
+                      <a:tailEnd type="none" w="med" len="med"/>
+                    </a:lnL>
+                    <a:lnR w="9525" cap="flat" cmpd="sng" algn="ctr">
+                      <a:solidFill>
+                        <a:srgbClr val="E1E4E8"/>
+                      </a:solidFill>
+                      <a:prstDash val="solid"/>
+                      <a:round/>
+                      <a:headEnd type="none" w="med" len="med"/>
+                      <a:tailEnd type="none" w="med" len="med"/>
+                    </a:lnR>
+                    <a:lnT w="9525" cap="flat" cmpd="sng" algn="ctr">
+                      <a:solidFill>
+                        <a:srgbClr val="E1E4E8"/>
+                      </a:solidFill>
+                      <a:prstDash val="solid"/>
+                      <a:round/>
+                      <a:headEnd type="none" w="med" len="med"/>
+                      <a:tailEnd type="none" w="med" len="med"/>
+                    </a:lnT>
+                    <a:lnB w="9525" cap="flat" cmpd="sng" algn="ctr">
+                      <a:solidFill>
+                        <a:srgbClr val="E1E4E8"/>
+                      </a:solidFill>
+                      <a:prstDash val="solid"/>
+                      <a:round/>
+                      <a:headEnd type="none" w="med" len="med"/>
+                      <a:tailEnd type="none" w="med" len="med"/>
+                    </a:lnB>
+                    <a:solidFill>
+                      <a:srgbClr val="FFFFFF"/>
+                    </a:solidFill>
+                  </a:tcPr>
+                </a:tc>
+                <a:tc>
+                  <a:txBody>
+                    <a:bodyPr/>
+                    <a:lstStyle/>
+                    <a:p>
+                      <a:pPr algn="l" indent="0" marL="0">
+                        <a:buNone/>
+                      </a:pPr>
+                      <a:endParaRPr lang="en-US" sz="1400" dirty="0">
+                        <a:latin typeface="Calibri" pitchFamily="34" charset="0"/>
+                        <a:ea typeface="Calibri" pitchFamily="34" charset="-122"/>
+                        <a:cs typeface="Calibri" pitchFamily="34" charset="-120"/>
+                      </a:endParaRPr>
+                    </a:p>
+                  </a:txBody>
+                  <a:tcPr marL="91440" marR="91440" marT="45720" marB="45720" anchor="ctr">
+                    <a:lnL w="9525" cap="flat" cmpd="sng" algn="ctr">
+                      <a:solidFill>
+                        <a:srgbClr val="E1E4E8"/>
+                      </a:solidFill>
+                      <a:prstDash val="solid"/>
+                      <a:round/>
+                      <a:headEnd type="none" w="med" len="med"/>
+                      <a:tailEnd type="none" w="med" len="med"/>
+                    </a:lnL>
+                    <a:lnR w="9525" cap="flat" cmpd="sng" algn="ctr">
+                      <a:solidFill>
+                        <a:srgbClr val="E1E4E8"/>
+                      </a:solidFill>
+                      <a:prstDash val="solid"/>
+                      <a:round/>
+                      <a:headEnd type="none" w="med" len="med"/>
+                      <a:tailEnd type="none" w="med" len="med"/>
+                    </a:lnR>
+                    <a:lnT w="9525" cap="flat" cmpd="sng" algn="ctr">
+                      <a:solidFill>
+                        <a:srgbClr val="E1E4E8"/>
+                      </a:solidFill>
+                      <a:prstDash val="solid"/>
+                      <a:round/>
+                      <a:headEnd type="none" w="med" len="med"/>
+                      <a:tailEnd type="none" w="med" len="med"/>
+                    </a:lnT>
+                    <a:lnB w="9525" cap="flat" cmpd="sng" algn="ctr">
+                      <a:solidFill>
+                        <a:srgbClr val="E1E4E8"/>
+                      </a:solidFill>
+                      <a:prstDash val="solid"/>
+                      <a:round/>
+                      <a:headEnd type="none" w="med" len="med"/>
+                      <a:tailEnd type="none" w="med" len="med"/>
+                    </a:lnB>
+                    <a:solidFill>
+                      <a:srgbClr val="FFFFFF"/>
+                    </a:solidFill>
+                  </a:tcPr>
+                </a:tc>
+                <a:tc>
+                  <a:txBody>
+                    <a:bodyPr/>
+                    <a:lstStyle/>
+                    <a:p>
+                      <a:pPr algn="l" indent="0" marL="0">
+                        <a:buNone/>
+                      </a:pPr>
+                      <a:r>
+                        <a:rPr lang="en-US" sz="1400" dirty="0">
+                          <a:solidFill>
+                            <a:srgbClr val="1F2429"/>
+                          </a:solidFill>
+                          <a:latin typeface="Calibri" pitchFamily="34" charset="0"/>
+                          <a:ea typeface="Calibri" pitchFamily="34" charset="-122"/>
+                          <a:cs typeface="Calibri" pitchFamily="34" charset="-120"/>
+                        </a:rPr>
+                        <a:t>T2 READ balance → 1000</a:t>
+                      </a:r>
+                      <a:endParaRPr lang="en-US" sz="1400" dirty="0">
+                        <a:latin typeface="Calibri" pitchFamily="34" charset="0"/>
+                        <a:ea typeface="Calibri" pitchFamily="34" charset="-122"/>
+                        <a:cs typeface="Calibri" pitchFamily="34" charset="-120"/>
+                      </a:endParaRPr>
+                    </a:p>
+                  </a:txBody>
+                  <a:tcPr marL="91440" marR="91440" marT="45720" marB="45720" anchor="ctr">
+                    <a:lnL w="9525" cap="flat" cmpd="sng" algn="ctr">
+                      <a:solidFill>
+                        <a:srgbClr val="E1E4E8"/>
+                      </a:solidFill>
+                      <a:prstDash val="solid"/>
+                      <a:round/>
+                      <a:headEnd type="none" w="med" len="med"/>
+                      <a:tailEnd type="none" w="med" len="med"/>
+                    </a:lnL>
+                    <a:lnR w="9525" cap="flat" cmpd="sng" algn="ctr">
+                      <a:solidFill>
+                        <a:srgbClr val="E1E4E8"/>
+                      </a:solidFill>
+                      <a:prstDash val="solid"/>
+                      <a:round/>
+                      <a:headEnd type="none" w="med" len="med"/>
+                      <a:tailEnd type="none" w="med" len="med"/>
+                    </a:lnR>
+                    <a:lnT w="9525" cap="flat" cmpd="sng" algn="ctr">
+                      <a:solidFill>
+                        <a:srgbClr val="E1E4E8"/>
+                      </a:solidFill>
+                      <a:prstDash val="solid"/>
+                      <a:round/>
+                      <a:headEnd type="none" w="med" len="med"/>
+                      <a:tailEnd type="none" w="med" len="med"/>
+                    </a:lnT>
+                    <a:lnB w="9525" cap="flat" cmpd="sng" algn="ctr">
+                      <a:solidFill>
+                        <a:srgbClr val="E1E4E8"/>
+                      </a:solidFill>
+                      <a:prstDash val="solid"/>
+                      <a:round/>
+                      <a:headEnd type="none" w="med" len="med"/>
+                      <a:tailEnd type="none" w="med" len="med"/>
+                    </a:lnB>
+                    <a:solidFill>
+                      <a:srgbClr val="FFFFFF"/>
+                    </a:solidFill>
+                  </a:tcPr>
+                </a:tc>
+                <a:tc>
+                  <a:txBody>
+                    <a:bodyPr/>
+                    <a:lstStyle/>
+                    <a:p>
+                      <a:pPr algn="l" indent="0" marL="0">
+                        <a:buNone/>
+                      </a:pPr>
+                      <a:r>
+                        <a:rPr lang="en-US" sz="1400" dirty="0">
+                          <a:solidFill>
+                            <a:srgbClr val="1F2429"/>
+                          </a:solidFill>
+                          <a:latin typeface="Calibri" pitchFamily="34" charset="0"/>
+                          <a:ea typeface="Calibri" pitchFamily="34" charset="-122"/>
+                          <a:cs typeface="Calibri" pitchFamily="34" charset="-120"/>
+                        </a:rPr>
+                        <a:t>1000</a:t>
+                      </a:r>
+                      <a:endParaRPr lang="en-US" sz="1400" dirty="0">
+                        <a:latin typeface="Calibri" pitchFamily="34" charset="0"/>
+                        <a:ea typeface="Calibri" pitchFamily="34" charset="-122"/>
+                        <a:cs typeface="Calibri" pitchFamily="34" charset="-120"/>
+                      </a:endParaRPr>
+                    </a:p>
+                  </a:txBody>
+                  <a:tcPr marL="91440" marR="91440" marT="45720" marB="45720" anchor="ctr">
+                    <a:lnL w="9525" cap="flat" cmpd="sng" algn="ctr">
+                      <a:solidFill>
+                        <a:srgbClr val="E1E4E8"/>
+                      </a:solidFill>
+                      <a:prstDash val="solid"/>
+                      <a:round/>
+                      <a:headEnd type="none" w="med" len="med"/>
+                      <a:tailEnd type="none" w="med" len="med"/>
+                    </a:lnL>
+                    <a:lnR w="9525" cap="flat" cmpd="sng" algn="ctr">
+                      <a:solidFill>
+                        <a:srgbClr val="E1E4E8"/>
+                      </a:solidFill>
+                      <a:prstDash val="solid"/>
+                      <a:round/>
+                      <a:headEnd type="none" w="med" len="med"/>
+                      <a:tailEnd type="none" w="med" len="med"/>
+                    </a:lnR>
+                    <a:lnT w="9525" cap="flat" cmpd="sng" algn="ctr">
+                      <a:solidFill>
+                        <a:srgbClr val="E1E4E8"/>
+                      </a:solidFill>
+                      <a:prstDash val="solid"/>
+                      <a:round/>
+                      <a:headEnd type="none" w="med" len="med"/>
+                      <a:tailEnd type="none" w="med" len="med"/>
+                    </a:lnT>
+                    <a:lnB w="9525" cap="flat" cmpd="sng" algn="ctr">
+                      <a:solidFill>
+                        <a:srgbClr val="E1E4E8"/>
+                      </a:solidFill>
+                      <a:prstDash val="solid"/>
+                      <a:round/>
+                      <a:headEnd type="none" w="med" len="med"/>
+                      <a:tailEnd type="none" w="med" len="med"/>
+                    </a:lnB>
+                    <a:solidFill>
+                      <a:srgbClr val="FFFFFF"/>
+                    </a:solidFill>
+                  </a:tcPr>
+                </a:tc>
+              </a:tr>
+              <a:tr h="515000">
+                <a:tc>
+                  <a:txBody>
+                    <a:bodyPr/>
+                    <a:lstStyle/>
+                    <a:p>
+                      <a:pPr algn="l" indent="0" marL="0">
+                        <a:buNone/>
+                      </a:pPr>
+                      <a:r>
+                        <a:rPr lang="en-US" sz="1400" dirty="0">
+                          <a:solidFill>
+                            <a:srgbClr val="1F2429"/>
+                          </a:solidFill>
+                          <a:latin typeface="Calibri" pitchFamily="34" charset="0"/>
+                          <a:ea typeface="Calibri" pitchFamily="34" charset="-122"/>
+                          <a:cs typeface="Calibri" pitchFamily="34" charset="-120"/>
+                        </a:rPr>
+                        <a:t>t3</a:t>
+                      </a:r>
+                      <a:endParaRPr lang="en-US" sz="1400" dirty="0">
+                        <a:latin typeface="Calibri" pitchFamily="34" charset="0"/>
+                        <a:ea typeface="Calibri" pitchFamily="34" charset="-122"/>
+                        <a:cs typeface="Calibri" pitchFamily="34" charset="-120"/>
+                      </a:endParaRPr>
+                    </a:p>
+                  </a:txBody>
+                  <a:tcPr marL="91440" marR="91440" marT="45720" marB="45720" anchor="ctr">
+                    <a:lnL w="9525" cap="flat" cmpd="sng" algn="ctr">
+                      <a:solidFill>
+                        <a:srgbClr val="E1E4E8"/>
+                      </a:solidFill>
+                      <a:prstDash val="solid"/>
+                      <a:round/>
+                      <a:headEnd type="none" w="med" len="med"/>
+                      <a:tailEnd type="none" w="med" len="med"/>
+                    </a:lnL>
+                    <a:lnR w="9525" cap="flat" cmpd="sng" algn="ctr">
+                      <a:solidFill>
+                        <a:srgbClr val="E1E4E8"/>
+                      </a:solidFill>
+                      <a:prstDash val="solid"/>
+                      <a:round/>
+                      <a:headEnd type="none" w="med" len="med"/>
+                      <a:tailEnd type="none" w="med" len="med"/>
+                    </a:lnR>
+                    <a:lnT w="9525" cap="flat" cmpd="sng" algn="ctr">
+                      <a:solidFill>
+                        <a:srgbClr val="E1E4E8"/>
+                      </a:solidFill>
+                      <a:prstDash val="solid"/>
+                      <a:round/>
+                      <a:headEnd type="none" w="med" len="med"/>
+                      <a:tailEnd type="none" w="med" len="med"/>
+                    </a:lnT>
+                    <a:lnB w="9525" cap="flat" cmpd="sng" algn="ctr">
+                      <a:solidFill>
+                        <a:srgbClr val="E1E4E8"/>
+                      </a:solidFill>
+                      <a:prstDash val="solid"/>
+                      <a:round/>
+                      <a:headEnd type="none" w="med" len="med"/>
+                      <a:tailEnd type="none" w="med" len="med"/>
+                    </a:lnB>
+                    <a:solidFill>
+                      <a:srgbClr val="FFFFFF"/>
+                    </a:solidFill>
+                  </a:tcPr>
+                </a:tc>
+                <a:tc>
+                  <a:txBody>
+                    <a:bodyPr/>
+                    <a:lstStyle/>
+                    <a:p>
+                      <a:pPr algn="l" indent="0" marL="0">
+                        <a:buNone/>
+                      </a:pPr>
+                      <a:endParaRPr lang="en-US" sz="1400" dirty="0">
+                        <a:latin typeface="Calibri" pitchFamily="34" charset="0"/>
+                        <a:ea typeface="Calibri" pitchFamily="34" charset="-122"/>
+                        <a:cs typeface="Calibri" pitchFamily="34" charset="-120"/>
+                      </a:endParaRPr>
+                    </a:p>
+                  </a:txBody>
+                  <a:tcPr marL="91440" marR="91440" marT="45720" marB="45720" anchor="ctr">
+                    <a:lnL w="9525" cap="flat" cmpd="sng" algn="ctr">
+                      <a:solidFill>
+                        <a:srgbClr val="E1E4E8"/>
+                      </a:solidFill>
+                      <a:prstDash val="solid"/>
+                      <a:round/>
+                      <a:headEnd type="none" w="med" len="med"/>
+                      <a:tailEnd type="none" w="med" len="med"/>
+                    </a:lnL>
+                    <a:lnR w="9525" cap="flat" cmpd="sng" algn="ctr">
+                      <a:solidFill>
+                        <a:srgbClr val="E1E4E8"/>
+                      </a:solidFill>
+                      <a:prstDash val="solid"/>
+                      <a:round/>
+                      <a:headEnd type="none" w="med" len="med"/>
+                      <a:tailEnd type="none" w="med" len="med"/>
+                    </a:lnR>
+                    <a:lnT w="9525" cap="flat" cmpd="sng" algn="ctr">
+                      <a:solidFill>
+                        <a:srgbClr val="E1E4E8"/>
+                      </a:solidFill>
+                      <a:prstDash val="solid"/>
+                      <a:round/>
+                      <a:headEnd type="none" w="med" len="med"/>
+                      <a:tailEnd type="none" w="med" len="med"/>
+                    </a:lnT>
+                    <a:lnB w="9525" cap="flat" cmpd="sng" algn="ctr">
+                      <a:solidFill>
+                        <a:srgbClr val="E1E4E8"/>
+                      </a:solidFill>
+                      <a:prstDash val="solid"/>
+                      <a:round/>
+                      <a:headEnd type="none" w="med" len="med"/>
+                      <a:tailEnd type="none" w="med" len="med"/>
+                    </a:lnB>
+                    <a:solidFill>
+                      <a:srgbClr val="FFFFFF"/>
+                    </a:solidFill>
+                  </a:tcPr>
+                </a:tc>
+                <a:tc>
+                  <a:txBody>
+                    <a:bodyPr/>
+                    <a:lstStyle/>
+                    <a:p>
+                      <a:pPr algn="l" indent="0" marL="0">
+                        <a:buNone/>
+                      </a:pPr>
+                      <a:r>
+                        <a:rPr lang="en-US" sz="1400" dirty="0">
+                          <a:solidFill>
+                            <a:srgbClr val="1F2429"/>
+                          </a:solidFill>
+                          <a:latin typeface="Calibri" pitchFamily="34" charset="0"/>
+                          <a:ea typeface="Calibri" pitchFamily="34" charset="-122"/>
+                          <a:cs typeface="Calibri" pitchFamily="34" charset="-120"/>
+                        </a:rPr>
+                        <a:t>T2 WRITE balance = 1000+50 = 1050</a:t>
+                      </a:r>
+                      <a:endParaRPr lang="en-US" sz="1400" dirty="0">
+                        <a:latin typeface="Calibri" pitchFamily="34" charset="0"/>
+                        <a:ea typeface="Calibri" pitchFamily="34" charset="-122"/>
+                        <a:cs typeface="Calibri" pitchFamily="34" charset="-120"/>
+                      </a:endParaRPr>
+                    </a:p>
+                  </a:txBody>
+                  <a:tcPr marL="91440" marR="91440" marT="45720" marB="45720" anchor="ctr">
+                    <a:lnL w="9525" cap="flat" cmpd="sng" algn="ctr">
+                      <a:solidFill>
+                        <a:srgbClr val="E1E4E8"/>
+                      </a:solidFill>
+                      <a:prstDash val="solid"/>
+                      <a:round/>
+                      <a:headEnd type="none" w="med" len="med"/>
+                      <a:tailEnd type="none" w="med" len="med"/>
+                    </a:lnL>
+                    <a:lnR w="9525" cap="flat" cmpd="sng" algn="ctr">
+                      <a:solidFill>
+                        <a:srgbClr val="E1E4E8"/>
+                      </a:solidFill>
+                      <a:prstDash val="solid"/>
+                      <a:round/>
+                      <a:headEnd type="none" w="med" len="med"/>
+                      <a:tailEnd type="none" w="med" len="med"/>
+                    </a:lnR>
+                    <a:lnT w="9525" cap="flat" cmpd="sng" algn="ctr">
+                      <a:solidFill>
+                        <a:srgbClr val="E1E4E8"/>
+                      </a:solidFill>
+                      <a:prstDash val="solid"/>
+                      <a:round/>
+                      <a:headEnd type="none" w="med" len="med"/>
+                      <a:tailEnd type="none" w="med" len="med"/>
+                    </a:lnT>
+                    <a:lnB w="9525" cap="flat" cmpd="sng" algn="ctr">
+                      <a:solidFill>
+                        <a:srgbClr val="E1E4E8"/>
+                      </a:solidFill>
+                      <a:prstDash val="solid"/>
+                      <a:round/>
+                      <a:headEnd type="none" w="med" len="med"/>
+                      <a:tailEnd type="none" w="med" len="med"/>
+                    </a:lnB>
+                    <a:solidFill>
+                      <a:srgbClr val="FFFFFF"/>
+                    </a:solidFill>
+                  </a:tcPr>
+                </a:tc>
+                <a:tc>
+                  <a:txBody>
+                    <a:bodyPr/>
+                    <a:lstStyle/>
+                    <a:p>
+                      <a:pPr algn="l" indent="0" marL="0">
+                        <a:buNone/>
+                      </a:pPr>
+                      <a:r>
+                        <a:rPr lang="en-US" sz="1400" dirty="0">
+                          <a:solidFill>
+                            <a:srgbClr val="1F2429"/>
+                          </a:solidFill>
+                          <a:latin typeface="Calibri" pitchFamily="34" charset="0"/>
+                          <a:ea typeface="Calibri" pitchFamily="34" charset="-122"/>
+                          <a:cs typeface="Calibri" pitchFamily="34" charset="-120"/>
+                        </a:rPr>
+                        <a:t>1050</a:t>
+                      </a:r>
+                      <a:endParaRPr lang="en-US" sz="1400" dirty="0">
+                        <a:latin typeface="Calibri" pitchFamily="34" charset="0"/>
+                        <a:ea typeface="Calibri" pitchFamily="34" charset="-122"/>
+                        <a:cs typeface="Calibri" pitchFamily="34" charset="-120"/>
+                      </a:endParaRPr>
+                    </a:p>
+                  </a:txBody>
+                  <a:tcPr marL="91440" marR="91440" marT="45720" marB="45720" anchor="ctr">
+                    <a:lnL w="9525" cap="flat" cmpd="sng" algn="ctr">
+                      <a:solidFill>
+                        <a:srgbClr val="E1E4E8"/>
+                      </a:solidFill>
+                      <a:prstDash val="solid"/>
+                      <a:round/>
+                      <a:headEnd type="none" w="med" len="med"/>
+                      <a:tailEnd type="none" w="med" len="med"/>
+                    </a:lnL>
+                    <a:lnR w="9525" cap="flat" cmpd="sng" algn="ctr">
+                      <a:solidFill>
+                        <a:srgbClr val="E1E4E8"/>
+                      </a:solidFill>
+                      <a:prstDash val="solid"/>
+                      <a:round/>
+                      <a:headEnd type="none" w="med" len="med"/>
+                      <a:tailEnd type="none" w="med" len="med"/>
+                    </a:lnR>
+                    <a:lnT w="9525" cap="flat" cmpd="sng" algn="ctr">
+                      <a:solidFill>
+                        <a:srgbClr val="E1E4E8"/>
+                      </a:solidFill>
+                      <a:prstDash val="solid"/>
+                      <a:round/>
+                      <a:headEnd type="none" w="med" len="med"/>
+                      <a:tailEnd type="none" w="med" len="med"/>
+                    </a:lnT>
+                    <a:lnB w="9525" cap="flat" cmpd="sng" algn="ctr">
+                      <a:solidFill>
+                        <a:srgbClr val="E1E4E8"/>
+                      </a:solidFill>
+                      <a:prstDash val="solid"/>
+                      <a:round/>
+                      <a:headEnd type="none" w="med" len="med"/>
+                      <a:tailEnd type="none" w="med" len="med"/>
+                    </a:lnB>
+                    <a:solidFill>
+                      <a:srgbClr val="FFFFFF"/>
+                    </a:solidFill>
+                  </a:tcPr>
+                </a:tc>
+              </a:tr>
+              <a:tr h="515000">
+                <a:tc>
+                  <a:txBody>
+                    <a:bodyPr/>
+                    <a:lstStyle/>
+                    <a:p>
+                      <a:pPr algn="l" indent="0" marL="0">
+                        <a:buNone/>
+                      </a:pPr>
+                      <a:r>
+                        <a:rPr lang="en-US" sz="1400" dirty="0">
+                          <a:solidFill>
+                            <a:srgbClr val="1F2429"/>
+                          </a:solidFill>
+                          <a:latin typeface="Calibri" pitchFamily="34" charset="0"/>
+                          <a:ea typeface="Calibri" pitchFamily="34" charset="-122"/>
+                          <a:cs typeface="Calibri" pitchFamily="34" charset="-120"/>
+                        </a:rPr>
+                        <a:t>t4</a:t>
+                      </a:r>
+                      <a:endParaRPr lang="en-US" sz="1400" dirty="0">
+                        <a:latin typeface="Calibri" pitchFamily="34" charset="0"/>
+                        <a:ea typeface="Calibri" pitchFamily="34" charset="-122"/>
+                        <a:cs typeface="Calibri" pitchFamily="34" charset="-120"/>
+                      </a:endParaRPr>
+                    </a:p>
+                  </a:txBody>
+                  <a:tcPr marL="91440" marR="91440" marT="45720" marB="45720" anchor="ctr">
+                    <a:lnL w="9525" cap="flat" cmpd="sng" algn="ctr">
+                      <a:solidFill>
+                        <a:srgbClr val="E1E4E8"/>
+                      </a:solidFill>
+                      <a:prstDash val="solid"/>
+                      <a:round/>
+                      <a:headEnd type="none" w="med" len="med"/>
+                      <a:tailEnd type="none" w="med" len="med"/>
+                    </a:lnL>
+                    <a:lnR w="9525" cap="flat" cmpd="sng" algn="ctr">
+                      <a:solidFill>
+                        <a:srgbClr val="E1E4E8"/>
+                      </a:solidFill>
+                      <a:prstDash val="solid"/>
+                      <a:round/>
+                      <a:headEnd type="none" w="med" len="med"/>
+                      <a:tailEnd type="none" w="med" len="med"/>
+                    </a:lnR>
+                    <a:lnT w="9525" cap="flat" cmpd="sng" algn="ctr">
+                      <a:solidFill>
+                        <a:srgbClr val="E1E4E8"/>
+                      </a:solidFill>
+                      <a:prstDash val="solid"/>
+                      <a:round/>
+                      <a:headEnd type="none" w="med" len="med"/>
+                      <a:tailEnd type="none" w="med" len="med"/>
+                    </a:lnT>
+                    <a:lnB w="9525" cap="flat" cmpd="sng" algn="ctr">
+                      <a:solidFill>
+                        <a:srgbClr val="E1E4E8"/>
+                      </a:solidFill>
+                      <a:prstDash val="solid"/>
+                      <a:round/>
+                      <a:headEnd type="none" w="med" len="med"/>
+                      <a:tailEnd type="none" w="med" len="med"/>
+                    </a:lnB>
+                    <a:solidFill>
+                      <a:srgbClr val="FFFFFF"/>
+                    </a:solidFill>
+                  </a:tcPr>
+                </a:tc>
+                <a:tc>
+                  <a:txBody>
+                    <a:bodyPr/>
+                    <a:lstStyle/>
+                    <a:p>
+                      <a:pPr algn="l" indent="0" marL="0">
+                        <a:buNone/>
+                      </a:pPr>
+                      <a:endParaRPr lang="en-US" sz="1400" dirty="0">
+                        <a:latin typeface="Calibri" pitchFamily="34" charset="0"/>
+                        <a:ea typeface="Calibri" pitchFamily="34" charset="-122"/>
+                        <a:cs typeface="Calibri" pitchFamily="34" charset="-120"/>
+                      </a:endParaRPr>
+                    </a:p>
+                  </a:txBody>
+                  <a:tcPr marL="91440" marR="91440" marT="45720" marB="45720" anchor="ctr">
+                    <a:lnL w="9525" cap="flat" cmpd="sng" algn="ctr">
+                      <a:solidFill>
+                        <a:srgbClr val="E1E4E8"/>
+                      </a:solidFill>
+                      <a:prstDash val="solid"/>
+                      <a:round/>
+                      <a:headEnd type="none" w="med" len="med"/>
+                      <a:tailEnd type="none" w="med" len="med"/>
+                    </a:lnL>
+                    <a:lnR w="9525" cap="flat" cmpd="sng" algn="ctr">
+                      <a:solidFill>
+                        <a:srgbClr val="E1E4E8"/>
+                      </a:solidFill>
+                      <a:prstDash val="solid"/>
+                      <a:round/>
+                      <a:headEnd type="none" w="med" len="med"/>
+                      <a:tailEnd type="none" w="med" len="med"/>
+                    </a:lnR>
+                    <a:lnT w="9525" cap="flat" cmpd="sng" algn="ctr">
+                      <a:solidFill>
+                        <a:srgbClr val="E1E4E8"/>
+                      </a:solidFill>
+                      <a:prstDash val="solid"/>
+                      <a:round/>
+                      <a:headEnd type="none" w="med" len="med"/>
+                      <a:tailEnd type="none" w="med" len="med"/>
+                    </a:lnT>
+                    <a:lnB w="9525" cap="flat" cmpd="sng" algn="ctr">
+                      <a:solidFill>
+                        <a:srgbClr val="E1E4E8"/>
+                      </a:solidFill>
+                      <a:prstDash val="solid"/>
+                      <a:round/>
+                      <a:headEnd type="none" w="med" len="med"/>
+                      <a:tailEnd type="none" w="med" len="med"/>
+                    </a:lnB>
+                    <a:solidFill>
+                      <a:srgbClr val="FFFFFF"/>
+                    </a:solidFill>
+                  </a:tcPr>
+                </a:tc>
+                <a:tc>
+                  <a:txBody>
+                    <a:bodyPr/>
+                    <a:lstStyle/>
+                    <a:p>
+                      <a:pPr algn="l" indent="0" marL="0">
+                        <a:buNone/>
+                      </a:pPr>
+                      <a:r>
+                        <a:rPr lang="en-US" sz="1400" dirty="0">
+                          <a:solidFill>
+                            <a:srgbClr val="1F2429"/>
+                          </a:solidFill>
+                          <a:latin typeface="Calibri" pitchFamily="34" charset="0"/>
+                          <a:ea typeface="Calibri" pitchFamily="34" charset="-122"/>
+                          <a:cs typeface="Calibri" pitchFamily="34" charset="-120"/>
+                        </a:rPr>
+                        <a:t>T2 COMMIT</a:t>
+                      </a:r>
+                      <a:endParaRPr lang="en-US" sz="1400" dirty="0">
+                        <a:latin typeface="Calibri" pitchFamily="34" charset="0"/>
+                        <a:ea typeface="Calibri" pitchFamily="34" charset="-122"/>
+                        <a:cs typeface="Calibri" pitchFamily="34" charset="-120"/>
+                      </a:endParaRPr>
+                    </a:p>
+                  </a:txBody>
+                  <a:tcPr marL="91440" marR="91440" marT="45720" marB="45720" anchor="ctr">
+                    <a:lnL w="9525" cap="flat" cmpd="sng" algn="ctr">
+                      <a:solidFill>
+                        <a:srgbClr val="E1E4E8"/>
+                      </a:solidFill>
+                      <a:prstDash val="solid"/>
+                      <a:round/>
+                      <a:headEnd type="none" w="med" len="med"/>
+                      <a:tailEnd type="none" w="med" len="med"/>
+                    </a:lnL>
+                    <a:lnR w="9525" cap="flat" cmpd="sng" algn="ctr">
+                      <a:solidFill>
+                        <a:srgbClr val="E1E4E8"/>
+                      </a:solidFill>
+                      <a:prstDash val="solid"/>
+                      <a:round/>
+                      <a:headEnd type="none" w="med" len="med"/>
+                      <a:tailEnd type="none" w="med" len="med"/>
+                    </a:lnR>
+                    <a:lnT w="9525" cap="flat" cmpd="sng" algn="ctr">
+                      <a:solidFill>
+                        <a:srgbClr val="E1E4E8"/>
+                      </a:solidFill>
+                      <a:prstDash val="solid"/>
+                      <a:round/>
+                      <a:headEnd type="none" w="med" len="med"/>
+                      <a:tailEnd type="none" w="med" len="med"/>
+                    </a:lnT>
+                    <a:lnB w="9525" cap="flat" cmpd="sng" algn="ctr">
+                      <a:solidFill>
+                        <a:srgbClr val="E1E4E8"/>
+                      </a:solidFill>
+                      <a:prstDash val="solid"/>
+                      <a:round/>
+                      <a:headEnd type="none" w="med" len="med"/>
+                      <a:tailEnd type="none" w="med" len="med"/>
+                    </a:lnB>
+                    <a:solidFill>
+                      <a:srgbClr val="FFFFFF"/>
+                    </a:solidFill>
+                  </a:tcPr>
+                </a:tc>
+                <a:tc>
+                  <a:txBody>
+                    <a:bodyPr/>
+                    <a:lstStyle/>
+                    <a:p>
+                      <a:pPr algn="l" indent="0" marL="0">
+                        <a:buNone/>
+                      </a:pPr>
+                      <a:r>
+                        <a:rPr lang="en-US" sz="1400" dirty="0">
+                          <a:solidFill>
+                            <a:srgbClr val="1F2429"/>
+                          </a:solidFill>
+                          <a:latin typeface="Calibri" pitchFamily="34" charset="0"/>
+                          <a:ea typeface="Calibri" pitchFamily="34" charset="-122"/>
+                          <a:cs typeface="Calibri" pitchFamily="34" charset="-120"/>
+                        </a:rPr>
+                        <a:t>1050</a:t>
+                      </a:r>
+                      <a:endParaRPr lang="en-US" sz="1400" dirty="0">
+                        <a:latin typeface="Calibri" pitchFamily="34" charset="0"/>
+                        <a:ea typeface="Calibri" pitchFamily="34" charset="-122"/>
+                        <a:cs typeface="Calibri" pitchFamily="34" charset="-120"/>
+                      </a:endParaRPr>
+                    </a:p>
+                  </a:txBody>
+                  <a:tcPr marL="91440" marR="91440" marT="45720" marB="45720" anchor="ctr">
+                    <a:lnL w="9525" cap="flat" cmpd="sng" algn="ctr">
+                      <a:solidFill>
+                        <a:srgbClr val="E1E4E8"/>
+                      </a:solidFill>
+                      <a:prstDash val="solid"/>
+                      <a:round/>
+                      <a:headEnd type="none" w="med" len="med"/>
+                      <a:tailEnd type="none" w="med" len="med"/>
+                    </a:lnL>
+                    <a:lnR w="9525" cap="flat" cmpd="sng" algn="ctr">
+                      <a:solidFill>
+                        <a:srgbClr val="E1E4E8"/>
+                      </a:solidFill>
+                      <a:prstDash val="solid"/>
+                      <a:round/>
+                      <a:headEnd type="none" w="med" len="med"/>
+                      <a:tailEnd type="none" w="med" len="med"/>
+                    </a:lnR>
+                    <a:lnT w="9525" cap="flat" cmpd="sng" algn="ctr">
+                      <a:solidFill>
+                        <a:srgbClr val="E1E4E8"/>
+                      </a:solidFill>
+                      <a:prstDash val="solid"/>
+                      <a:round/>
+                      <a:headEnd type="none" w="med" len="med"/>
+                      <a:tailEnd type="none" w="med" len="med"/>
+                    </a:lnT>
+                    <a:lnB w="9525" cap="flat" cmpd="sng" algn="ctr">
+                      <a:solidFill>
+                        <a:srgbClr val="E1E4E8"/>
+                      </a:solidFill>
+                      <a:prstDash val="solid"/>
+                      <a:round/>
+                      <a:headEnd type="none" w="med" len="med"/>
+                      <a:tailEnd type="none" w="med" len="med"/>
+                    </a:lnB>
+                    <a:solidFill>
+                      <a:srgbClr val="FFFFFF"/>
+                    </a:solidFill>
+                  </a:tcPr>
+                </a:tc>
+              </a:tr>
+              <a:tr h="515000">
+                <a:tc>
+                  <a:txBody>
+                    <a:bodyPr/>
+                    <a:lstStyle/>
+                    <a:p>
+                      <a:pPr algn="l" indent="0" marL="0">
+                        <a:buNone/>
+                      </a:pPr>
+                      <a:r>
+                        <a:rPr lang="en-US" sz="1400" dirty="0">
+                          <a:solidFill>
+                            <a:srgbClr val="1F2429"/>
+                          </a:solidFill>
+                          <a:latin typeface="Calibri" pitchFamily="34" charset="0"/>
+                          <a:ea typeface="Calibri" pitchFamily="34" charset="-122"/>
+                          <a:cs typeface="Calibri" pitchFamily="34" charset="-120"/>
+                        </a:rPr>
+                        <a:t>t5</a:t>
+                      </a:r>
+                      <a:endParaRPr lang="en-US" sz="1400" dirty="0">
+                        <a:latin typeface="Calibri" pitchFamily="34" charset="0"/>
+                        <a:ea typeface="Calibri" pitchFamily="34" charset="-122"/>
+                        <a:cs typeface="Calibri" pitchFamily="34" charset="-120"/>
+                      </a:endParaRPr>
+                    </a:p>
+                  </a:txBody>
+                  <a:tcPr marL="91440" marR="91440" marT="45720" marB="45720" anchor="ctr">
+                    <a:lnL w="9525" cap="flat" cmpd="sng" algn="ctr">
+                      <a:solidFill>
+                        <a:srgbClr val="E1E4E8"/>
+                      </a:solidFill>
+                      <a:prstDash val="solid"/>
+                      <a:round/>
+                      <a:headEnd type="none" w="med" len="med"/>
+                      <a:tailEnd type="none" w="med" len="med"/>
+                    </a:lnL>
+                    <a:lnR w="9525" cap="flat" cmpd="sng" algn="ctr">
+                      <a:solidFill>
+                        <a:srgbClr val="E1E4E8"/>
+                      </a:solidFill>
+                      <a:prstDash val="solid"/>
+                      <a:round/>
+                      <a:headEnd type="none" w="med" len="med"/>
+                      <a:tailEnd type="none" w="med" len="med"/>
+                    </a:lnR>
+                    <a:lnT w="9525" cap="flat" cmpd="sng" algn="ctr">
+                      <a:solidFill>
+                        <a:srgbClr val="E1E4E8"/>
+                      </a:solidFill>
+                      <a:prstDash val="solid"/>
+                      <a:round/>
+                      <a:headEnd type="none" w="med" len="med"/>
+                      <a:tailEnd type="none" w="med" len="med"/>
+                    </a:lnT>
+                    <a:lnB w="9525" cap="flat" cmpd="sng" algn="ctr">
+                      <a:solidFill>
+                        <a:srgbClr val="E1E4E8"/>
+                      </a:solidFill>
+                      <a:prstDash val="solid"/>
+                      <a:round/>
+                      <a:headEnd type="none" w="med" len="med"/>
+                      <a:tailEnd type="none" w="med" len="med"/>
+                    </a:lnB>
+                    <a:solidFill>
+                      <a:srgbClr val="FFFFFF"/>
+                    </a:solidFill>
+                  </a:tcPr>
+                </a:tc>
+                <a:tc>
+                  <a:txBody>
+                    <a:bodyPr/>
+                    <a:lstStyle/>
+                    <a:p>
+                      <a:pPr algn="l" indent="0" marL="0">
+                        <a:buNone/>
+                      </a:pPr>
+                      <a:r>
+                        <a:rPr lang="en-US" sz="1400" dirty="0">
+                          <a:solidFill>
+                            <a:srgbClr val="1F2429"/>
+                          </a:solidFill>
+                          <a:latin typeface="Calibri" pitchFamily="34" charset="0"/>
+                          <a:ea typeface="Calibri" pitchFamily="34" charset="-122"/>
+                          <a:cs typeface="Calibri" pitchFamily="34" charset="-120"/>
+                        </a:rPr>
+                        <a:t>T1 WRITE balance = 1000+100 = 1100</a:t>
+                      </a:r>
+                      <a:endParaRPr lang="en-US" sz="1400" dirty="0">
+                        <a:latin typeface="Calibri" pitchFamily="34" charset="0"/>
+                        <a:ea typeface="Calibri" pitchFamily="34" charset="-122"/>
+                        <a:cs typeface="Calibri" pitchFamily="34" charset="-120"/>
+                      </a:endParaRPr>
+                    </a:p>
+                  </a:txBody>
+                  <a:tcPr marL="91440" marR="91440" marT="45720" marB="45720" anchor="ctr">
+                    <a:lnL w="9525" cap="flat" cmpd="sng" algn="ctr">
+                      <a:solidFill>
+                        <a:srgbClr val="E1E4E8"/>
+                      </a:solidFill>
+                      <a:prstDash val="solid"/>
+                      <a:round/>
+                      <a:headEnd type="none" w="med" len="med"/>
+                      <a:tailEnd type="none" w="med" len="med"/>
+                    </a:lnL>
+                    <a:lnR w="9525" cap="flat" cmpd="sng" algn="ctr">
+                      <a:solidFill>
+                        <a:srgbClr val="E1E4E8"/>
+                      </a:solidFill>
+                      <a:prstDash val="solid"/>
+                      <a:round/>
+                      <a:headEnd type="none" w="med" len="med"/>
+                      <a:tailEnd type="none" w="med" len="med"/>
+                    </a:lnR>
+                    <a:lnT w="9525" cap="flat" cmpd="sng" algn="ctr">
+                      <a:solidFill>
+                        <a:srgbClr val="E1E4E8"/>
+                      </a:solidFill>
+                      <a:prstDash val="solid"/>
+                      <a:round/>
+                      <a:headEnd type="none" w="med" len="med"/>
+                      <a:tailEnd type="none" w="med" len="med"/>
+                    </a:lnT>
+                    <a:lnB w="9525" cap="flat" cmpd="sng" algn="ctr">
+                      <a:solidFill>
+                        <a:srgbClr val="E1E4E8"/>
+                      </a:solidFill>
+                      <a:prstDash val="solid"/>
+                      <a:round/>
+                      <a:headEnd type="none" w="med" len="med"/>
+                      <a:tailEnd type="none" w="med" len="med"/>
+                    </a:lnB>
+                    <a:solidFill>
+                      <a:srgbClr val="FFFFFF"/>
+                    </a:solidFill>
+                  </a:tcPr>
+                </a:tc>
+                <a:tc>
+                  <a:txBody>
+                    <a:bodyPr/>
+                    <a:lstStyle/>
+                    <a:p>
+                      <a:pPr algn="l" indent="0" marL="0">
+                        <a:buNone/>
+                      </a:pPr>
+                      <a:endParaRPr lang="en-US" sz="1400" dirty="0">
+                        <a:latin typeface="Calibri" pitchFamily="34" charset="0"/>
+                        <a:ea typeface="Calibri" pitchFamily="34" charset="-122"/>
+                        <a:cs typeface="Calibri" pitchFamily="34" charset="-120"/>
+                      </a:endParaRPr>
+                    </a:p>
+                  </a:txBody>
+                  <a:tcPr marL="91440" marR="91440" marT="45720" marB="45720" anchor="ctr">
+                    <a:lnL w="9525" cap="flat" cmpd="sng" algn="ctr">
+                      <a:solidFill>
+                        <a:srgbClr val="E1E4E8"/>
+                      </a:solidFill>
+                      <a:prstDash val="solid"/>
+                      <a:round/>
+                      <a:headEnd type="none" w="med" len="med"/>
+                      <a:tailEnd type="none" w="med" len="med"/>
+                    </a:lnL>
+                    <a:lnR w="9525" cap="flat" cmpd="sng" algn="ctr">
+                      <a:solidFill>
+                        <a:srgbClr val="E1E4E8"/>
+                      </a:solidFill>
+                      <a:prstDash val="solid"/>
+                      <a:round/>
+                      <a:headEnd type="none" w="med" len="med"/>
+                      <a:tailEnd type="none" w="med" len="med"/>
+                    </a:lnR>
+                    <a:lnT w="9525" cap="flat" cmpd="sng" algn="ctr">
+                      <a:solidFill>
+                        <a:srgbClr val="E1E4E8"/>
+                      </a:solidFill>
+                      <a:prstDash val="solid"/>
+                      <a:round/>
+                      <a:headEnd type="none" w="med" len="med"/>
+                      <a:tailEnd type="none" w="med" len="med"/>
+                    </a:lnT>
+                    <a:lnB w="9525" cap="flat" cmpd="sng" algn="ctr">
+                      <a:solidFill>
+                        <a:srgbClr val="E1E4E8"/>
+                      </a:solidFill>
+                      <a:prstDash val="solid"/>
+                      <a:round/>
+                      <a:headEnd type="none" w="med" len="med"/>
+                      <a:tailEnd type="none" w="med" len="med"/>
+                    </a:lnB>
+                    <a:solidFill>
+                      <a:srgbClr val="FFFFFF"/>
+                    </a:solidFill>
+                  </a:tcPr>
+                </a:tc>
+                <a:tc>
+                  <a:txBody>
+                    <a:bodyPr/>
+                    <a:lstStyle/>
+                    <a:p>
+                      <a:pPr algn="l" indent="0" marL="0">
+                        <a:buNone/>
+                      </a:pPr>
+                      <a:r>
+                        <a:rPr lang="en-US" sz="1400" dirty="0">
+                          <a:solidFill>
+                            <a:srgbClr val="1F2429"/>
+                          </a:solidFill>
+                          <a:latin typeface="Calibri" pitchFamily="34" charset="0"/>
+                          <a:ea typeface="Calibri" pitchFamily="34" charset="-122"/>
+                          <a:cs typeface="Calibri" pitchFamily="34" charset="-120"/>
+                        </a:rPr>
+                        <a:t>1100</a:t>
+                      </a:r>
+                      <a:endParaRPr lang="en-US" sz="1400" dirty="0">
+                        <a:latin typeface="Calibri" pitchFamily="34" charset="0"/>
+                        <a:ea typeface="Calibri" pitchFamily="34" charset="-122"/>
+                        <a:cs typeface="Calibri" pitchFamily="34" charset="-120"/>
+                      </a:endParaRPr>
+                    </a:p>
+                  </a:txBody>
+                  <a:tcPr marL="91440" marR="91440" marT="45720" marB="45720" anchor="ctr">
+                    <a:lnL w="9525" cap="flat" cmpd="sng" algn="ctr">
+                      <a:solidFill>
+                        <a:srgbClr val="E1E4E8"/>
+                      </a:solidFill>
+                      <a:prstDash val="solid"/>
+                      <a:round/>
+                      <a:headEnd type="none" w="med" len="med"/>
+                      <a:tailEnd type="none" w="med" len="med"/>
+                    </a:lnL>
+                    <a:lnR w="9525" cap="flat" cmpd="sng" algn="ctr">
+                      <a:solidFill>
+                        <a:srgbClr val="E1E4E8"/>
+                      </a:solidFill>
+                      <a:prstDash val="solid"/>
+                      <a:round/>
+                      <a:headEnd type="none" w="med" len="med"/>
+                      <a:tailEnd type="none" w="med" len="med"/>
+                    </a:lnR>
+                    <a:lnT w="9525" cap="flat" cmpd="sng" algn="ctr">
+                      <a:solidFill>
+                        <a:srgbClr val="E1E4E8"/>
+                      </a:solidFill>
+                      <a:prstDash val="solid"/>
+                      <a:round/>
+                      <a:headEnd type="none" w="med" len="med"/>
+                      <a:tailEnd type="none" w="med" len="med"/>
+                    </a:lnT>
+                    <a:lnB w="9525" cap="flat" cmpd="sng" algn="ctr">
+                      <a:solidFill>
+                        <a:srgbClr val="E1E4E8"/>
+                      </a:solidFill>
+                      <a:prstDash val="solid"/>
+                      <a:round/>
+                      <a:headEnd type="none" w="med" len="med"/>
+                      <a:tailEnd type="none" w="med" len="med"/>
+                    </a:lnB>
+                    <a:solidFill>
+                      <a:srgbClr val="FFFFFF"/>
+                    </a:solidFill>
+                  </a:tcPr>
+                </a:tc>
+              </a:tr>
+              <a:tr h="515000">
+                <a:tc>
+                  <a:txBody>
+                    <a:bodyPr/>
+                    <a:lstStyle/>
+                    <a:p>
+                      <a:pPr algn="l" indent="0" marL="0">
+                        <a:buNone/>
+                      </a:pPr>
+                      <a:r>
+                        <a:rPr lang="en-US" sz="1400" dirty="0">
+                          <a:solidFill>
+                            <a:srgbClr val="1F2429"/>
+                          </a:solidFill>
+                          <a:latin typeface="Calibri" pitchFamily="34" charset="0"/>
+                          <a:ea typeface="Calibri" pitchFamily="34" charset="-122"/>
+                          <a:cs typeface="Calibri" pitchFamily="34" charset="-120"/>
+                        </a:rPr>
+                        <a:t>t6</a:t>
+                      </a:r>
+                      <a:endParaRPr lang="en-US" sz="1400" dirty="0">
+                        <a:latin typeface="Calibri" pitchFamily="34" charset="0"/>
+                        <a:ea typeface="Calibri" pitchFamily="34" charset="-122"/>
+                        <a:cs typeface="Calibri" pitchFamily="34" charset="-120"/>
+                      </a:endParaRPr>
+                    </a:p>
+                  </a:txBody>
+                  <a:tcPr marL="91440" marR="91440" marT="45720" marB="45720" anchor="ctr">
+                    <a:lnL w="9525" cap="flat" cmpd="sng" algn="ctr">
+                      <a:solidFill>
+                        <a:srgbClr val="E1E4E8"/>
+                      </a:solidFill>
+                      <a:prstDash val="solid"/>
+                      <a:round/>
+                      <a:headEnd type="none" w="med" len="med"/>
+                      <a:tailEnd type="none" w="med" len="med"/>
+                    </a:lnL>
+                    <a:lnR w="9525" cap="flat" cmpd="sng" algn="ctr">
+                      <a:solidFill>
+                        <a:srgbClr val="E1E4E8"/>
+                      </a:solidFill>
+                      <a:prstDash val="solid"/>
+                      <a:round/>
+                      <a:headEnd type="none" w="med" len="med"/>
+                      <a:tailEnd type="none" w="med" len="med"/>
+                    </a:lnR>
+                    <a:lnT w="9525" cap="flat" cmpd="sng" algn="ctr">
+                      <a:solidFill>
+                        <a:srgbClr val="E1E4E8"/>
+                      </a:solidFill>
+                      <a:prstDash val="solid"/>
+                      <a:round/>
+                      <a:headEnd type="none" w="med" len="med"/>
+                      <a:tailEnd type="none" w="med" len="med"/>
+                    </a:lnT>
+                    <a:lnB w="9525" cap="flat" cmpd="sng" algn="ctr">
+                      <a:solidFill>
+                        <a:srgbClr val="E1E4E8"/>
+                      </a:solidFill>
+                      <a:prstDash val="solid"/>
+                      <a:round/>
+                      <a:headEnd type="none" w="med" len="med"/>
+                      <a:tailEnd type="none" w="med" len="med"/>
+                    </a:lnB>
+                    <a:solidFill>
+                      <a:srgbClr val="FFFFFF"/>
+                    </a:solidFill>
+                  </a:tcPr>
+                </a:tc>
+                <a:tc>
+                  <a:txBody>
+                    <a:bodyPr/>
+                    <a:lstStyle/>
+                    <a:p>
+                      <a:pPr algn="l" indent="0" marL="0">
+                        <a:buNone/>
+                      </a:pPr>
+                      <a:r>
+                        <a:rPr lang="en-US" sz="1400" dirty="0">
+                          <a:solidFill>
+                            <a:srgbClr val="1F2429"/>
+                          </a:solidFill>
+                          <a:latin typeface="Calibri" pitchFamily="34" charset="0"/>
+                          <a:ea typeface="Calibri" pitchFamily="34" charset="-122"/>
+                          <a:cs typeface="Calibri" pitchFamily="34" charset="-120"/>
+                        </a:rPr>
+                        <a:t>T1 COMMIT</a:t>
+                      </a:r>
+                      <a:endParaRPr lang="en-US" sz="1400" dirty="0">
+                        <a:latin typeface="Calibri" pitchFamily="34" charset="0"/>
+                        <a:ea typeface="Calibri" pitchFamily="34" charset="-122"/>
+                        <a:cs typeface="Calibri" pitchFamily="34" charset="-120"/>
+                      </a:endParaRPr>
+                    </a:p>
+                  </a:txBody>
+                  <a:tcPr marL="91440" marR="91440" marT="45720" marB="45720" anchor="ctr">
+                    <a:lnL w="9525" cap="flat" cmpd="sng" algn="ctr">
+                      <a:solidFill>
+                        <a:srgbClr val="E1E4E8"/>
+                      </a:solidFill>
+                      <a:prstDash val="solid"/>
+                      <a:round/>
+                      <a:headEnd type="none" w="med" len="med"/>
+                      <a:tailEnd type="none" w="med" len="med"/>
+                    </a:lnL>
+                    <a:lnR w="9525" cap="flat" cmpd="sng" algn="ctr">
+                      <a:solidFill>
+                        <a:srgbClr val="E1E4E8"/>
+                      </a:solidFill>
+                      <a:prstDash val="solid"/>
+                      <a:round/>
+                      <a:headEnd type="none" w="med" len="med"/>
+                      <a:tailEnd type="none" w="med" len="med"/>
+                    </a:lnR>
+                    <a:lnT w="9525" cap="flat" cmpd="sng" algn="ctr">
+                      <a:solidFill>
+                        <a:srgbClr val="E1E4E8"/>
+                      </a:solidFill>
+                      <a:prstDash val="solid"/>
+                      <a:round/>
+                      <a:headEnd type="none" w="med" len="med"/>
+                      <a:tailEnd type="none" w="med" len="med"/>
+                    </a:lnT>
+                    <a:lnB w="9525" cap="flat" cmpd="sng" algn="ctr">
+                      <a:solidFill>
+                        <a:srgbClr val="E1E4E8"/>
+                      </a:solidFill>
+                      <a:prstDash val="solid"/>
+                      <a:round/>
+                      <a:headEnd type="none" w="med" len="med"/>
+                      <a:tailEnd type="none" w="med" len="med"/>
+                    </a:lnB>
+                    <a:solidFill>
+                      <a:srgbClr val="FFFFFF"/>
+                    </a:solidFill>
+                  </a:tcPr>
+                </a:tc>
+                <a:tc>
+                  <a:txBody>
+                    <a:bodyPr/>
+                    <a:lstStyle/>
+                    <a:p>
+                      <a:pPr algn="l" indent="0" marL="0">
+                        <a:buNone/>
+                      </a:pPr>
+                      <a:endParaRPr lang="en-US" sz="1400" dirty="0">
+                        <a:latin typeface="Calibri" pitchFamily="34" charset="0"/>
+                        <a:ea typeface="Calibri" pitchFamily="34" charset="-122"/>
+                        <a:cs typeface="Calibri" pitchFamily="34" charset="-120"/>
+                      </a:endParaRPr>
+                    </a:p>
+                  </a:txBody>
+                  <a:tcPr marL="91440" marR="91440" marT="45720" marB="45720" anchor="ctr">
+                    <a:lnL w="9525" cap="flat" cmpd="sng" algn="ctr">
+                      <a:solidFill>
+                        <a:srgbClr val="E1E4E8"/>
+                      </a:solidFill>
+                      <a:prstDash val="solid"/>
+                      <a:round/>
+                      <a:headEnd type="none" w="med" len="med"/>
+                      <a:tailEnd type="none" w="med" len="med"/>
+                    </a:lnL>
+                    <a:lnR w="9525" cap="flat" cmpd="sng" algn="ctr">
+                      <a:solidFill>
+                        <a:srgbClr val="E1E4E8"/>
+                      </a:solidFill>
+                      <a:prstDash val="solid"/>
+                      <a:round/>
+                      <a:headEnd type="none" w="med" len="med"/>
+                      <a:tailEnd type="none" w="med" len="med"/>
+                    </a:lnR>
+                    <a:lnT w="9525" cap="flat" cmpd="sng" algn="ctr">
+                      <a:solidFill>
+                        <a:srgbClr val="E1E4E8"/>
+                      </a:solidFill>
+                      <a:prstDash val="solid"/>
+                      <a:round/>
+                      <a:headEnd type="none" w="med" len="med"/>
+                      <a:tailEnd type="none" w="med" len="med"/>
+                    </a:lnT>
+                    <a:lnB w="9525" cap="flat" cmpd="sng" algn="ctr">
+                      <a:solidFill>
+                        <a:srgbClr val="E1E4E8"/>
+                      </a:solidFill>
+                      <a:prstDash val="solid"/>
+                      <a:round/>
+                      <a:headEnd type="none" w="med" len="med"/>
+                      <a:tailEnd type="none" w="med" len="med"/>
+                    </a:lnB>
+                    <a:solidFill>
+                      <a:srgbClr val="FFFFFF"/>
+                    </a:solidFill>
+                  </a:tcPr>
+                </a:tc>
+                <a:tc>
+                  <a:txBody>
+                    <a:bodyPr/>
+                    <a:lstStyle/>
+                    <a:p>
+                      <a:pPr algn="l" indent="0" marL="0">
+                        <a:buNone/>
+                      </a:pPr>
+                      <a:r>
+                        <a:rPr lang="en-US" sz="1400" dirty="0">
+                          <a:solidFill>
+                            <a:srgbClr val="1F2429"/>
+                          </a:solidFill>
+                          <a:latin typeface="Calibri" pitchFamily="34" charset="0"/>
+                          <a:ea typeface="Calibri" pitchFamily="34" charset="-122"/>
+                          <a:cs typeface="Calibri" pitchFamily="34" charset="-120"/>
+                        </a:rPr>
+                        <a:t>1100</a:t>
+                      </a:r>
+                      <a:endParaRPr lang="en-US" sz="1400" dirty="0">
+                        <a:latin typeface="Calibri" pitchFamily="34" charset="0"/>
+                        <a:ea typeface="Calibri" pitchFamily="34" charset="-122"/>
+                        <a:cs typeface="Calibri" pitchFamily="34" charset="-120"/>
+                      </a:endParaRPr>
+                    </a:p>
+                  </a:txBody>
+                  <a:tcPr marL="91440" marR="91440" marT="45720" marB="45720" anchor="ctr">
+                    <a:lnL w="9525" cap="flat" cmpd="sng" algn="ctr">
+                      <a:solidFill>
+                        <a:srgbClr val="E1E4E8"/>
+                      </a:solidFill>
+                      <a:prstDash val="solid"/>
+                      <a:round/>
+                      <a:headEnd type="none" w="med" len="med"/>
+                      <a:tailEnd type="none" w="med" len="med"/>
+                    </a:lnL>
+                    <a:lnR w="9525" cap="flat" cmpd="sng" algn="ctr">
+                      <a:solidFill>
+                        <a:srgbClr val="E1E4E8"/>
+                      </a:solidFill>
+                      <a:prstDash val="solid"/>
+                      <a:round/>
+                      <a:headEnd type="none" w="med" len="med"/>
+                      <a:tailEnd type="none" w="med" len="med"/>
+                    </a:lnR>
+                    <a:lnT w="9525" cap="flat" cmpd="sng" algn="ctr">
+                      <a:solidFill>
+                        <a:srgbClr val="E1E4E8"/>
+                      </a:solidFill>
+                      <a:prstDash val="solid"/>
+                      <a:round/>
+                      <a:headEnd type="none" w="med" len="med"/>
+                      <a:tailEnd type="none" w="med" len="med"/>
+                    </a:lnT>
+                    <a:lnB w="9525" cap="flat" cmpd="sng" algn="ctr">
+                      <a:solidFill>
+                        <a:srgbClr val="E1E4E8"/>
+                      </a:solidFill>
+                      <a:prstDash val="solid"/>
+                      <a:round/>
+                      <a:headEnd type="none" w="med" len="med"/>
+                      <a:tailEnd type="none" w="med" len="med"/>
+                    </a:lnB>
+                    <a:solidFill>
+                      <a:srgbClr val="FFFFFF"/>
+                    </a:solidFill>
+                  </a:tcPr>
+                </a:tc>
+              </a:tr>
+            </a:tbl>
+          </a:graphicData>
+        </a:graphic>
+      </p:graphicFrame>
+      <p:sp>
+        <p:nvSpPr>
+          <p:cNvPr id="7" name="Shape"/>
+          <p:cNvSpPr/>
+          <p:nvPr/>
+        </p:nvSpPr>
+        <p:spPr>
+          <a:xfrm>
+            <a:off x="548640" y="5435000"/>
+            <a:ext cx="11064240" cy="900000"/>
+          </a:xfrm>
+          <a:prstGeom prst="roundRect">
+            <a:avLst>
+              <a:gd name="adj" fmla="val 5333"/>
+            </a:avLst>
+          </a:prstGeom>
+          <a:solidFill>
+            <a:srgbClr val="FFF7EA"/>
+          </a:solidFill>
+          <a:ln w="12700">
+            <a:solidFill>
+              <a:srgbClr val="E8A33D"/>
+            </a:solidFill>
+            <a:prstDash val="solid"/>
+          </a:ln>
+        </p:spPr>
+      </p:sp>
+      <p:sp>
+        <p:nvSpPr>
+          <p:cNvPr id="8" name="Text"/>
+          <p:cNvSpPr txBox="1"/>
+          <p:nvPr/>
+        </p:nvSpPr>
+        <p:spPr>
+          <a:xfrm>
+            <a:off x="822960" y="5572160"/>
+            <a:ext cx="10515600" cy="625680"/>
+          </a:xfrm>
+          <a:prstGeom prst="rect">
+            <a:avLst/>
+          </a:prstGeom>
+          <a:noFill/>
+          <a:ln/>
+        </p:spPr>
+        <p:txBody>
+          <a:bodyPr wrap="square" rtlCol="0" anchor="t"/>
+          <a:lstStyle/>
+          <a:p>
+            <a:pPr algn="l" indent="0" marL="0">
+              <a:lnSpc>
+                <a:spcPct val="120000"/>
+              </a:lnSpc>
+              <a:buNone/>
+            </a:pPr>
+            <a:r>
+              <a:rPr lang="en-US" sz="1800" b="1" dirty="0">
+                <a:solidFill>
+                  <a:srgbClr val="1F2429"/>
+                </a:solidFill>
+                <a:latin typeface="Calibri" pitchFamily="34" charset="0"/>
+                <a:ea typeface="Calibri" pitchFamily="34" charset="-122"/>
+                <a:cs typeface="Calibri" pitchFamily="34" charset="-120"/>
+              </a:rPr>
+              <a:t>Final balance is 1100, not 1150 — </a:t>
+            </a:r>
+            <a:r>
+              <a:rPr lang="en-US" sz="1800" dirty="0">
+                <a:solidFill>
+                  <a:srgbClr val="1F2429"/>
+                </a:solidFill>
+                <a:latin typeface="Calibri" pitchFamily="34" charset="0"/>
+                <a:ea typeface="Calibri" pitchFamily="34" charset="-122"/>
+                <a:cs typeface="Calibri" pitchFamily="34" charset="-120"/>
+              </a:rPr>
+              <a:t>T2's committed +50 deposit is silently lost. Full treatment, including how locking prevents this, is next lecture.</a:t>
+            </a:r>
+            <a:endParaRPr lang="en-US" sz="1800" dirty="0"/>
+          </a:p>
+        </p:txBody>
+      </p:sp>
+    </p:spTree>
+  </p:cSld>
+  <p:clrMapOvr>
+    <a:masterClrMapping/>
+  </p:clrMapOvr>
+</p:sld>
+</file>
+
+<file path=ppt/slides/slide15.xml><?xml version="1.0" encoding="utf-8"?>
+<p:sld xmlns:a="http://schemas.openxmlformats.org/drawingml/2006/main" xmlns:r="http://schemas.openxmlformats.org/officeDocument/2006/relationships" xmlns:p="http://schemas.openxmlformats.org/presentationml/2006/main">
+  <p:cSld name="Slide 15">
+    <p:bg>
+      <p:bgPr>
+        <a:solidFill>
+          <a:srgbClr val="F7F8F9"/>
+        </a:solidFill>
+      </p:bgPr>
+    </p:bg>
+    <p:spTree>
+      <p:nvGrpSpPr>
+        <p:cNvPr id="1" name=""/>
+        <p:cNvGrpSpPr/>
+        <p:nvPr/>
+      </p:nvGrpSpPr>
+      <p:grpSpPr>
+        <a:xfrm>
+          <a:off x="0" y="0"/>
+          <a:ext cx="0" cy="0"/>
+          <a:chOff x="0" y="0"/>
+          <a:chExt cx="0" cy="0"/>
+        </a:xfrm>
+      </p:grpSpPr>
+      <p:sp>
+        <p:nvSpPr>
+          <p:cNvPr id="2" name="Text 0"/>
+          <p:cNvSpPr txBox="1"/>
+          <p:nvPr/>
+        </p:nvSpPr>
+        <p:spPr>
+          <a:xfrm>
+            <a:off x="548640" y="320040"/>
+            <a:ext cx="9144000" cy="292608"/>
+          </a:xfrm>
+          <a:prstGeom prst="rect">
+            <a:avLst/>
+          </a:prstGeom>
+          <a:noFill/>
+          <a:ln/>
+        </p:spPr>
+        <p:txBody>
+          <a:bodyPr wrap="square" rtlCol="0" anchor="ctr"/>
+          <a:lstStyle/>
+          <a:p>
+            <a:pPr algn="l" indent="0" marL="0">
+              <a:buNone/>
+            </a:pPr>
+            <a:r>
+              <a:rPr lang="en-US" sz="1200" b="1" dirty="0" spc="150" kern="0">
+                <a:solidFill>
+                  <a:srgbClr val="8B7FD9"/>
+                </a:solidFill>
+                <a:latin typeface="Calibri" pitchFamily="34" charset="0"/>
+                <a:ea typeface="Calibri" pitchFamily="34" charset="-122"/>
+                <a:cs typeface="Calibri" pitchFamily="34" charset="-120"/>
+              </a:rPr>
+              <a:t>ATOMICITY, VIOLATED</a:t>
+            </a:r>
+            <a:endParaRPr lang="en-US" sz="1200" dirty="0"/>
+          </a:p>
+        </p:txBody>
+      </p:sp>
+      <p:sp>
+        <p:nvSpPr>
+          <p:cNvPr id="3" name="Text 1"/>
+          <p:cNvSpPr txBox="1"/>
+          <p:nvPr/>
+        </p:nvSpPr>
+        <p:spPr>
+          <a:xfrm>
+            <a:off x="548640" y="566928"/>
+            <a:ext cx="11064240" cy="640080"/>
+          </a:xfrm>
+          <a:prstGeom prst="rect">
+            <a:avLst/>
+          </a:prstGeom>
+          <a:noFill/>
+          <a:ln/>
+        </p:spPr>
+        <p:txBody>
+          <a:bodyPr wrap="square" rtlCol="0" anchor="ctr"/>
+          <a:lstStyle/>
+          <a:p>
+            <a:pPr algn="l" indent="0" marL="0">
+              <a:buNone/>
+            </a:pPr>
+            <a:r>
+              <a:rPr lang="en-US" sz="2500" b="1" dirty="0">
+                <a:solidFill>
+                  <a:srgbClr val="1F2429"/>
+                </a:solidFill>
+                <a:latin typeface="Calibri" pitchFamily="34" charset="0"/>
+                <a:ea typeface="Calibri" pitchFamily="34" charset="-122"/>
+                <a:cs typeface="Calibri" pitchFamily="34" charset="-120"/>
+              </a:rPr>
+              <a:t>Atomicity Violation: The Balances, Snapshotted</a:t>
+            </a:r>
+            <a:endParaRPr lang="en-US" sz="1800" dirty="0"/>
+          </a:p>
+        </p:txBody>
+      </p:sp>
+      <p:sp>
+        <p:nvSpPr>
+          <p:cNvPr id="4" name="Text 2"/>
+          <p:cNvSpPr txBox="1"/>
+          <p:nvPr/>
+        </p:nvSpPr>
+        <p:spPr>
+          <a:xfrm>
+            <a:off x="9951415" y="6455664"/>
+            <a:ext cx="2011680" cy="292608"/>
+          </a:xfrm>
+          <a:prstGeom prst="rect">
+            <a:avLst/>
+          </a:prstGeom>
+          <a:noFill/>
+          <a:ln/>
+        </p:spPr>
+        <p:txBody>
+          <a:bodyPr wrap="square" rtlCol="0" anchor="ctr"/>
+          <a:lstStyle/>
+          <a:p>
+            <a:pPr algn="r" indent="0" marL="0">
+              <a:buNone/>
+            </a:pPr>
+            <a:r>
+              <a:rPr lang="en-US" sz="1200" u="sng" dirty="0">
+                <a:solidFill>
+                  <a:srgbClr val="8A939B"/>
+                </a:solidFill>
+                <a:latin typeface="Calibri" pitchFamily="34" charset="0"/>
+                <a:ea typeface="Calibri" pitchFamily="34" charset="-122"/>
+                <a:cs typeface="Calibri" pitchFamily="34" charset="-120"/>
+                <a:hlinkClick r:id="rId1" invalidUrl="" action="" tgtFrame="" tooltip="" history="1" highlightClick="0" endSnd="0">
+                  <a:extLst>
+                    <a:ext uri="{A12FA001-AC4F-418D-AE19-62706E023703}">
+                      <ahyp:hlinkClr xmlns:ahyp="http://schemas.microsoft.com/office/drawing/2018/hyperlinkcolor" val="tx"/>
+                    </a:ext>
+                  </a:extLst>
+                </a:hlinkClick>
+              </a:rPr>
+              <a:t>cuinotes.com</a:t>
+            </a:r>
+            <a:pPr algn="r" indent="0" marL="0">
+              <a:buNone/>
+            </a:pPr>
+            <a:r>
+              <a:rPr lang="en-US" sz="1200" dirty="0">
+                <a:solidFill>
+                  <a:srgbClr val="8A939B"/>
+                </a:solidFill>
+                <a:latin typeface="Calibri" pitchFamily="34" charset="0"/>
+                <a:ea typeface="Calibri" pitchFamily="34" charset="-122"/>
+                <a:cs typeface="Calibri" pitchFamily="34" charset="-120"/>
+              </a:rPr>
+              <a:t>  ·  11</a:t>
+            </a:r>
+            <a:endParaRPr lang="en-US" sz="1200" dirty="0"/>
+          </a:p>
+        </p:txBody>
+      </p:sp>
+      <p:sp>
+        <p:nvSpPr>
+          <p:cNvPr id="5" name="Text"/>
+          <p:cNvSpPr txBox="1"/>
+          <p:nvPr/>
+        </p:nvSpPr>
+        <p:spPr>
+          <a:xfrm>
+            <a:off x="548640" y="1240000"/>
+            <a:ext cx="11064240" cy="460000"/>
+          </a:xfrm>
+          <a:prstGeom prst="rect">
+            <a:avLst/>
+          </a:prstGeom>
+          <a:noFill/>
+          <a:ln/>
+        </p:spPr>
+        <p:txBody>
+          <a:bodyPr wrap="square" rtlCol="0" anchor="t"/>
+          <a:lstStyle/>
+          <a:p>
+            <a:pPr algn="l" indent="0" marL="0">
+              <a:lnSpc>
+                <a:spcPct val="120000"/>
+              </a:lnSpc>
+              <a:buNone/>
+            </a:pPr>
+            <a:r>
+              <a:rPr lang="en-US" sz="1800" dirty="0">
+                <a:solidFill>
+                  <a:srgbClr val="1F2429"/>
+                </a:solidFill>
+                <a:latin typeface="Calibri" pitchFamily="34" charset="0"/>
+                <a:ea typeface="Calibri" pitchFamily="34" charset="-122"/>
+                <a:cs typeface="Calibri" pitchFamily="34" charset="-120"/>
+              </a:rPr>
+              <a:t>PKR 10,000 transfer from A101 to A205, traced across a crash:</a:t>
+            </a:r>
+            <a:endParaRPr lang="en-US" sz="1800" dirty="0"/>
+          </a:p>
+        </p:txBody>
+      </p:sp>
+      <p:graphicFrame>
+        <p:nvGraphicFramePr>
+          <p:cNvPr id="6" name="Table"/>
+          <p:cNvGraphicFramePr>
+            <a:graphicFrameLocks noGrp="1"/>
+          </p:cNvGraphicFramePr>
+          <p:nvPr/>
+        </p:nvGraphicFramePr>
+        <p:xfrm>
+          <a:off x="548640" y="1780000"/>
+          <a:ext cx="11064240" cy="2480000"/>
+        </p:xfrm>
+        <a:graphic>
+          <a:graphicData uri="http://schemas.openxmlformats.org/drawingml/2006/table">
+            <a:tbl>
+              <a:tblPr/>
+              <a:tblGrid>
+                <a:gridCol w="4200000"/>
+                <a:gridCol w="2300000"/>
+                <a:gridCol w="2300000"/>
+                <a:gridCol w="2264240"/>
+              </a:tblGrid>
+              <a:tr h="620000">
+                <a:tc>
+                  <a:txBody>
+                    <a:bodyPr/>
+                    <a:lstStyle/>
+                    <a:p>
+                      <a:pPr algn="l" indent="0" marL="0">
+                        <a:buNone/>
+                      </a:pPr>
+                      <a:r>
+                        <a:rPr lang="en-US" sz="1400" b="1" dirty="0">
+                          <a:solidFill>
+                            <a:srgbClr val="FFFFFF"/>
+                          </a:solidFill>
+                          <a:latin typeface="Calibri" pitchFamily="34" charset="0"/>
+                          <a:ea typeface="Calibri" pitchFamily="34" charset="-122"/>
+                          <a:cs typeface="Calibri" pitchFamily="34" charset="-120"/>
+                        </a:rPr>
+                        <a:t>Scenario</a:t>
+                      </a:r>
+                      <a:endParaRPr lang="en-US" sz="1400" dirty="0">
+                        <a:latin typeface="Calibri" pitchFamily="34" charset="0"/>
+                        <a:ea typeface="Calibri" pitchFamily="34" charset="-122"/>
+                        <a:cs typeface="Calibri" pitchFamily="34" charset="-120"/>
+                      </a:endParaRPr>
+                    </a:p>
+                  </a:txBody>
+                  <a:tcPr marL="91440" marR="91440" marT="45720" marB="45720" anchor="ctr">
+                    <a:lnL w="9525" cap="flat" cmpd="sng" algn="ctr">
+                      <a:solidFill>
+                        <a:srgbClr val="E1E4E8"/>
+                      </a:solidFill>
+                      <a:prstDash val="solid"/>
+                      <a:round/>
+                      <a:headEnd type="none" w="med" len="med"/>
+                      <a:tailEnd type="none" w="med" len="med"/>
+                    </a:lnL>
+                    <a:lnR w="9525" cap="flat" cmpd="sng" algn="ctr">
+                      <a:solidFill>
+                        <a:srgbClr val="E1E4E8"/>
+                      </a:solidFill>
+                      <a:prstDash val="solid"/>
+                      <a:round/>
+                      <a:headEnd type="none" w="med" len="med"/>
+                      <a:tailEnd type="none" w="med" len="med"/>
+                    </a:lnR>
+                    <a:lnT w="9525" cap="flat" cmpd="sng" algn="ctr">
+                      <a:solidFill>
+                        <a:srgbClr val="E1E4E8"/>
+                      </a:solidFill>
+                      <a:prstDash val="solid"/>
+                      <a:round/>
+                      <a:headEnd type="none" w="med" len="med"/>
+                      <a:tailEnd type="none" w="med" len="med"/>
+                    </a:lnT>
+                    <a:lnB w="9525" cap="flat" cmpd="sng" algn="ctr">
+                      <a:solidFill>
+                        <a:srgbClr val="E1E4E8"/>
+                      </a:solidFill>
+                      <a:prstDash val="solid"/>
+                      <a:round/>
+                      <a:headEnd type="none" w="med" len="med"/>
+                      <a:tailEnd type="none" w="med" len="med"/>
+                    </a:lnB>
+                    <a:solidFill>
+                      <a:srgbClr val="0E9E85"/>
+                    </a:solidFill>
+                  </a:tcPr>
+                </a:tc>
+                <a:tc>
+                  <a:txBody>
+                    <a:bodyPr/>
+                    <a:lstStyle/>
+                    <a:p>
+                      <a:pPr algn="l" indent="0" marL="0">
+                        <a:buNone/>
+                      </a:pPr>
+                      <a:r>
+                        <a:rPr lang="en-US" sz="1400" b="1" dirty="0">
+                          <a:solidFill>
+                            <a:srgbClr val="FFFFFF"/>
+                          </a:solidFill>
+                          <a:latin typeface="Calibri" pitchFamily="34" charset="0"/>
+                          <a:ea typeface="Calibri" pitchFamily="34" charset="-122"/>
+                          <a:cs typeface="Calibri" pitchFamily="34" charset="-120"/>
+                        </a:rPr>
+                        <a:t>A101</a:t>
+                      </a:r>
+                      <a:endParaRPr lang="en-US" sz="1400" dirty="0">
+                        <a:latin typeface="Calibri" pitchFamily="34" charset="0"/>
+                        <a:ea typeface="Calibri" pitchFamily="34" charset="-122"/>
+                        <a:cs typeface="Calibri" pitchFamily="34" charset="-120"/>
+                      </a:endParaRPr>
+                    </a:p>
+                  </a:txBody>
+                  <a:tcPr marL="91440" marR="91440" marT="45720" marB="45720" anchor="ctr">
+                    <a:lnL w="9525" cap="flat" cmpd="sng" algn="ctr">
+                      <a:solidFill>
+                        <a:srgbClr val="E1E4E8"/>
+                      </a:solidFill>
+                      <a:prstDash val="solid"/>
+                      <a:round/>
+                      <a:headEnd type="none" w="med" len="med"/>
+                      <a:tailEnd type="none" w="med" len="med"/>
+                    </a:lnL>
+                    <a:lnR w="9525" cap="flat" cmpd="sng" algn="ctr">
+                      <a:solidFill>
+                        <a:srgbClr val="E1E4E8"/>
+                      </a:solidFill>
+                      <a:prstDash val="solid"/>
+                      <a:round/>
+                      <a:headEnd type="none" w="med" len="med"/>
+                      <a:tailEnd type="none" w="med" len="med"/>
+                    </a:lnR>
+                    <a:lnT w="9525" cap="flat" cmpd="sng" algn="ctr">
+                      <a:solidFill>
+                        <a:srgbClr val="E1E4E8"/>
+                      </a:solidFill>
+                      <a:prstDash val="solid"/>
+                      <a:round/>
+                      <a:headEnd type="none" w="med" len="med"/>
+                      <a:tailEnd type="none" w="med" len="med"/>
+                    </a:lnT>
+                    <a:lnB w="9525" cap="flat" cmpd="sng" algn="ctr">
+                      <a:solidFill>
+                        <a:srgbClr val="E1E4E8"/>
+                      </a:solidFill>
+                      <a:prstDash val="solid"/>
+                      <a:round/>
+                      <a:headEnd type="none" w="med" len="med"/>
+                      <a:tailEnd type="none" w="med" len="med"/>
+                    </a:lnB>
+                    <a:solidFill>
+                      <a:srgbClr val="0E9E85"/>
+                    </a:solidFill>
+                  </a:tcPr>
+                </a:tc>
+                <a:tc>
+                  <a:txBody>
+                    <a:bodyPr/>
+                    <a:lstStyle/>
+                    <a:p>
+                      <a:pPr algn="l" indent="0" marL="0">
+                        <a:buNone/>
+                      </a:pPr>
+                      <a:r>
+                        <a:rPr lang="en-US" sz="1400" b="1" dirty="0">
+                          <a:solidFill>
+                            <a:srgbClr val="FFFFFF"/>
+                          </a:solidFill>
+                          <a:latin typeface="Calibri" pitchFamily="34" charset="0"/>
+                          <a:ea typeface="Calibri" pitchFamily="34" charset="-122"/>
+                          <a:cs typeface="Calibri" pitchFamily="34" charset="-120"/>
+                        </a:rPr>
+                        <a:t>A205</a:t>
+                      </a:r>
+                      <a:endParaRPr lang="en-US" sz="1400" dirty="0">
+                        <a:latin typeface="Calibri" pitchFamily="34" charset="0"/>
+                        <a:ea typeface="Calibri" pitchFamily="34" charset="-122"/>
+                        <a:cs typeface="Calibri" pitchFamily="34" charset="-120"/>
+                      </a:endParaRPr>
+                    </a:p>
+                  </a:txBody>
+                  <a:tcPr marL="91440" marR="91440" marT="45720" marB="45720" anchor="ctr">
+                    <a:lnL w="9525" cap="flat" cmpd="sng" algn="ctr">
+                      <a:solidFill>
+                        <a:srgbClr val="E1E4E8"/>
+                      </a:solidFill>
+                      <a:prstDash val="solid"/>
+                      <a:round/>
+                      <a:headEnd type="none" w="med" len="med"/>
+                      <a:tailEnd type="none" w="med" len="med"/>
+                    </a:lnL>
+                    <a:lnR w="9525" cap="flat" cmpd="sng" algn="ctr">
+                      <a:solidFill>
+                        <a:srgbClr val="E1E4E8"/>
+                      </a:solidFill>
+                      <a:prstDash val="solid"/>
+                      <a:round/>
+                      <a:headEnd type="none" w="med" len="med"/>
+                      <a:tailEnd type="none" w="med" len="med"/>
+                    </a:lnR>
+                    <a:lnT w="9525" cap="flat" cmpd="sng" algn="ctr">
+                      <a:solidFill>
+                        <a:srgbClr val="E1E4E8"/>
+                      </a:solidFill>
+                      <a:prstDash val="solid"/>
+                      <a:round/>
+                      <a:headEnd type="none" w="med" len="med"/>
+                      <a:tailEnd type="none" w="med" len="med"/>
+                    </a:lnT>
+                    <a:lnB w="9525" cap="flat" cmpd="sng" algn="ctr">
+                      <a:solidFill>
+                        <a:srgbClr val="E1E4E8"/>
+                      </a:solidFill>
+                      <a:prstDash val="solid"/>
+                      <a:round/>
+                      <a:headEnd type="none" w="med" len="med"/>
+                      <a:tailEnd type="none" w="med" len="med"/>
+                    </a:lnB>
+                    <a:solidFill>
+                      <a:srgbClr val="0E9E85"/>
+                    </a:solidFill>
+                  </a:tcPr>
+                </a:tc>
+                <a:tc>
+                  <a:txBody>
+                    <a:bodyPr/>
+                    <a:lstStyle/>
+                    <a:p>
+                      <a:pPr algn="l" indent="0" marL="0">
+                        <a:buNone/>
+                      </a:pPr>
+                      <a:r>
+                        <a:rPr lang="en-US" sz="1400" b="1" dirty="0">
+                          <a:solidFill>
+                            <a:srgbClr val="FFFFFF"/>
+                          </a:solidFill>
+                          <a:latin typeface="Calibri" pitchFamily="34" charset="0"/>
+                          <a:ea typeface="Calibri" pitchFamily="34" charset="-122"/>
+                          <a:cs typeface="Calibri" pitchFamily="34" charset="-120"/>
+                        </a:rPr>
+                        <a:t>Total</a:t>
+                      </a:r>
+                      <a:endParaRPr lang="en-US" sz="1400" dirty="0">
+                        <a:latin typeface="Calibri" pitchFamily="34" charset="0"/>
+                        <a:ea typeface="Calibri" pitchFamily="34" charset="-122"/>
+                        <a:cs typeface="Calibri" pitchFamily="34" charset="-120"/>
+                      </a:endParaRPr>
+                    </a:p>
+                  </a:txBody>
+                  <a:tcPr marL="91440" marR="91440" marT="45720" marB="45720" anchor="ctr">
+                    <a:lnL w="9525" cap="flat" cmpd="sng" algn="ctr">
+                      <a:solidFill>
+                        <a:srgbClr val="E1E4E8"/>
+                      </a:solidFill>
+                      <a:prstDash val="solid"/>
+                      <a:round/>
+                      <a:headEnd type="none" w="med" len="med"/>
+                      <a:tailEnd type="none" w="med" len="med"/>
+                    </a:lnL>
+                    <a:lnR w="9525" cap="flat" cmpd="sng" algn="ctr">
+                      <a:solidFill>
+                        <a:srgbClr val="E1E4E8"/>
+                      </a:solidFill>
+                      <a:prstDash val="solid"/>
+                      <a:round/>
+                      <a:headEnd type="none" w="med" len="med"/>
+                      <a:tailEnd type="none" w="med" len="med"/>
+                    </a:lnR>
+                    <a:lnT w="9525" cap="flat" cmpd="sng" algn="ctr">
+                      <a:solidFill>
+                        <a:srgbClr val="E1E4E8"/>
+                      </a:solidFill>
+                      <a:prstDash val="solid"/>
+                      <a:round/>
+                      <a:headEnd type="none" w="med" len="med"/>
+                      <a:tailEnd type="none" w="med" len="med"/>
+                    </a:lnT>
+                    <a:lnB w="9525" cap="flat" cmpd="sng" algn="ctr">
+                      <a:solidFill>
+                        <a:srgbClr val="E1E4E8"/>
+                      </a:solidFill>
+                      <a:prstDash val="solid"/>
+                      <a:round/>
+                      <a:headEnd type="none" w="med" len="med"/>
+                      <a:tailEnd type="none" w="med" len="med"/>
+                    </a:lnB>
+                    <a:solidFill>
+                      <a:srgbClr val="0E9E85"/>
+                    </a:solidFill>
+                  </a:tcPr>
+                </a:tc>
+              </a:tr>
+              <a:tr h="620000">
+                <a:tc>
+                  <a:txBody>
+                    <a:bodyPr/>
+                    <a:lstStyle/>
+                    <a:p>
+                      <a:pPr algn="l" indent="0" marL="0">
+                        <a:buNone/>
+                      </a:pPr>
+                      <a:r>
+                        <a:rPr lang="en-US" sz="1400" dirty="0">
+                          <a:solidFill>
+                            <a:srgbClr val="1F2429"/>
+                          </a:solidFill>
+                          <a:latin typeface="Calibri" pitchFamily="34" charset="0"/>
+                          <a:ea typeface="Calibri" pitchFamily="34" charset="-122"/>
+                          <a:cs typeface="Calibri" pitchFamily="34" charset="-120"/>
+                        </a:rPr>
+                        <a:t>Before</a:t>
+                      </a:r>
+                      <a:endParaRPr lang="en-US" sz="1400" dirty="0">
+                        <a:latin typeface="Calibri" pitchFamily="34" charset="0"/>
+                        <a:ea typeface="Calibri" pitchFamily="34" charset="-122"/>
+                        <a:cs typeface="Calibri" pitchFamily="34" charset="-120"/>
+                      </a:endParaRPr>
+                    </a:p>
+                  </a:txBody>
+                  <a:tcPr marL="91440" marR="91440" marT="45720" marB="45720" anchor="ctr">
+                    <a:lnL w="9525" cap="flat" cmpd="sng" algn="ctr">
+                      <a:solidFill>
+                        <a:srgbClr val="E1E4E8"/>
+                      </a:solidFill>
+                      <a:prstDash val="solid"/>
+                      <a:round/>
+                      <a:headEnd type="none" w="med" len="med"/>
+                      <a:tailEnd type="none" w="med" len="med"/>
+                    </a:lnL>
+                    <a:lnR w="9525" cap="flat" cmpd="sng" algn="ctr">
+                      <a:solidFill>
+                        <a:srgbClr val="E1E4E8"/>
+                      </a:solidFill>
+                      <a:prstDash val="solid"/>
+                      <a:round/>
+                      <a:headEnd type="none" w="med" len="med"/>
+                      <a:tailEnd type="none" w="med" len="med"/>
+                    </a:lnR>
+                    <a:lnT w="9525" cap="flat" cmpd="sng" algn="ctr">
+                      <a:solidFill>
+                        <a:srgbClr val="E1E4E8"/>
+                      </a:solidFill>
+                      <a:prstDash val="solid"/>
+                      <a:round/>
+                      <a:headEnd type="none" w="med" len="med"/>
+                      <a:tailEnd type="none" w="med" len="med"/>
+                    </a:lnT>
+                    <a:lnB w="9525" cap="flat" cmpd="sng" algn="ctr">
+                      <a:solidFill>
+                        <a:srgbClr val="E1E4E8"/>
+                      </a:solidFill>
+                      <a:prstDash val="solid"/>
+                      <a:round/>
+                      <a:headEnd type="none" w="med" len="med"/>
+                      <a:tailEnd type="none" w="med" len="med"/>
+                    </a:lnB>
+                    <a:solidFill>
+                      <a:srgbClr val="FFFFFF"/>
+                    </a:solidFill>
+                  </a:tcPr>
+                </a:tc>
+                <a:tc>
+                  <a:txBody>
+                    <a:bodyPr/>
+                    <a:lstStyle/>
+                    <a:p>
+                      <a:pPr algn="l" indent="0" marL="0">
+                        <a:buNone/>
+                      </a:pPr>
+                      <a:r>
+                        <a:rPr lang="en-US" sz="1400" dirty="0">
+                          <a:solidFill>
+                            <a:srgbClr val="1F2429"/>
+                          </a:solidFill>
+                          <a:latin typeface="Calibri" pitchFamily="34" charset="0"/>
+                          <a:ea typeface="Calibri" pitchFamily="34" charset="-122"/>
+                          <a:cs typeface="Calibri" pitchFamily="34" charset="-120"/>
+                        </a:rPr>
+                        <a:t>50,000</a:t>
+                      </a:r>
+                      <a:endParaRPr lang="en-US" sz="1400" dirty="0">
+                        <a:latin typeface="Calibri" pitchFamily="34" charset="0"/>
+                        <a:ea typeface="Calibri" pitchFamily="34" charset="-122"/>
+                        <a:cs typeface="Calibri" pitchFamily="34" charset="-120"/>
+                      </a:endParaRPr>
+                    </a:p>
+                  </a:txBody>
+                  <a:tcPr marL="91440" marR="91440" marT="45720" marB="45720" anchor="ctr">
+                    <a:lnL w="9525" cap="flat" cmpd="sng" algn="ctr">
+                      <a:solidFill>
+                        <a:srgbClr val="E1E4E8"/>
+                      </a:solidFill>
+                      <a:prstDash val="solid"/>
+                      <a:round/>
+                      <a:headEnd type="none" w="med" len="med"/>
+                      <a:tailEnd type="none" w="med" len="med"/>
+                    </a:lnL>
+                    <a:lnR w="9525" cap="flat" cmpd="sng" algn="ctr">
+                      <a:solidFill>
+                        <a:srgbClr val="E1E4E8"/>
+                      </a:solidFill>
+                      <a:prstDash val="solid"/>
+                      <a:round/>
+                      <a:headEnd type="none" w="med" len="med"/>
+                      <a:tailEnd type="none" w="med" len="med"/>
+                    </a:lnR>
+                    <a:lnT w="9525" cap="flat" cmpd="sng" algn="ctr">
+                      <a:solidFill>
+                        <a:srgbClr val="E1E4E8"/>
+                      </a:solidFill>
+                      <a:prstDash val="solid"/>
+                      <a:round/>
+                      <a:headEnd type="none" w="med" len="med"/>
+                      <a:tailEnd type="none" w="med" len="med"/>
+                    </a:lnT>
+                    <a:lnB w="9525" cap="flat" cmpd="sng" algn="ctr">
+                      <a:solidFill>
+                        <a:srgbClr val="E1E4E8"/>
+                      </a:solidFill>
+                      <a:prstDash val="solid"/>
+                      <a:round/>
+                      <a:headEnd type="none" w="med" len="med"/>
+                      <a:tailEnd type="none" w="med" len="med"/>
+                    </a:lnB>
+                    <a:solidFill>
+                      <a:srgbClr val="FFFFFF"/>
+                    </a:solidFill>
+                  </a:tcPr>
+                </a:tc>
+                <a:tc>
+                  <a:txBody>
+                    <a:bodyPr/>
+                    <a:lstStyle/>
+                    <a:p>
+                      <a:pPr algn="l" indent="0" marL="0">
+                        <a:buNone/>
+                      </a:pPr>
+                      <a:r>
+                        <a:rPr lang="en-US" sz="1400" dirty="0">
+                          <a:solidFill>
+                            <a:srgbClr val="1F2429"/>
+                          </a:solidFill>
+                          <a:latin typeface="Calibri" pitchFamily="34" charset="0"/>
+                          <a:ea typeface="Calibri" pitchFamily="34" charset="-122"/>
+                          <a:cs typeface="Calibri" pitchFamily="34" charset="-120"/>
+                        </a:rPr>
+                        <a:t>20,000</a:t>
+                      </a:r>
+                      <a:endParaRPr lang="en-US" sz="1400" dirty="0">
+                        <a:latin typeface="Calibri" pitchFamily="34" charset="0"/>
+                        <a:ea typeface="Calibri" pitchFamily="34" charset="-122"/>
+                        <a:cs typeface="Calibri" pitchFamily="34" charset="-120"/>
+                      </a:endParaRPr>
+                    </a:p>
+                  </a:txBody>
+                  <a:tcPr marL="91440" marR="91440" marT="45720" marB="45720" anchor="ctr">
+                    <a:lnL w="9525" cap="flat" cmpd="sng" algn="ctr">
+                      <a:solidFill>
+                        <a:srgbClr val="E1E4E8"/>
+                      </a:solidFill>
+                      <a:prstDash val="solid"/>
+                      <a:round/>
+                      <a:headEnd type="none" w="med" len="med"/>
+                      <a:tailEnd type="none" w="med" len="med"/>
+                    </a:lnL>
+                    <a:lnR w="9525" cap="flat" cmpd="sng" algn="ctr">
+                      <a:solidFill>
+                        <a:srgbClr val="E1E4E8"/>
+                      </a:solidFill>
+                      <a:prstDash val="solid"/>
+                      <a:round/>
+                      <a:headEnd type="none" w="med" len="med"/>
+                      <a:tailEnd type="none" w="med" len="med"/>
+                    </a:lnR>
+                    <a:lnT w="9525" cap="flat" cmpd="sng" algn="ctr">
+                      <a:solidFill>
+                        <a:srgbClr val="E1E4E8"/>
+                      </a:solidFill>
+                      <a:prstDash val="solid"/>
+                      <a:round/>
+                      <a:headEnd type="none" w="med" len="med"/>
+                      <a:tailEnd type="none" w="med" len="med"/>
+                    </a:lnT>
+                    <a:lnB w="9525" cap="flat" cmpd="sng" algn="ctr">
+                      <a:solidFill>
+                        <a:srgbClr val="E1E4E8"/>
+                      </a:solidFill>
+                      <a:prstDash val="solid"/>
+                      <a:round/>
+                      <a:headEnd type="none" w="med" len="med"/>
+                      <a:tailEnd type="none" w="med" len="med"/>
+                    </a:lnB>
+                    <a:solidFill>
+                      <a:srgbClr val="FFFFFF"/>
+                    </a:solidFill>
+                  </a:tcPr>
+                </a:tc>
+                <a:tc>
+                  <a:txBody>
+                    <a:bodyPr/>
+                    <a:lstStyle/>
+                    <a:p>
+                      <a:pPr algn="l" indent="0" marL="0">
+                        <a:buNone/>
+                      </a:pPr>
+                      <a:r>
+                        <a:rPr lang="en-US" sz="1400" dirty="0">
+                          <a:solidFill>
+                            <a:srgbClr val="1F2429"/>
+                          </a:solidFill>
+                          <a:latin typeface="Calibri" pitchFamily="34" charset="0"/>
+                          <a:ea typeface="Calibri" pitchFamily="34" charset="-122"/>
+                          <a:cs typeface="Calibri" pitchFamily="34" charset="-120"/>
+                        </a:rPr>
+                        <a:t>70,000</a:t>
+                      </a:r>
+                      <a:endParaRPr lang="en-US" sz="1400" dirty="0">
+                        <a:latin typeface="Calibri" pitchFamily="34" charset="0"/>
+                        <a:ea typeface="Calibri" pitchFamily="34" charset="-122"/>
+                        <a:cs typeface="Calibri" pitchFamily="34" charset="-120"/>
+                      </a:endParaRPr>
+                    </a:p>
+                  </a:txBody>
+                  <a:tcPr marL="91440" marR="91440" marT="45720" marB="45720" anchor="ctr">
+                    <a:lnL w="9525" cap="flat" cmpd="sng" algn="ctr">
+                      <a:solidFill>
+                        <a:srgbClr val="E1E4E8"/>
+                      </a:solidFill>
+                      <a:prstDash val="solid"/>
+                      <a:round/>
+                      <a:headEnd type="none" w="med" len="med"/>
+                      <a:tailEnd type="none" w="med" len="med"/>
+                    </a:lnL>
+                    <a:lnR w="9525" cap="flat" cmpd="sng" algn="ctr">
+                      <a:solidFill>
+                        <a:srgbClr val="E1E4E8"/>
+                      </a:solidFill>
+                      <a:prstDash val="solid"/>
+                      <a:round/>
+                      <a:headEnd type="none" w="med" len="med"/>
+                      <a:tailEnd type="none" w="med" len="med"/>
+                    </a:lnR>
+                    <a:lnT w="9525" cap="flat" cmpd="sng" algn="ctr">
+                      <a:solidFill>
+                        <a:srgbClr val="E1E4E8"/>
+                      </a:solidFill>
+                      <a:prstDash val="solid"/>
+                      <a:round/>
+                      <a:headEnd type="none" w="med" len="med"/>
+                      <a:tailEnd type="none" w="med" len="med"/>
+                    </a:lnT>
+                    <a:lnB w="9525" cap="flat" cmpd="sng" algn="ctr">
+                      <a:solidFill>
+                        <a:srgbClr val="E1E4E8"/>
+                      </a:solidFill>
+                      <a:prstDash val="solid"/>
+                      <a:round/>
+                      <a:headEnd type="none" w="med" len="med"/>
+                      <a:tailEnd type="none" w="med" len="med"/>
+                    </a:lnB>
+                    <a:solidFill>
+                      <a:srgbClr val="FFFFFF"/>
+                    </a:solidFill>
+                  </a:tcPr>
+                </a:tc>
+              </a:tr>
+              <a:tr h="620000">
+                <a:tc>
+                  <a:txBody>
+                    <a:bodyPr/>
+                    <a:lstStyle/>
+                    <a:p>
+                      <a:pPr algn="l" indent="0" marL="0">
+                        <a:buNone/>
+                      </a:pPr>
+                      <a:r>
+                        <a:rPr lang="en-US" sz="1400" b="1" dirty="0">
+                          <a:solidFill>
+                            <a:srgbClr val="B23B3B"/>
+                          </a:solidFill>
+                          <a:latin typeface="Calibri" pitchFamily="34" charset="0"/>
+                          <a:ea typeface="Calibri" pitchFamily="34" charset="-122"/>
+                          <a:cs typeface="Calibri" pitchFamily="34" charset="-120"/>
+                        </a:rPr>
+                        <a:t>During crash — no atomicity</a:t>
+                      </a:r>
+                      <a:endParaRPr lang="en-US" sz="1400" dirty="0">
+                        <a:latin typeface="Calibri" pitchFamily="34" charset="0"/>
+                        <a:ea typeface="Calibri" pitchFamily="34" charset="-122"/>
+                        <a:cs typeface="Calibri" pitchFamily="34" charset="-120"/>
+                      </a:endParaRPr>
+                    </a:p>
+                  </a:txBody>
+                  <a:tcPr marL="91440" marR="91440" marT="45720" marB="45720" anchor="ctr">
+                    <a:lnL w="9525" cap="flat" cmpd="sng" algn="ctr">
+                      <a:solidFill>
+                        <a:srgbClr val="E1E4E8"/>
+                      </a:solidFill>
+                      <a:prstDash val="solid"/>
+                      <a:round/>
+                      <a:headEnd type="none" w="med" len="med"/>
+                      <a:tailEnd type="none" w="med" len="med"/>
+                    </a:lnL>
+                    <a:lnR w="9525" cap="flat" cmpd="sng" algn="ctr">
+                      <a:solidFill>
+                        <a:srgbClr val="E1E4E8"/>
+                      </a:solidFill>
+                      <a:prstDash val="solid"/>
+                      <a:round/>
+                      <a:headEnd type="none" w="med" len="med"/>
+                      <a:tailEnd type="none" w="med" len="med"/>
+                    </a:lnR>
+                    <a:lnT w="9525" cap="flat" cmpd="sng" algn="ctr">
+                      <a:solidFill>
+                        <a:srgbClr val="E1E4E8"/>
+                      </a:solidFill>
+                      <a:prstDash val="solid"/>
+                      <a:round/>
+                      <a:headEnd type="none" w="med" len="med"/>
+                      <a:tailEnd type="none" w="med" len="med"/>
+                    </a:lnT>
+                    <a:lnB w="9525" cap="flat" cmpd="sng" algn="ctr">
+                      <a:solidFill>
+                        <a:srgbClr val="E1E4E8"/>
+                      </a:solidFill>
+                      <a:prstDash val="solid"/>
+                      <a:round/>
+                      <a:headEnd type="none" w="med" len="med"/>
+                      <a:tailEnd type="none" w="med" len="med"/>
+                    </a:lnB>
+                    <a:solidFill>
+                      <a:srgbClr val="FBE1E1"/>
+                    </a:solidFill>
+                  </a:tcPr>
+                </a:tc>
+                <a:tc>
+                  <a:txBody>
+                    <a:bodyPr/>
+                    <a:lstStyle/>
+                    <a:p>
+                      <a:pPr algn="l" indent="0" marL="0">
+                        <a:buNone/>
+                      </a:pPr>
+                      <a:r>
+                        <a:rPr lang="en-US" sz="1400" b="1" dirty="0">
+                          <a:solidFill>
+                            <a:srgbClr val="B23B3B"/>
+                          </a:solidFill>
+                          <a:latin typeface="Calibri" pitchFamily="34" charset="0"/>
+                          <a:ea typeface="Calibri" pitchFamily="34" charset="-122"/>
+                          <a:cs typeface="Calibri" pitchFamily="34" charset="-120"/>
+                        </a:rPr>
+                        <a:t>40,000 (debited)</a:t>
+                      </a:r>
+                      <a:endParaRPr lang="en-US" sz="1400" dirty="0">
+                        <a:latin typeface="Calibri" pitchFamily="34" charset="0"/>
+                        <a:ea typeface="Calibri" pitchFamily="34" charset="-122"/>
+                        <a:cs typeface="Calibri" pitchFamily="34" charset="-120"/>
+                      </a:endParaRPr>
+                    </a:p>
+                  </a:txBody>
+                  <a:tcPr marL="91440" marR="91440" marT="45720" marB="45720" anchor="ctr">
+                    <a:lnL w="9525" cap="flat" cmpd="sng" algn="ctr">
+                      <a:solidFill>
+                        <a:srgbClr val="E1E4E8"/>
+                      </a:solidFill>
+                      <a:prstDash val="solid"/>
+                      <a:round/>
+                      <a:headEnd type="none" w="med" len="med"/>
+                      <a:tailEnd type="none" w="med" len="med"/>
+                    </a:lnL>
+                    <a:lnR w="9525" cap="flat" cmpd="sng" algn="ctr">
+                      <a:solidFill>
+                        <a:srgbClr val="E1E4E8"/>
+                      </a:solidFill>
+                      <a:prstDash val="solid"/>
+                      <a:round/>
+                      <a:headEnd type="none" w="med" len="med"/>
+                      <a:tailEnd type="none" w="med" len="med"/>
+                    </a:lnR>
+                    <a:lnT w="9525" cap="flat" cmpd="sng" algn="ctr">
+                      <a:solidFill>
+                        <a:srgbClr val="E1E4E8"/>
+                      </a:solidFill>
+                      <a:prstDash val="solid"/>
+                      <a:round/>
+                      <a:headEnd type="none" w="med" len="med"/>
+                      <a:tailEnd type="none" w="med" len="med"/>
+                    </a:lnT>
+                    <a:lnB w="9525" cap="flat" cmpd="sng" algn="ctr">
+                      <a:solidFill>
+                        <a:srgbClr val="E1E4E8"/>
+                      </a:solidFill>
+                      <a:prstDash val="solid"/>
+                      <a:round/>
+                      <a:headEnd type="none" w="med" len="med"/>
+                      <a:tailEnd type="none" w="med" len="med"/>
+                    </a:lnB>
+                    <a:solidFill>
+                      <a:srgbClr val="FBE1E1"/>
+                    </a:solidFill>
+                  </a:tcPr>
+                </a:tc>
+                <a:tc>
+                  <a:txBody>
+                    <a:bodyPr/>
+                    <a:lstStyle/>
+                    <a:p>
+                      <a:pPr algn="l" indent="0" marL="0">
+                        <a:buNone/>
+                      </a:pPr>
+                      <a:r>
+                        <a:rPr lang="en-US" sz="1400" b="1" dirty="0">
+                          <a:solidFill>
+                            <a:srgbClr val="B23B3B"/>
+                          </a:solidFill>
+                          <a:latin typeface="Calibri" pitchFamily="34" charset="0"/>
+                          <a:ea typeface="Calibri" pitchFamily="34" charset="-122"/>
+                          <a:cs typeface="Calibri" pitchFamily="34" charset="-120"/>
+                        </a:rPr>
+                        <a:t>20,000 (credit never applied)</a:t>
+                      </a:r>
+                      <a:endParaRPr lang="en-US" sz="1400" dirty="0">
+                        <a:latin typeface="Calibri" pitchFamily="34" charset="0"/>
+                        <a:ea typeface="Calibri" pitchFamily="34" charset="-122"/>
+                        <a:cs typeface="Calibri" pitchFamily="34" charset="-120"/>
+                      </a:endParaRPr>
+                    </a:p>
+                  </a:txBody>
+                  <a:tcPr marL="91440" marR="91440" marT="45720" marB="45720" anchor="ctr">
+                    <a:lnL w="9525" cap="flat" cmpd="sng" algn="ctr">
+                      <a:solidFill>
+                        <a:srgbClr val="E1E4E8"/>
+                      </a:solidFill>
+                      <a:prstDash val="solid"/>
+                      <a:round/>
+                      <a:headEnd type="none" w="med" len="med"/>
+                      <a:tailEnd type="none" w="med" len="med"/>
+                    </a:lnL>
+                    <a:lnR w="9525" cap="flat" cmpd="sng" algn="ctr">
+                      <a:solidFill>
+                        <a:srgbClr val="E1E4E8"/>
+                      </a:solidFill>
+                      <a:prstDash val="solid"/>
+                      <a:round/>
+                      <a:headEnd type="none" w="med" len="med"/>
+                      <a:tailEnd type="none" w="med" len="med"/>
+                    </a:lnR>
+                    <a:lnT w="9525" cap="flat" cmpd="sng" algn="ctr">
+                      <a:solidFill>
+                        <a:srgbClr val="E1E4E8"/>
+                      </a:solidFill>
+                      <a:prstDash val="solid"/>
+                      <a:round/>
+                      <a:headEnd type="none" w="med" len="med"/>
+                      <a:tailEnd type="none" w="med" len="med"/>
+                    </a:lnT>
+                    <a:lnB w="9525" cap="flat" cmpd="sng" algn="ctr">
+                      <a:solidFill>
+                        <a:srgbClr val="E1E4E8"/>
+                      </a:solidFill>
+                      <a:prstDash val="solid"/>
+                      <a:round/>
+                      <a:headEnd type="none" w="med" len="med"/>
+                      <a:tailEnd type="none" w="med" len="med"/>
+                    </a:lnB>
+                    <a:solidFill>
+                      <a:srgbClr val="FBE1E1"/>
+                    </a:solidFill>
+                  </a:tcPr>
+                </a:tc>
+                <a:tc>
+                  <a:txBody>
+                    <a:bodyPr/>
+                    <a:lstStyle/>
+                    <a:p>
+                      <a:pPr algn="l" indent="0" marL="0">
+                        <a:buNone/>
+                      </a:pPr>
+                      <a:r>
+                        <a:rPr lang="en-US" sz="1400" b="1" dirty="0">
+                          <a:solidFill>
+                            <a:srgbClr val="B23B3B"/>
+                          </a:solidFill>
+                          <a:latin typeface="Calibri" pitchFamily="34" charset="0"/>
+                          <a:ea typeface="Calibri" pitchFamily="34" charset="-122"/>
+                          <a:cs typeface="Calibri" pitchFamily="34" charset="-120"/>
+                        </a:rPr>
+                        <a:t>60,000 — PKR 10,000 missing</a:t>
+                      </a:r>
+                      <a:endParaRPr lang="en-US" sz="1400" dirty="0">
+                        <a:latin typeface="Calibri" pitchFamily="34" charset="0"/>
+                        <a:ea typeface="Calibri" pitchFamily="34" charset="-122"/>
+                        <a:cs typeface="Calibri" pitchFamily="34" charset="-120"/>
+                      </a:endParaRPr>
+                    </a:p>
+                  </a:txBody>
+                  <a:tcPr marL="91440" marR="91440" marT="45720" marB="45720" anchor="ctr">
+                    <a:lnL w="9525" cap="flat" cmpd="sng" algn="ctr">
+                      <a:solidFill>
+                        <a:srgbClr val="E1E4E8"/>
+                      </a:solidFill>
+                      <a:prstDash val="solid"/>
+                      <a:round/>
+                      <a:headEnd type="none" w="med" len="med"/>
+                      <a:tailEnd type="none" w="med" len="med"/>
+                    </a:lnL>
+                    <a:lnR w="9525" cap="flat" cmpd="sng" algn="ctr">
+                      <a:solidFill>
+                        <a:srgbClr val="E1E4E8"/>
+                      </a:solidFill>
+                      <a:prstDash val="solid"/>
+                      <a:round/>
+                      <a:headEnd type="none" w="med" len="med"/>
+                      <a:tailEnd type="none" w="med" len="med"/>
+                    </a:lnR>
+                    <a:lnT w="9525" cap="flat" cmpd="sng" algn="ctr">
+                      <a:solidFill>
+                        <a:srgbClr val="E1E4E8"/>
+                      </a:solidFill>
+                      <a:prstDash val="solid"/>
+                      <a:round/>
+                      <a:headEnd type="none" w="med" len="med"/>
+                      <a:tailEnd type="none" w="med" len="med"/>
+                    </a:lnT>
+                    <a:lnB w="9525" cap="flat" cmpd="sng" algn="ctr">
+                      <a:solidFill>
+                        <a:srgbClr val="E1E4E8"/>
+                      </a:solidFill>
+                      <a:prstDash val="solid"/>
+                      <a:round/>
+                      <a:headEnd type="none" w="med" len="med"/>
+                      <a:tailEnd type="none" w="med" len="med"/>
+                    </a:lnB>
+                    <a:solidFill>
+                      <a:srgbClr val="FBE1E1"/>
+                    </a:solidFill>
+                  </a:tcPr>
+                </a:tc>
+              </a:tr>
+              <a:tr h="620000">
+                <a:tc>
+                  <a:txBody>
+                    <a:bodyPr/>
+                    <a:lstStyle/>
+                    <a:p>
+                      <a:pPr algn="l" indent="0" marL="0">
+                        <a:buNone/>
+                      </a:pPr>
+                      <a:r>
+                        <a:rPr lang="en-US" sz="1400" dirty="0">
+                          <a:solidFill>
+                            <a:srgbClr val="1F2429"/>
+                          </a:solidFill>
+                          <a:latin typeface="Calibri" pitchFamily="34" charset="0"/>
+                          <a:ea typeface="Calibri" pitchFamily="34" charset="-122"/>
+                          <a:cs typeface="Calibri" pitchFamily="34" charset="-120"/>
+                        </a:rPr>
+                        <a:t>After recovery — with atomicity</a:t>
+                      </a:r>
+                      <a:endParaRPr lang="en-US" sz="1400" dirty="0">
+                        <a:latin typeface="Calibri" pitchFamily="34" charset="0"/>
+                        <a:ea typeface="Calibri" pitchFamily="34" charset="-122"/>
+                        <a:cs typeface="Calibri" pitchFamily="34" charset="-120"/>
+                      </a:endParaRPr>
+                    </a:p>
+                  </a:txBody>
+                  <a:tcPr marL="91440" marR="91440" marT="45720" marB="45720" anchor="ctr">
+                    <a:lnL w="9525" cap="flat" cmpd="sng" algn="ctr">
+                      <a:solidFill>
+                        <a:srgbClr val="E1E4E8"/>
+                      </a:solidFill>
+                      <a:prstDash val="solid"/>
+                      <a:round/>
+                      <a:headEnd type="none" w="med" len="med"/>
+                      <a:tailEnd type="none" w="med" len="med"/>
+                    </a:lnL>
+                    <a:lnR w="9525" cap="flat" cmpd="sng" algn="ctr">
+                      <a:solidFill>
+                        <a:srgbClr val="E1E4E8"/>
+                      </a:solidFill>
+                      <a:prstDash val="solid"/>
+                      <a:round/>
+                      <a:headEnd type="none" w="med" len="med"/>
+                      <a:tailEnd type="none" w="med" len="med"/>
+                    </a:lnR>
+                    <a:lnT w="9525" cap="flat" cmpd="sng" algn="ctr">
+                      <a:solidFill>
+                        <a:srgbClr val="E1E4E8"/>
+                      </a:solidFill>
+                      <a:prstDash val="solid"/>
+                      <a:round/>
+                      <a:headEnd type="none" w="med" len="med"/>
+                      <a:tailEnd type="none" w="med" len="med"/>
+                    </a:lnT>
+                    <a:lnB w="9525" cap="flat" cmpd="sng" algn="ctr">
+                      <a:solidFill>
+                        <a:srgbClr val="E1E4E8"/>
+                      </a:solidFill>
+                      <a:prstDash val="solid"/>
+                      <a:round/>
+                      <a:headEnd type="none" w="med" len="med"/>
+                      <a:tailEnd type="none" w="med" len="med"/>
+                    </a:lnB>
+                    <a:solidFill>
+                      <a:srgbClr val="FFFFFF"/>
+                    </a:solidFill>
+                  </a:tcPr>
+                </a:tc>
+                <a:tc>
+                  <a:txBody>
+                    <a:bodyPr/>
+                    <a:lstStyle/>
+                    <a:p>
+                      <a:pPr algn="l" indent="0" marL="0">
+                        <a:buNone/>
+                      </a:pPr>
+                      <a:r>
+                        <a:rPr lang="en-US" sz="1400" dirty="0">
+                          <a:solidFill>
+                            <a:srgbClr val="1F2429"/>
+                          </a:solidFill>
+                          <a:latin typeface="Calibri" pitchFamily="34" charset="0"/>
+                          <a:ea typeface="Calibri" pitchFamily="34" charset="-122"/>
+                          <a:cs typeface="Calibri" pitchFamily="34" charset="-120"/>
+                        </a:rPr>
+                        <a:t>50,000 (debit undone)</a:t>
+                      </a:r>
+                      <a:endParaRPr lang="en-US" sz="1400" dirty="0">
+                        <a:latin typeface="Calibri" pitchFamily="34" charset="0"/>
+                        <a:ea typeface="Calibri" pitchFamily="34" charset="-122"/>
+                        <a:cs typeface="Calibri" pitchFamily="34" charset="-120"/>
+                      </a:endParaRPr>
+                    </a:p>
+                  </a:txBody>
+                  <a:tcPr marL="91440" marR="91440" marT="45720" marB="45720" anchor="ctr">
+                    <a:lnL w="9525" cap="flat" cmpd="sng" algn="ctr">
+                      <a:solidFill>
+                        <a:srgbClr val="E1E4E8"/>
+                      </a:solidFill>
+                      <a:prstDash val="solid"/>
+                      <a:round/>
+                      <a:headEnd type="none" w="med" len="med"/>
+                      <a:tailEnd type="none" w="med" len="med"/>
+                    </a:lnL>
+                    <a:lnR w="9525" cap="flat" cmpd="sng" algn="ctr">
+                      <a:solidFill>
+                        <a:srgbClr val="E1E4E8"/>
+                      </a:solidFill>
+                      <a:prstDash val="solid"/>
+                      <a:round/>
+                      <a:headEnd type="none" w="med" len="med"/>
+                      <a:tailEnd type="none" w="med" len="med"/>
+                    </a:lnR>
+                    <a:lnT w="9525" cap="flat" cmpd="sng" algn="ctr">
+                      <a:solidFill>
+                        <a:srgbClr val="E1E4E8"/>
+                      </a:solidFill>
+                      <a:prstDash val="solid"/>
+                      <a:round/>
+                      <a:headEnd type="none" w="med" len="med"/>
+                      <a:tailEnd type="none" w="med" len="med"/>
+                    </a:lnT>
+                    <a:lnB w="9525" cap="flat" cmpd="sng" algn="ctr">
+                      <a:solidFill>
+                        <a:srgbClr val="E1E4E8"/>
+                      </a:solidFill>
+                      <a:prstDash val="solid"/>
+                      <a:round/>
+                      <a:headEnd type="none" w="med" len="med"/>
+                      <a:tailEnd type="none" w="med" len="med"/>
+                    </a:lnB>
+                    <a:solidFill>
+                      <a:srgbClr val="FFFFFF"/>
+                    </a:solidFill>
+                  </a:tcPr>
+                </a:tc>
+                <a:tc>
+                  <a:txBody>
+                    <a:bodyPr/>
+                    <a:lstStyle/>
+                    <a:p>
+                      <a:pPr algn="l" indent="0" marL="0">
+                        <a:buNone/>
+                      </a:pPr>
+                      <a:r>
+                        <a:rPr lang="en-US" sz="1400" dirty="0">
+                          <a:solidFill>
+                            <a:srgbClr val="1F2429"/>
+                          </a:solidFill>
+                          <a:latin typeface="Calibri" pitchFamily="34" charset="0"/>
+                          <a:ea typeface="Calibri" pitchFamily="34" charset="-122"/>
+                          <a:cs typeface="Calibri" pitchFamily="34" charset="-120"/>
+                        </a:rPr>
+                        <a:t>20,000 (unchanged)</a:t>
+                      </a:r>
+                      <a:endParaRPr lang="en-US" sz="1400" dirty="0">
+                        <a:latin typeface="Calibri" pitchFamily="34" charset="0"/>
+                        <a:ea typeface="Calibri" pitchFamily="34" charset="-122"/>
+                        <a:cs typeface="Calibri" pitchFamily="34" charset="-120"/>
+                      </a:endParaRPr>
+                    </a:p>
+                  </a:txBody>
+                  <a:tcPr marL="91440" marR="91440" marT="45720" marB="45720" anchor="ctr">
+                    <a:lnL w="9525" cap="flat" cmpd="sng" algn="ctr">
+                      <a:solidFill>
+                        <a:srgbClr val="E1E4E8"/>
+                      </a:solidFill>
+                      <a:prstDash val="solid"/>
+                      <a:round/>
+                      <a:headEnd type="none" w="med" len="med"/>
+                      <a:tailEnd type="none" w="med" len="med"/>
+                    </a:lnL>
+                    <a:lnR w="9525" cap="flat" cmpd="sng" algn="ctr">
+                      <a:solidFill>
+                        <a:srgbClr val="E1E4E8"/>
+                      </a:solidFill>
+                      <a:prstDash val="solid"/>
+                      <a:round/>
+                      <a:headEnd type="none" w="med" len="med"/>
+                      <a:tailEnd type="none" w="med" len="med"/>
+                    </a:lnR>
+                    <a:lnT w="9525" cap="flat" cmpd="sng" algn="ctr">
+                      <a:solidFill>
+                        <a:srgbClr val="E1E4E8"/>
+                      </a:solidFill>
+                      <a:prstDash val="solid"/>
+                      <a:round/>
+                      <a:headEnd type="none" w="med" len="med"/>
+                      <a:tailEnd type="none" w="med" len="med"/>
+                    </a:lnT>
+                    <a:lnB w="9525" cap="flat" cmpd="sng" algn="ctr">
+                      <a:solidFill>
+                        <a:srgbClr val="E1E4E8"/>
+                      </a:solidFill>
+                      <a:prstDash val="solid"/>
+                      <a:round/>
+                      <a:headEnd type="none" w="med" len="med"/>
+                      <a:tailEnd type="none" w="med" len="med"/>
+                    </a:lnB>
+                    <a:solidFill>
+                      <a:srgbClr val="FFFFFF"/>
+                    </a:solidFill>
+                  </a:tcPr>
+                </a:tc>
+                <a:tc>
+                  <a:txBody>
+                    <a:bodyPr/>
+                    <a:lstStyle/>
+                    <a:p>
+                      <a:pPr algn="l" indent="0" marL="0">
+                        <a:buNone/>
+                      </a:pPr>
+                      <a:r>
+                        <a:rPr lang="en-US" sz="1400" dirty="0">
+                          <a:solidFill>
+                            <a:srgbClr val="1F2429"/>
+                          </a:solidFill>
+                          <a:latin typeface="Calibri" pitchFamily="34" charset="0"/>
+                          <a:ea typeface="Calibri" pitchFamily="34" charset="-122"/>
+                          <a:cs typeface="Calibri" pitchFamily="34" charset="-120"/>
+                        </a:rPr>
+                        <a:t>70,000</a:t>
+                      </a:r>
+                      <a:endParaRPr lang="en-US" sz="1400" dirty="0">
+                        <a:latin typeface="Calibri" pitchFamily="34" charset="0"/>
+                        <a:ea typeface="Calibri" pitchFamily="34" charset="-122"/>
+                        <a:cs typeface="Calibri" pitchFamily="34" charset="-120"/>
+                      </a:endParaRPr>
+                    </a:p>
+                  </a:txBody>
+                  <a:tcPr marL="91440" marR="91440" marT="45720" marB="45720" anchor="ctr">
+                    <a:lnL w="9525" cap="flat" cmpd="sng" algn="ctr">
+                      <a:solidFill>
+                        <a:srgbClr val="E1E4E8"/>
+                      </a:solidFill>
+                      <a:prstDash val="solid"/>
+                      <a:round/>
+                      <a:headEnd type="none" w="med" len="med"/>
+                      <a:tailEnd type="none" w="med" len="med"/>
+                    </a:lnL>
+                    <a:lnR w="9525" cap="flat" cmpd="sng" algn="ctr">
+                      <a:solidFill>
+                        <a:srgbClr val="E1E4E8"/>
+                      </a:solidFill>
+                      <a:prstDash val="solid"/>
+                      <a:round/>
+                      <a:headEnd type="none" w="med" len="med"/>
+                      <a:tailEnd type="none" w="med" len="med"/>
+                    </a:lnR>
+                    <a:lnT w="9525" cap="flat" cmpd="sng" algn="ctr">
+                      <a:solidFill>
+                        <a:srgbClr val="E1E4E8"/>
+                      </a:solidFill>
+                      <a:prstDash val="solid"/>
+                      <a:round/>
+                      <a:headEnd type="none" w="med" len="med"/>
+                      <a:tailEnd type="none" w="med" len="med"/>
+                    </a:lnT>
+                    <a:lnB w="9525" cap="flat" cmpd="sng" algn="ctr">
+                      <a:solidFill>
+                        <a:srgbClr val="E1E4E8"/>
+                      </a:solidFill>
+                      <a:prstDash val="solid"/>
+                      <a:round/>
+                      <a:headEnd type="none" w="med" len="med"/>
+                      <a:tailEnd type="none" w="med" len="med"/>
+                    </a:lnB>
+                    <a:solidFill>
+                      <a:srgbClr val="FFFFFF"/>
+                    </a:solidFill>
+                  </a:tcPr>
+                </a:tc>
+              </a:tr>
+            </a:tbl>
+          </a:graphicData>
+        </a:graphic>
+      </p:graphicFrame>
+      <p:sp>
+        <p:nvSpPr>
+          <p:cNvPr id="7" name="Shape"/>
+          <p:cNvSpPr/>
+          <p:nvPr/>
+        </p:nvSpPr>
+        <p:spPr>
+          <a:xfrm>
+            <a:off x="548640" y="4410000"/>
+            <a:ext cx="11064240" cy="1200000"/>
+          </a:xfrm>
+          <a:prstGeom prst="roundRect">
+            <a:avLst>
+              <a:gd name="adj" fmla="val 5333"/>
+            </a:avLst>
+          </a:prstGeom>
+          <a:solidFill>
+            <a:srgbClr val="FFF7EA"/>
+          </a:solidFill>
+          <a:ln w="12700">
+            <a:solidFill>
+              <a:srgbClr val="E8A33D"/>
+            </a:solidFill>
+            <a:prstDash val="solid"/>
+          </a:ln>
+        </p:spPr>
+      </p:sp>
+      <p:sp>
+        <p:nvSpPr>
+          <p:cNvPr id="8" name="Text"/>
+          <p:cNvSpPr txBox="1"/>
+          <p:nvPr/>
+        </p:nvSpPr>
+        <p:spPr>
+          <a:xfrm>
+            <a:off x="822960" y="4547160"/>
+            <a:ext cx="10515600" cy="925680"/>
+          </a:xfrm>
+          <a:prstGeom prst="rect">
+            <a:avLst/>
+          </a:prstGeom>
+          <a:noFill/>
+          <a:ln/>
+        </p:spPr>
+        <p:txBody>
+          <a:bodyPr wrap="square" rtlCol="0" anchor="t"/>
+          <a:lstStyle/>
+          <a:p>
+            <a:pPr algn="l" indent="0" marL="0">
+              <a:lnSpc>
+                <a:spcPct val="120000"/>
+              </a:lnSpc>
+              <a:buNone/>
+            </a:pPr>
+            <a:r>
+              <a:rPr lang="en-US" sz="1800" b="1" dirty="0">
+                <a:solidFill>
+                  <a:srgbClr val="1F2429"/>
+                </a:solidFill>
+                <a:latin typeface="Calibri" pitchFamily="34" charset="0"/>
+                <a:ea typeface="Calibri" pitchFamily="34" charset="-122"/>
+                <a:cs typeface="Calibri" pitchFamily="34" charset="-120"/>
+              </a:rPr>
+              <a:t>Without atomicity, PKR 10,000 simply vanishes from the books. </a:t>
+            </a:r>
+            <a:r>
+              <a:rPr lang="en-US" sz="1800" dirty="0">
+                <a:solidFill>
+                  <a:srgbClr val="1F2429"/>
+                </a:solidFill>
+                <a:latin typeface="Calibri" pitchFamily="34" charset="0"/>
+                <a:ea typeface="Calibri" pitchFamily="34" charset="-122"/>
+                <a:cs typeface="Calibri" pitchFamily="34" charset="-120"/>
+              </a:rPr>
+              <a:t>With it, the recovery manager undoes the incomplete debit on restart — the ledger is exactly as if the transfer never happened, and the customer can safely retry.</a:t>
+            </a:r>
+            <a:endParaRPr lang="en-US" sz="1800" dirty="0"/>
+          </a:p>
+        </p:txBody>
+      </p:sp>
+    </p:spTree>
+  </p:cSld>
+  <p:clrMapOvr>
+    <a:masterClrMapping/>
+  </p:clrMapOvr>
+</p:sld>
+</file>
+
+<file path=ppt/slides/slide16.xml><?xml version="1.0" encoding="utf-8"?>
+<p:sld xmlns:a="http://schemas.openxmlformats.org/drawingml/2006/main" xmlns:r="http://schemas.openxmlformats.org/officeDocument/2006/relationships" xmlns:p="http://schemas.openxmlformats.org/presentationml/2006/main">
+  <p:cSld name="Slide 16">
+    <p:bg>
+      <p:bgPr>
+        <a:solidFill>
+          <a:srgbClr val="F7F8F9"/>
+        </a:solidFill>
+      </p:bgPr>
+    </p:bg>
+    <p:spTree>
+      <p:nvGrpSpPr>
+        <p:cNvPr id="1" name=""/>
+        <p:cNvGrpSpPr/>
+        <p:nvPr/>
+      </p:nvGrpSpPr>
+      <p:grpSpPr>
+        <a:xfrm>
+          <a:off x="0" y="0"/>
+          <a:ext cx="0" cy="0"/>
+          <a:chOff x="0" y="0"/>
+          <a:chExt cx="0" cy="0"/>
+        </a:xfrm>
+      </p:grpSpPr>
+      <p:sp>
+        <p:nvSpPr>
+          <p:cNvPr id="2" name="Text 0"/>
+          <p:cNvSpPr txBox="1"/>
+          <p:nvPr/>
+        </p:nvSpPr>
+        <p:spPr>
+          <a:xfrm>
+            <a:off x="548640" y="320040"/>
+            <a:ext cx="9144000" cy="292608"/>
+          </a:xfrm>
+          <a:prstGeom prst="rect">
+            <a:avLst/>
+          </a:prstGeom>
+          <a:noFill/>
+          <a:ln/>
+        </p:spPr>
+        <p:txBody>
+          <a:bodyPr wrap="square" rtlCol="0" anchor="ctr"/>
+          <a:lstStyle/>
+          <a:p>
+            <a:pPr algn="l" indent="0" marL="0">
+              <a:buNone/>
+            </a:pPr>
+            <a:r>
+              <a:rPr lang="en-US" sz="1200" b="1" dirty="0" spc="150" kern="0">
+                <a:solidFill>
+                  <a:srgbClr val="8B7FD9"/>
+                </a:solidFill>
+                <a:latin typeface="Calibri" pitchFamily="34" charset="0"/>
+                <a:ea typeface="Calibri" pitchFamily="34" charset="-122"/>
+                <a:cs typeface="Calibri" pitchFamily="34" charset="-120"/>
+              </a:rPr>
+              <a:t>CONSISTENCY, VIOLATED</a:t>
+            </a:r>
+            <a:endParaRPr lang="en-US" sz="1200" dirty="0"/>
+          </a:p>
+        </p:txBody>
+      </p:sp>
+      <p:sp>
+        <p:nvSpPr>
+          <p:cNvPr id="3" name="Text 1"/>
+          <p:cNvSpPr txBox="1"/>
+          <p:nvPr/>
+        </p:nvSpPr>
+        <p:spPr>
+          <a:xfrm>
+            <a:off x="548640" y="566928"/>
+            <a:ext cx="11064240" cy="640080"/>
+          </a:xfrm>
+          <a:prstGeom prst="rect">
+            <a:avLst/>
+          </a:prstGeom>
+          <a:noFill/>
+          <a:ln/>
+        </p:spPr>
+        <p:txBody>
+          <a:bodyPr wrap="square" rtlCol="0" anchor="ctr"/>
+          <a:lstStyle/>
+          <a:p>
+            <a:pPr algn="l" indent="0" marL="0">
+              <a:buNone/>
+            </a:pPr>
+            <a:r>
+              <a:rPr lang="en-US" sz="2500" b="1" dirty="0">
+                <a:solidFill>
+                  <a:srgbClr val="1F2429"/>
+                </a:solidFill>
+                <a:latin typeface="Calibri" pitchFamily="34" charset="0"/>
+                <a:ea typeface="Calibri" pitchFamily="34" charset="-122"/>
+                <a:cs typeface="Calibri" pitchFamily="34" charset="-120"/>
+              </a:rPr>
+              <a:t>Consistency Violation: An Overdraft Rejected</a:t>
+            </a:r>
+            <a:endParaRPr lang="en-US" sz="1800" dirty="0"/>
+          </a:p>
+        </p:txBody>
+      </p:sp>
+      <p:sp>
+        <p:nvSpPr>
+          <p:cNvPr id="4" name="Text 2"/>
+          <p:cNvSpPr txBox="1"/>
+          <p:nvPr/>
+        </p:nvSpPr>
+        <p:spPr>
+          <a:xfrm>
+            <a:off x="9951415" y="6455664"/>
+            <a:ext cx="2011680" cy="292608"/>
+          </a:xfrm>
+          <a:prstGeom prst="rect">
+            <a:avLst/>
+          </a:prstGeom>
+          <a:noFill/>
+          <a:ln/>
+        </p:spPr>
+        <p:txBody>
+          <a:bodyPr wrap="square" rtlCol="0" anchor="ctr"/>
+          <a:lstStyle/>
+          <a:p>
+            <a:pPr algn="r" indent="0" marL="0">
+              <a:buNone/>
+            </a:pPr>
+            <a:r>
+              <a:rPr lang="en-US" sz="1200" u="sng" dirty="0">
+                <a:solidFill>
+                  <a:srgbClr val="8A939B"/>
+                </a:solidFill>
+                <a:latin typeface="Calibri" pitchFamily="34" charset="0"/>
+                <a:ea typeface="Calibri" pitchFamily="34" charset="-122"/>
+                <a:cs typeface="Calibri" pitchFamily="34" charset="-120"/>
+                <a:hlinkClick r:id="rId1" invalidUrl="" action="" tgtFrame="" tooltip="" history="1" highlightClick="0" endSnd="0">
+                  <a:extLst>
+                    <a:ext uri="{A12FA001-AC4F-418D-AE19-62706E023703}">
+                      <ahyp:hlinkClr xmlns:ahyp="http://schemas.microsoft.com/office/drawing/2018/hyperlinkcolor" val="tx"/>
+                    </a:ext>
+                  </a:extLst>
+                </a:hlinkClick>
+              </a:rPr>
+              <a:t>cuinotes.com</a:t>
+            </a:r>
+            <a:pPr algn="r" indent="0" marL="0">
+              <a:buNone/>
+            </a:pPr>
+            <a:r>
+              <a:rPr lang="en-US" sz="1200" dirty="0">
+                <a:solidFill>
+                  <a:srgbClr val="8A939B"/>
+                </a:solidFill>
+                <a:latin typeface="Calibri" pitchFamily="34" charset="0"/>
+                <a:ea typeface="Calibri" pitchFamily="34" charset="-122"/>
+                <a:cs typeface="Calibri" pitchFamily="34" charset="-120"/>
+              </a:rPr>
+              <a:t>  ·  12</a:t>
+            </a:r>
+            <a:endParaRPr lang="en-US" sz="1200" dirty="0"/>
+          </a:p>
+        </p:txBody>
+      </p:sp>
+      <p:sp>
+        <p:nvSpPr>
+          <p:cNvPr id="5" name="Text"/>
+          <p:cNvSpPr txBox="1"/>
+          <p:nvPr/>
+        </p:nvSpPr>
+        <p:spPr>
+          <a:xfrm>
+            <a:off x="548640" y="1240000"/>
+            <a:ext cx="11064240" cy="1000000"/>
+          </a:xfrm>
+          <a:prstGeom prst="rect">
+            <a:avLst/>
+          </a:prstGeom>
+          <a:noFill/>
+          <a:ln/>
+        </p:spPr>
+        <p:txBody>
+          <a:bodyPr wrap="square" rtlCol="0" anchor="t"/>
+          <a:lstStyle/>
+          <a:p>
+            <a:pPr algn="l" indent="0" marL="0">
+              <a:lnSpc>
+                <a:spcPct val="125000"/>
+              </a:lnSpc>
+              <a:buNone/>
+            </a:pPr>
+            <a:r>
+              <a:rPr lang="en-US" sz="1800" dirty="0">
+                <a:solidFill>
+                  <a:srgbClr val="1F2429"/>
+                </a:solidFill>
+                <a:latin typeface="Calibri" pitchFamily="34" charset="0"/>
+                <a:ea typeface="Calibri" pitchFamily="34" charset="-122"/>
+                <a:cs typeface="Calibri" pitchFamily="34" charset="-120"/>
+              </a:rPr>
+              <a:t>Account A101 has balance 5,000, with a </a:t>
+            </a:r>
+            <a:r>
+              <a:rPr lang="en-US" sz="1800" b="1" dirty="0">
+                <a:solidFill>
+                  <a:srgbClr val="8B7FD9"/>
+                </a:solidFill>
+                <a:latin typeface="Courier New" pitchFamily="34" charset="0"/>
+                <a:ea typeface="Courier New" pitchFamily="34" charset="-122"/>
+                <a:cs typeface="Courier New" pitchFamily="34" charset="-120"/>
+              </a:rPr>
+              <a:t>CHECK (balance &gt;= 0)</a:t>
+            </a:r>
+            <a:r>
+              <a:rPr lang="en-US" sz="1800" dirty="0">
+                <a:solidFill>
+                  <a:srgbClr val="1F2429"/>
+                </a:solidFill>
+                <a:latin typeface="Calibri" pitchFamily="34" charset="0"/>
+                <a:ea typeface="Calibri" pitchFamily="34" charset="-122"/>
+                <a:cs typeface="Calibri" pitchFamily="34" charset="-120"/>
+              </a:rPr>
+              <a:t> constraint declared on the column. A withdrawal runs </a:t>
+            </a:r>
+            <a:r>
+              <a:rPr lang="en-US" sz="1800" b="1" dirty="0">
+                <a:solidFill>
+                  <a:srgbClr val="1F2429"/>
+                </a:solidFill>
+                <a:latin typeface="Courier New" pitchFamily="34" charset="0"/>
+                <a:ea typeface="Courier New" pitchFamily="34" charset="-122"/>
+                <a:cs typeface="Courier New" pitchFamily="34" charset="-120"/>
+              </a:rPr>
+              <a:t>UPDATE Account SET balance = balance - 8000 WHERE accountNo = 'A101'</a:t>
+            </a:r>
+            <a:r>
+              <a:rPr lang="en-US" sz="1800" dirty="0">
+                <a:solidFill>
+                  <a:srgbClr val="1F2429"/>
+                </a:solidFill>
+                <a:latin typeface="Calibri" pitchFamily="34" charset="0"/>
+                <a:ea typeface="Calibri" pitchFamily="34" charset="-122"/>
+                <a:cs typeface="Calibri" pitchFamily="34" charset="-120"/>
+              </a:rPr>
+              <a:t> inside BEGIN...COMMIT — which would set balance to −3,000.</a:t>
+            </a:r>
+            <a:endParaRPr lang="en-US" sz="1800" dirty="0"/>
+          </a:p>
+        </p:txBody>
+      </p:sp>
+      <p:sp>
+        <p:nvSpPr>
+          <p:cNvPr id="6" name="Shape"/>
+          <p:cNvSpPr/>
+          <p:nvPr/>
+        </p:nvSpPr>
+        <p:spPr>
+          <a:xfrm>
+            <a:off x="548640" y="2400000"/>
+            <a:ext cx="5372100" cy="2700000"/>
+          </a:xfrm>
+          <a:prstGeom prst="roundRect">
+            <a:avLst>
+              <a:gd name="adj" fmla="val 3200"/>
+            </a:avLst>
+          </a:prstGeom>
+          <a:solidFill>
+            <a:srgbClr val="FFFFFF"/>
+          </a:solidFill>
+          <a:ln w="22225">
+            <a:solidFill>
+              <a:srgbClr val="E8A33D"/>
+            </a:solidFill>
+            <a:prstDash val="solid"/>
+          </a:ln>
+          <a:effectLst>
+            <a:outerShdw sx="100000" sy="100000" kx="0" ky="0" algn="bl" rotWithShape="0" blurRad="63500" dist="25400" dir="5400000">
+              <a:srgbClr val="1F2429">
+                <a:alpha val="15000"/>
+              </a:srgbClr>
+            </a:outerShdw>
+          </a:effectLst>
+        </p:spPr>
+      </p:sp>
+      <p:sp>
+        <p:nvSpPr>
+          <p:cNvPr id="7" name="Shape"/>
+          <p:cNvSpPr/>
+          <p:nvPr/>
+        </p:nvSpPr>
+        <p:spPr>
+          <a:xfrm>
+            <a:off x="713232" y="2546304"/>
+            <a:ext cx="201168" cy="201168"/>
+          </a:xfrm>
+          <a:prstGeom prst="ellipse">
+            <a:avLst/>
+          </a:prstGeom>
+          <a:solidFill>
+            <a:srgbClr val="E8A33D"/>
+          </a:solidFill>
+          <a:ln/>
+        </p:spPr>
+      </p:sp>
+      <p:sp>
+        <p:nvSpPr>
+          <p:cNvPr id="8" name="Text"/>
+          <p:cNvSpPr txBox="1"/>
+          <p:nvPr/>
+        </p:nvSpPr>
+        <p:spPr>
+          <a:xfrm>
+            <a:off x="1005840" y="2491440"/>
+            <a:ext cx="4732020" cy="365760"/>
+          </a:xfrm>
+          <a:prstGeom prst="rect">
+            <a:avLst/>
+          </a:prstGeom>
+          <a:noFill/>
+          <a:ln/>
+        </p:spPr>
+        <p:txBody>
+          <a:bodyPr wrap="square" rtlCol="0" anchor="t"/>
+          <a:lstStyle/>
+          <a:p>
+            <a:pPr algn="l" indent="0" marL="0">
+              <a:buNone/>
+            </a:pPr>
+            <a:r>
+              <a:rPr lang="en-US" sz="2000" b="1" dirty="0">
+                <a:solidFill>
+                  <a:srgbClr val="1F2429"/>
+                </a:solidFill>
+                <a:latin typeface="Calibri" pitchFamily="34" charset="0"/>
+                <a:ea typeface="Calibri" pitchFamily="34" charset="-122"/>
+                <a:cs typeface="Calibri" pitchFamily="34" charset="-120"/>
+              </a:rPr>
+              <a:t>Without Consistency Enforcement</a:t>
+            </a:r>
+            <a:endParaRPr lang="en-US" sz="2000" dirty="0"/>
+          </a:p>
+        </p:txBody>
+      </p:sp>
+      <p:sp>
+        <p:nvSpPr>
+          <p:cNvPr id="9" name="Text"/>
+          <p:cNvSpPr txBox="1"/>
+          <p:nvPr/>
+        </p:nvSpPr>
+        <p:spPr>
+          <a:xfrm>
+            <a:off x="749808" y="2902920"/>
+            <a:ext cx="4969764" cy="2105640"/>
+          </a:xfrm>
+          <a:prstGeom prst="rect">
+            <a:avLst/>
+          </a:prstGeom>
+          <a:noFill/>
+          <a:ln/>
+        </p:spPr>
+        <p:txBody>
+          <a:bodyPr wrap="square" rtlCol="0" anchor="t"/>
+          <a:lstStyle/>
+          <a:p>
+            <a:pPr algn="l" indent="0" marL="0">
+              <a:lnSpc>
+                <a:spcPct val="112000"/>
+              </a:lnSpc>
+              <a:buNone/>
+            </a:pPr>
+            <a:r>
+              <a:rPr lang="en-US" sz="1800" dirty="0">
+                <a:solidFill>
+                  <a:srgbClr val="6B7480"/>
+                </a:solidFill>
+                <a:latin typeface="Calibri" pitchFamily="34" charset="0"/>
+                <a:ea typeface="Calibri" pitchFamily="34" charset="-122"/>
+                <a:cs typeface="Calibri" pitchFamily="34" charset="-120"/>
+              </a:rPr>
+              <a:t>The UPDATE silently sets balance to −3,000 — a value with no valid real-world meaning for an account. Every later calculation and report built on that balance is now corrupted.</a:t>
+            </a:r>
+            <a:endParaRPr lang="en-US" sz="1800" dirty="0"/>
+          </a:p>
+        </p:txBody>
+      </p:sp>
+      <p:sp>
+        <p:nvSpPr>
+          <p:cNvPr id="10" name="Shape"/>
+          <p:cNvSpPr/>
+          <p:nvPr/>
+        </p:nvSpPr>
+        <p:spPr>
+          <a:xfrm>
+            <a:off x="6240780" y="2400000"/>
+            <a:ext cx="5372100" cy="2700000"/>
+          </a:xfrm>
+          <a:prstGeom prst="roundRect">
+            <a:avLst>
+              <a:gd name="adj" fmla="val 3200"/>
+            </a:avLst>
+          </a:prstGeom>
+          <a:solidFill>
+            <a:srgbClr val="FFFFFF"/>
+          </a:solidFill>
+          <a:ln w="22225">
+            <a:solidFill>
+              <a:srgbClr val="2FE6C4"/>
+            </a:solidFill>
+            <a:prstDash val="solid"/>
+          </a:ln>
+          <a:effectLst>
+            <a:outerShdw sx="100000" sy="100000" kx="0" ky="0" algn="bl" rotWithShape="0" blurRad="63500" dist="25400" dir="5400000">
+              <a:srgbClr val="1F2429">
+                <a:alpha val="15000"/>
+              </a:srgbClr>
+            </a:outerShdw>
+          </a:effectLst>
+        </p:spPr>
+      </p:sp>
+      <p:sp>
+        <p:nvSpPr>
+          <p:cNvPr id="11" name="Shape"/>
+          <p:cNvSpPr/>
+          <p:nvPr/>
+        </p:nvSpPr>
+        <p:spPr>
+          <a:xfrm>
+            <a:off x="6405372" y="2546304"/>
+            <a:ext cx="201168" cy="201168"/>
+          </a:xfrm>
+          <a:prstGeom prst="ellipse">
+            <a:avLst/>
+          </a:prstGeom>
+          <a:solidFill>
+            <a:srgbClr val="2FE6C4"/>
+          </a:solidFill>
+          <a:ln/>
+        </p:spPr>
+      </p:sp>
+      <p:sp>
+        <p:nvSpPr>
+          <p:cNvPr id="12" name="Text"/>
+          <p:cNvSpPr txBox="1"/>
+          <p:nvPr/>
+        </p:nvSpPr>
+        <p:spPr>
+          <a:xfrm>
+            <a:off x="6697980" y="2491440"/>
+            <a:ext cx="4732020" cy="365760"/>
+          </a:xfrm>
+          <a:prstGeom prst="rect">
+            <a:avLst/>
+          </a:prstGeom>
+          <a:noFill/>
+          <a:ln/>
+        </p:spPr>
+        <p:txBody>
+          <a:bodyPr wrap="square" rtlCol="0" anchor="t"/>
+          <a:lstStyle/>
+          <a:p>
+            <a:pPr algn="l" indent="0" marL="0">
+              <a:buNone/>
+            </a:pPr>
+            <a:r>
+              <a:rPr lang="en-US" sz="2000" b="1" dirty="0">
+                <a:solidFill>
+                  <a:srgbClr val="1F2429"/>
+                </a:solidFill>
+                <a:latin typeface="Calibri" pitchFamily="34" charset="0"/>
+                <a:ea typeface="Calibri" pitchFamily="34" charset="-122"/>
+                <a:cs typeface="Calibri" pitchFamily="34" charset="-120"/>
+              </a:rPr>
+              <a:t>With Consistency Enforcement</a:t>
+            </a:r>
+            <a:endParaRPr lang="en-US" sz="2000" dirty="0"/>
+          </a:p>
+        </p:txBody>
+      </p:sp>
+      <p:sp>
+        <p:nvSpPr>
+          <p:cNvPr id="13" name="Text"/>
+          <p:cNvSpPr txBox="1"/>
+          <p:nvPr/>
+        </p:nvSpPr>
+        <p:spPr>
+          <a:xfrm>
+            <a:off x="6441948" y="2902920"/>
+            <a:ext cx="4969764" cy="2105640"/>
+          </a:xfrm>
+          <a:prstGeom prst="rect">
+            <a:avLst/>
+          </a:prstGeom>
+          <a:noFill/>
+          <a:ln/>
+        </p:spPr>
+        <p:txBody>
+          <a:bodyPr wrap="square" rtlCol="0" anchor="t"/>
+          <a:lstStyle/>
+          <a:p>
+            <a:pPr algn="l" indent="0" marL="0">
+              <a:lnSpc>
+                <a:spcPct val="112000"/>
+              </a:lnSpc>
+              <a:buNone/>
+            </a:pPr>
+            <a:r>
+              <a:rPr lang="en-US" sz="1800" dirty="0">
+                <a:solidFill>
+                  <a:srgbClr val="6B7480"/>
+                </a:solidFill>
+                <a:latin typeface="Calibri" pitchFamily="34" charset="0"/>
+                <a:ea typeface="Calibri" pitchFamily="34" charset="-122"/>
+                <a:cs typeface="Calibri" pitchFamily="34" charset="-120"/>
+              </a:rPr>
+              <a:t>The DBMS evaluates the CHECK constraint before the change stands. The constraint fails, the statement is rejected, and the transaction aborts — A101's balance remains 5,000. The application must handle ‘insufficient funds’ explicitly.</a:t>
+            </a:r>
+            <a:endParaRPr lang="en-US" sz="1800" dirty="0"/>
+          </a:p>
+        </p:txBody>
+      </p:sp>
+      <p:sp>
+        <p:nvSpPr>
+          <p:cNvPr id="14" name="Shape"/>
+          <p:cNvSpPr/>
+          <p:nvPr/>
+        </p:nvSpPr>
+        <p:spPr>
+          <a:xfrm>
+            <a:off x="548640" y="5250000"/>
+            <a:ext cx="11064240" cy="1000000"/>
+          </a:xfrm>
+          <a:prstGeom prst="roundRect">
+            <a:avLst>
+              <a:gd name="adj" fmla="val 5333"/>
+            </a:avLst>
+          </a:prstGeom>
+          <a:solidFill>
+            <a:srgbClr val="FFF7EA"/>
+          </a:solidFill>
+          <a:ln w="12700">
+            <a:solidFill>
+              <a:srgbClr val="E8A33D"/>
+            </a:solidFill>
+            <a:prstDash val="solid"/>
+          </a:ln>
+        </p:spPr>
+      </p:sp>
+      <p:sp>
+        <p:nvSpPr>
+          <p:cNvPr id="15" name="Text"/>
+          <p:cNvSpPr txBox="1"/>
+          <p:nvPr/>
+        </p:nvSpPr>
+        <p:spPr>
+          <a:xfrm>
+            <a:off x="822960" y="5387160"/>
+            <a:ext cx="10515600" cy="725680"/>
+          </a:xfrm>
+          <a:prstGeom prst="rect">
+            <a:avLst/>
+          </a:prstGeom>
+          <a:noFill/>
+          <a:ln/>
+        </p:spPr>
+        <p:txBody>
+          <a:bodyPr wrap="square" rtlCol="0" anchor="t"/>
+          <a:lstStyle/>
+          <a:p>
+            <a:pPr algn="l" indent="0" marL="0">
+              <a:lnSpc>
+                <a:spcPct val="120000"/>
+              </a:lnSpc>
+              <a:buNone/>
+            </a:pPr>
+            <a:r>
+              <a:rPr lang="en-US" sz="1800" b="1" dirty="0">
+                <a:solidFill>
+                  <a:srgbClr val="1F2429"/>
+                </a:solidFill>
+                <a:latin typeface="Calibri" pitchFamily="34" charset="0"/>
+                <a:ea typeface="Calibri" pitchFamily="34" charset="-122"/>
+                <a:cs typeface="Calibri" pitchFamily="34" charset="-120"/>
+              </a:rPr>
+              <a:t>5,000 − 8,000 = −3,000. </a:t>
+            </a:r>
+            <a:r>
+              <a:rPr lang="en-US" sz="1800" dirty="0">
+                <a:solidFill>
+                  <a:srgbClr val="1F2429"/>
+                </a:solidFill>
+                <a:latin typeface="Calibri" pitchFamily="34" charset="0"/>
+                <a:ea typeface="Calibri" pitchFamily="34" charset="-122"/>
+                <a:cs typeface="Calibri" pitchFamily="34" charset="-120"/>
+              </a:rPr>
+              <a:t>The CHECK (balance &gt;= 0) constraint catches this before COMMIT — the UPDATE is rejected and A101 stays at 5,000.</a:t>
+            </a:r>
+            <a:endParaRPr lang="en-US" sz="1800" dirty="0"/>
+          </a:p>
+        </p:txBody>
+      </p:sp>
+    </p:spTree>
+  </p:cSld>
+  <p:clrMapOvr>
+    <a:masterClrMapping/>
+  </p:clrMapOvr>
+</p:sld>
+</file>
+
+<file path=ppt/slides/slide17.xml><?xml version="1.0" encoding="utf-8"?>
+<p:sld xmlns:a="http://schemas.openxmlformats.org/drawingml/2006/main" xmlns:r="http://schemas.openxmlformats.org/officeDocument/2006/relationships" xmlns:p="http://schemas.openxmlformats.org/presentationml/2006/main">
+  <p:cSld name="Slide 17">
+    <p:bg>
+      <p:bgPr>
+        <a:solidFill>
+          <a:srgbClr val="F7F8F9"/>
+        </a:solidFill>
+      </p:bgPr>
+    </p:bg>
+    <p:spTree>
+      <p:nvGrpSpPr>
+        <p:cNvPr id="1" name=""/>
+        <p:cNvGrpSpPr/>
+        <p:nvPr/>
+      </p:nvGrpSpPr>
+      <p:grpSpPr>
+        <a:xfrm>
+          <a:off x="0" y="0"/>
+          <a:ext cx="0" cy="0"/>
+          <a:chOff x="0" y="0"/>
+          <a:chExt cx="0" cy="0"/>
+        </a:xfrm>
+      </p:grpSpPr>
+      <p:sp>
+        <p:nvSpPr>
+          <p:cNvPr id="2" name="Text 0"/>
+          <p:cNvSpPr txBox="1"/>
+          <p:nvPr/>
+        </p:nvSpPr>
+        <p:spPr>
+          <a:xfrm>
+            <a:off x="548640" y="320040"/>
+            <a:ext cx="9144000" cy="292608"/>
+          </a:xfrm>
+          <a:prstGeom prst="rect">
+            <a:avLst/>
+          </a:prstGeom>
+          <a:noFill/>
+          <a:ln/>
+        </p:spPr>
+        <p:txBody>
+          <a:bodyPr wrap="square" rtlCol="0" anchor="ctr"/>
+          <a:lstStyle/>
+          <a:p>
+            <a:pPr algn="l" indent="0" marL="0">
+              <a:buNone/>
+            </a:pPr>
+            <a:r>
+              <a:rPr lang="en-US" sz="1200" b="1" dirty="0" spc="150" kern="0">
+                <a:solidFill>
+                  <a:srgbClr val="8B7FD9"/>
+                </a:solidFill>
+                <a:latin typeface="Calibri" pitchFamily="34" charset="0"/>
+                <a:ea typeface="Calibri" pitchFamily="34" charset="-122"/>
+                <a:cs typeface="Calibri" pitchFamily="34" charset="-120"/>
+              </a:rPr>
+              <a:t>CONSISTENCY, CONTINUED</a:t>
+            </a:r>
+            <a:endParaRPr lang="en-US" sz="1200" dirty="0"/>
+          </a:p>
+        </p:txBody>
+      </p:sp>
+      <p:sp>
+        <p:nvSpPr>
+          <p:cNvPr id="3" name="Text 1"/>
+          <p:cNvSpPr txBox="1"/>
+          <p:nvPr/>
+        </p:nvSpPr>
+        <p:spPr>
+          <a:xfrm>
+            <a:off x="548640" y="566928"/>
+            <a:ext cx="11064240" cy="640080"/>
+          </a:xfrm>
+          <a:prstGeom prst="rect">
+            <a:avLst/>
+          </a:prstGeom>
+          <a:noFill/>
+          <a:ln/>
+        </p:spPr>
+        <p:txBody>
+          <a:bodyPr wrap="square" rtlCol="0" anchor="ctr"/>
+          <a:lstStyle/>
+          <a:p>
+            <a:pPr algn="l" indent="0" marL="0">
+              <a:buNone/>
+            </a:pPr>
+            <a:r>
+              <a:rPr lang="en-US" sz="2500" b="1" dirty="0">
+                <a:solidFill>
+                  <a:srgbClr val="1F2429"/>
+                </a:solidFill>
+                <a:latin typeface="Calibri" pitchFamily="34" charset="0"/>
+                <a:ea typeface="Calibri" pitchFamily="34" charset="-122"/>
+                <a:cs typeface="Calibri" pitchFamily="34" charset="-120"/>
+              </a:rPr>
+              <a:t>Consistency Is a Joint Responsibility</a:t>
+            </a:r>
+            <a:endParaRPr lang="en-US" sz="2000" dirty="0"/>
+          </a:p>
+        </p:txBody>
+      </p:sp>
+      <p:sp>
+        <p:nvSpPr>
+          <p:cNvPr id="4" name="Text 2"/>
+          <p:cNvSpPr txBox="1"/>
+          <p:nvPr/>
+        </p:nvSpPr>
+        <p:spPr>
+          <a:xfrm>
+            <a:off x="9951415" y="6455664"/>
+            <a:ext cx="2011680" cy="292608"/>
+          </a:xfrm>
+          <a:prstGeom prst="rect">
+            <a:avLst/>
+          </a:prstGeom>
+          <a:noFill/>
+          <a:ln/>
+        </p:spPr>
+        <p:txBody>
+          <a:bodyPr wrap="square" rtlCol="0" anchor="ctr"/>
+          <a:lstStyle/>
+          <a:p>
+            <a:pPr algn="r" indent="0" marL="0">
+              <a:buNone/>
+            </a:pPr>
+            <a:r>
+              <a:rPr lang="en-US" sz="1200" u="sng" dirty="0">
+                <a:solidFill>
+                  <a:srgbClr val="8A939B"/>
+                </a:solidFill>
+                <a:latin typeface="Calibri" pitchFamily="34" charset="0"/>
+                <a:ea typeface="Calibri" pitchFamily="34" charset="-122"/>
+                <a:cs typeface="Calibri" pitchFamily="34" charset="-120"/>
+                <a:hlinkClick r:id="rId1" invalidUrl="" action="" tgtFrame="" tooltip="" history="1" highlightClick="0" endSnd="0">
+                  <a:extLst>
+                    <a:ext uri="{A12FA001-AC4F-418D-AE19-62706E023703}">
+                      <ahyp:hlinkClr xmlns:ahyp="http://schemas.microsoft.com/office/drawing/2018/hyperlinkcolor" val="tx"/>
+                    </a:ext>
+                  </a:extLst>
+                </a:hlinkClick>
+              </a:rPr>
+              <a:t>cuinotes.com</a:t>
+            </a:r>
+            <a:pPr algn="r" indent="0" marL="0">
+              <a:buNone/>
+            </a:pPr>
+            <a:r>
+              <a:rPr lang="en-US" sz="1200" dirty="0">
+                <a:solidFill>
+                  <a:srgbClr val="8A939B"/>
+                </a:solidFill>
+                <a:latin typeface="Calibri" pitchFamily="34" charset="0"/>
+                <a:ea typeface="Calibri" pitchFamily="34" charset="-122"/>
+                <a:cs typeface="Calibri" pitchFamily="34" charset="-120"/>
+              </a:rPr>
               <a:t>  ·  13</a:t>
             </a:r>
-            <a:endParaRPr lang="en-US" sz="1000" dirty="0"/>
+            <a:endParaRPr lang="en-US" sz="1200" dirty="0"/>
+          </a:p>
+        </p:txBody>
+      </p:sp>
+      <p:sp>
+        <p:nvSpPr>
+          <p:cNvPr id="5" name="Text"/>
+          <p:cNvSpPr txBox="1"/>
+          <p:nvPr/>
+        </p:nvSpPr>
+        <p:spPr>
+          <a:xfrm>
+            <a:off x="548640" y="1371600"/>
+            <a:ext cx="5760720" cy="1828800"/>
+          </a:xfrm>
+          <a:prstGeom prst="rect">
+            <a:avLst/>
+          </a:prstGeom>
+          <a:noFill/>
+          <a:ln/>
+        </p:spPr>
+        <p:txBody>
+          <a:bodyPr wrap="square" rtlCol="0" anchor="t"/>
+          <a:lstStyle/>
+          <a:p>
+            <a:pPr algn="l" indent="0" marL="0">
+              <a:lnSpc>
+                <a:spcPct val="125000"/>
+              </a:lnSpc>
+              <a:buNone/>
+            </a:pPr>
+            <a:r>
+              <a:rPr lang="en-US" sz="1800" dirty="0">
+                <a:solidFill>
+                  <a:srgbClr val="1F2429"/>
+                </a:solidFill>
+                <a:latin typeface="Calibri" pitchFamily="34" charset="0"/>
+                <a:ea typeface="Calibri" pitchFamily="34" charset="-122"/>
+                <a:cs typeface="Calibri" pitchFamily="34" charset="-120"/>
+              </a:rPr>
+              <a:t>Suppose a bug debits A101 by 10,000 but credits A205 by only 9,000. </a:t>
+            </a:r>
+            <a:r>
+              <a:rPr lang="en-US" sz="1800" b="1" dirty="0">
+                <a:solidFill>
+                  <a:srgbClr val="8B7FD9"/>
+                </a:solidFill>
+                <a:latin typeface="Calibri" pitchFamily="34" charset="0"/>
+                <a:ea typeface="Calibri" pitchFamily="34" charset="-122"/>
+                <a:cs typeface="Calibri" pitchFamily="34" charset="-120"/>
+              </a:rPr>
+              <a:t>Neither UPDATE violates any schema constraint</a:t>
+            </a:r>
+            <a:r>
+              <a:rPr lang="en-US" sz="1800" dirty="0">
+                <a:solidFill>
+                  <a:srgbClr val="1F2429"/>
+                </a:solidFill>
+                <a:latin typeface="Calibri" pitchFamily="34" charset="0"/>
+                <a:ea typeface="Calibri" pitchFamily="34" charset="-122"/>
+                <a:cs typeface="Calibri" pitchFamily="34" charset="-120"/>
+              </a:rPr>
+              <a:t> — both balances stay non-negative, no foreign key breaks. The DBMS has no way to know a debit must equal a credit, because that rule was never declared to it.</a:t>
+            </a:r>
+            <a:endParaRPr lang="en-US" sz="1800" dirty="0"/>
+          </a:p>
+        </p:txBody>
+      </p:sp>
+      <p:sp>
+        <p:nvSpPr>
+          <p:cNvPr id="6" name="Text"/>
+          <p:cNvSpPr txBox="1"/>
+          <p:nvPr/>
+        </p:nvSpPr>
+        <p:spPr>
+          <a:xfrm>
+            <a:off x="548640" y="3246120"/>
+            <a:ext cx="5760720" cy="822960"/>
+          </a:xfrm>
+          <a:prstGeom prst="rect">
+            <a:avLst/>
+          </a:prstGeom>
+          <a:noFill/>
+          <a:ln/>
+        </p:spPr>
+        <p:txBody>
+          <a:bodyPr wrap="square" rtlCol="0" anchor="t"/>
+          <a:lstStyle/>
+          <a:p>
+            <a:pPr algn="l" indent="0" marL="0">
+              <a:buNone/>
+            </a:pPr>
+            <a:r>
+              <a:rPr lang="en-US" sz="1800" i="1" dirty="0">
+                <a:solidFill>
+                  <a:srgbClr val="1F2429"/>
+                </a:solidFill>
+                <a:latin typeface="Calibri" pitchFamily="34" charset="0"/>
+                <a:ea typeface="Calibri" pitchFamily="34" charset="-122"/>
+                <a:cs typeface="Calibri" pitchFamily="34" charset="-120"/>
+              </a:rPr>
+              <a:t>Consistency as the DBMS enforces it is necessary but not sufficient — </a:t>
+            </a:r>
+            <a:r>
+              <a:rPr lang="en-US" sz="1800" i="1" dirty="0">
+                <a:solidFill>
+                  <a:srgbClr val="1F2429"/>
+                </a:solidFill>
+                <a:latin typeface="Calibri" pitchFamily="34" charset="0"/>
+                <a:ea typeface="Calibri" pitchFamily="34" charset="-122"/>
+                <a:cs typeface="Calibri" pitchFamily="34" charset="-120"/>
+              </a:rPr>
+              <a:t>this is not a bug Atomicity, Isolation, or Durability would ever catch.</a:t>
+            </a:r>
+            <a:endParaRPr lang="en-US" sz="1800" dirty="0"/>
+          </a:p>
+        </p:txBody>
+      </p:sp>
+      <p:sp>
+        <p:nvSpPr>
+          <p:cNvPr id="7" name="Shape"/>
+          <p:cNvSpPr/>
+          <p:nvPr/>
+        </p:nvSpPr>
+        <p:spPr>
+          <a:xfrm>
+            <a:off x="6583680" y="1371600"/>
+            <a:ext cx="5029200" cy="4480560"/>
+          </a:xfrm>
+          <a:prstGeom prst="roundRect">
+            <a:avLst>
+              <a:gd name="adj" fmla="val 2000"/>
+            </a:avLst>
+          </a:prstGeom>
+          <a:solidFill>
+            <a:srgbClr val="14181C"/>
+          </a:solidFill>
+          <a:ln/>
+        </p:spPr>
+      </p:sp>
+      <p:sp>
+        <p:nvSpPr>
+          <p:cNvPr id="8" name="Text"/>
+          <p:cNvSpPr txBox="1"/>
+          <p:nvPr/>
+        </p:nvSpPr>
+        <p:spPr>
+          <a:xfrm>
+            <a:off x="6858000" y="1572768"/>
+            <a:ext cx="4480560" cy="274320"/>
+          </a:xfrm>
+          <a:prstGeom prst="rect">
+            <a:avLst/>
+          </a:prstGeom>
+          <a:noFill/>
+          <a:ln/>
+        </p:spPr>
+        <p:txBody>
+          <a:bodyPr wrap="square" rtlCol="0" anchor="ctr"/>
+          <a:lstStyle/>
+          <a:p>
+            <a:pPr algn="l" indent="0" marL="0">
+              <a:buNone/>
+            </a:pPr>
+            <a:r>
+              <a:rPr lang="en-US" sz="2000" b="1" dirty="0" spc="100" kern="0">
+                <a:solidFill>
+                  <a:srgbClr val="E8A33D"/>
+                </a:solidFill>
+                <a:latin typeface="Calibri" pitchFamily="34" charset="0"/>
+                <a:ea typeface="Calibri" pitchFamily="34" charset="-122"/>
+                <a:cs typeface="Calibri" pitchFamily="34" charset="-120"/>
+              </a:rPr>
+              <a:t>A101 → A205 BUGGY TRANSFER</a:t>
+            </a:r>
+            <a:endParaRPr lang="en-US" sz="2000" dirty="0"/>
+          </a:p>
+        </p:txBody>
+      </p:sp>
+      <p:sp>
+        <p:nvSpPr>
+          <p:cNvPr id="9" name="Text"/>
+          <p:cNvSpPr txBox="1"/>
+          <p:nvPr/>
+        </p:nvSpPr>
+        <p:spPr>
+          <a:xfrm>
+            <a:off x="6858000" y="1965960"/>
+            <a:ext cx="4480560" cy="3840000"/>
+          </a:xfrm>
+          <a:prstGeom prst="rect">
+            <a:avLst/>
+          </a:prstGeom>
+          <a:noFill/>
+          <a:ln/>
+        </p:spPr>
+        <p:txBody>
+          <a:bodyPr wrap="square" rtlCol="0" anchor="t"/>
+          <a:lstStyle/>
+          <a:p>
+            <a:pPr algn="l" indent="0" marL="0">
+              <a:lnSpc>
+                <a:spcPct val="115000"/>
+              </a:lnSpc>
+              <a:buNone/>
+            </a:pPr>
+            <a:r>
+              <a:rPr lang="en-US" sz="1800" dirty="0">
+                <a:solidFill>
+                  <a:srgbClr val="FFFFFF"/>
+                </a:solidFill>
+                <a:latin typeface="Courier New" pitchFamily="34" charset="0"/>
+                <a:ea typeface="Courier New" pitchFamily="34" charset="-122"/>
+                <a:cs typeface="Courier New" pitchFamily="34" charset="-120"/>
+              </a:rPr>
+              <a:t>BEGIN TRANSACTION;</a:t>
+            </a:r>
+            <a:endParaRPr lang="en-US" sz="1800" dirty="0"/>
+          </a:p>
+          <a:p>
+            <a:pPr algn="l" indent="0" marL="0">
+              <a:lnSpc>
+                <a:spcPct val="115000"/>
+              </a:lnSpc>
+              <a:buNone/>
+            </a:pPr>
+            <a:endParaRPr lang="en-US" sz="1800" dirty="0"/>
+          </a:p>
+          <a:p>
+            <a:pPr algn="l" indent="0" marL="0">
+              <a:lnSpc>
+                <a:spcPct val="115000"/>
+              </a:lnSpc>
+              <a:buNone/>
+            </a:pPr>
+            <a:r>
+              <a:rPr lang="en-US" sz="1800" dirty="0">
+                <a:solidFill>
+                  <a:srgbClr val="FFFFFF"/>
+                </a:solidFill>
+                <a:latin typeface="Courier New" pitchFamily="34" charset="0"/>
+                <a:ea typeface="Courier New" pitchFamily="34" charset="-122"/>
+                <a:cs typeface="Courier New" pitchFamily="34" charset="-120"/>
+              </a:rPr>
+              <a:t>  UPDATE Account</a:t>
+            </a:r>
+            <a:endParaRPr lang="en-US" sz="1800" dirty="0"/>
+          </a:p>
+          <a:p>
+            <a:pPr algn="l" indent="0" marL="0">
+              <a:lnSpc>
+                <a:spcPct val="115000"/>
+              </a:lnSpc>
+              <a:buNone/>
+            </a:pPr>
+            <a:r>
+              <a:rPr lang="en-US" sz="1800" dirty="0">
+                <a:solidFill>
+                  <a:srgbClr val="FFFFFF"/>
+                </a:solidFill>
+                <a:latin typeface="Courier New" pitchFamily="34" charset="0"/>
+                <a:ea typeface="Courier New" pitchFamily="34" charset="-122"/>
+                <a:cs typeface="Courier New" pitchFamily="34" charset="-120"/>
+              </a:rPr>
+              <a:t>  SET balance = balance - 10000</a:t>
+            </a:r>
+            <a:endParaRPr lang="en-US" sz="1800" dirty="0"/>
+          </a:p>
+          <a:p>
+            <a:pPr algn="l" indent="0" marL="0">
+              <a:lnSpc>
+                <a:spcPct val="115000"/>
+              </a:lnSpc>
+              <a:buNone/>
+            </a:pPr>
+            <a:r>
+              <a:rPr lang="en-US" sz="1800" dirty="0">
+                <a:solidFill>
+                  <a:srgbClr val="FFFFFF"/>
+                </a:solidFill>
+                <a:latin typeface="Courier New" pitchFamily="34" charset="0"/>
+                <a:ea typeface="Courier New" pitchFamily="34" charset="-122"/>
+                <a:cs typeface="Courier New" pitchFamily="34" charset="-120"/>
+              </a:rPr>
+              <a:t>  WHERE accountNo = 'A101';</a:t>
+            </a:r>
+            <a:endParaRPr lang="en-US" sz="1800" dirty="0"/>
+          </a:p>
+          <a:p>
+            <a:pPr algn="l" indent="0" marL="0">
+              <a:lnSpc>
+                <a:spcPct val="115000"/>
+              </a:lnSpc>
+              <a:buNone/>
+            </a:pPr>
+            <a:endParaRPr lang="en-US" sz="1800" dirty="0"/>
+          </a:p>
+          <a:p>
+            <a:pPr algn="l" indent="0" marL="0">
+              <a:lnSpc>
+                <a:spcPct val="115000"/>
+              </a:lnSpc>
+              <a:buNone/>
+            </a:pPr>
+            <a:r>
+              <a:rPr lang="en-US" sz="1800" dirty="0">
+                <a:solidFill>
+                  <a:srgbClr val="FFFFFF"/>
+                </a:solidFill>
+                <a:latin typeface="Courier New" pitchFamily="34" charset="0"/>
+                <a:ea typeface="Courier New" pitchFamily="34" charset="-122"/>
+                <a:cs typeface="Courier New" pitchFamily="34" charset="-120"/>
+              </a:rPr>
+              <a:t>  UPDATE Account</a:t>
+            </a:r>
+            <a:endParaRPr lang="en-US" sz="1800" dirty="0"/>
+          </a:p>
+          <a:p>
+            <a:pPr algn="l" indent="0" marL="0">
+              <a:lnSpc>
+                <a:spcPct val="115000"/>
+              </a:lnSpc>
+              <a:buNone/>
+            </a:pPr>
+            <a:r>
+              <a:rPr lang="en-US" sz="1800" dirty="0">
+                <a:solidFill>
+                  <a:srgbClr val="FFFFFF"/>
+                </a:solidFill>
+                <a:latin typeface="Courier New" pitchFamily="34" charset="0"/>
+                <a:ea typeface="Courier New" pitchFamily="34" charset="-122"/>
+                <a:cs typeface="Courier New" pitchFamily="34" charset="-120"/>
+              </a:rPr>
+              <a:t>  SET balance = balance + </a:t>
+            </a:r>
+            <a:r>
+              <a:rPr lang="en-US" sz="1800" dirty="0">
+                <a:solidFill>
+                  <a:srgbClr val="E8A33D"/>
+                </a:solidFill>
+                <a:latin typeface="Courier New" pitchFamily="34" charset="0"/>
+                <a:ea typeface="Courier New" pitchFamily="34" charset="-122"/>
+                <a:cs typeface="Courier New" pitchFamily="34" charset="-120"/>
+              </a:rPr>
+              <a:t>9000</a:t>
+            </a:r>
+            <a:endParaRPr lang="en-US" sz="1800" dirty="0"/>
+          </a:p>
+          <a:p>
+            <a:pPr algn="l" indent="0" marL="0">
+              <a:lnSpc>
+                <a:spcPct val="115000"/>
+              </a:lnSpc>
+              <a:buNone/>
+            </a:pPr>
+            <a:r>
+              <a:rPr lang="en-US" sz="1800" dirty="0">
+                <a:solidFill>
+                  <a:srgbClr val="FFFFFF"/>
+                </a:solidFill>
+                <a:latin typeface="Courier New" pitchFamily="34" charset="0"/>
+                <a:ea typeface="Courier New" pitchFamily="34" charset="-122"/>
+                <a:cs typeface="Courier New" pitchFamily="34" charset="-120"/>
+              </a:rPr>
+              <a:t>  WHERE accountNo = 'A205';</a:t>
+            </a:r>
+            <a:endParaRPr lang="en-US" sz="1800" dirty="0"/>
+          </a:p>
+          <a:p>
+            <a:pPr algn="l" indent="0" marL="0">
+              <a:lnSpc>
+                <a:spcPct val="115000"/>
+              </a:lnSpc>
+              <a:buNone/>
+            </a:pPr>
+            <a:endParaRPr lang="en-US" sz="1800" dirty="0"/>
+          </a:p>
+          <a:p>
+            <a:pPr algn="l" indent="0" marL="0">
+              <a:lnSpc>
+                <a:spcPct val="115000"/>
+              </a:lnSpc>
+              <a:buNone/>
+            </a:pPr>
+            <a:r>
+              <a:rPr lang="en-US" sz="1800" dirty="0">
+                <a:solidFill>
+                  <a:srgbClr val="FFFFFF"/>
+                </a:solidFill>
+                <a:latin typeface="Courier New" pitchFamily="34" charset="0"/>
+                <a:ea typeface="Courier New" pitchFamily="34" charset="-122"/>
+                <a:cs typeface="Courier New" pitchFamily="34" charset="-120"/>
+              </a:rPr>
+              <a:t>COMMIT;  </a:t>
+            </a:r>
+            <a:r>
+              <a:rPr lang="en-US" sz="1800" dirty="0">
+                <a:solidFill>
+                  <a:srgbClr val="E8A33D"/>
+                </a:solidFill>
+                <a:latin typeface="Courier New" pitchFamily="34" charset="0"/>
+                <a:ea typeface="Courier New" pitchFamily="34" charset="-122"/>
+                <a:cs typeface="Courier New" pitchFamily="34" charset="-120"/>
+              </a:rPr>
+              <a:t>-- PKR 1,000 lost</a:t>
+            </a:r>
+            <a:endParaRPr lang="en-US" sz="1800" dirty="0"/>
+          </a:p>
+        </p:txBody>
+      </p:sp>
+    </p:spTree>
+  </p:cSld>
+  <p:clrMapOvr>
+    <a:masterClrMapping/>
+  </p:clrMapOvr>
+</p:sld>
+</file>
+
+<file path=ppt/slides/slide18.xml><?xml version="1.0" encoding="utf-8"?>
+<p:sld xmlns:a="http://schemas.openxmlformats.org/drawingml/2006/main" xmlns:r="http://schemas.openxmlformats.org/officeDocument/2006/relationships" xmlns:p="http://schemas.openxmlformats.org/presentationml/2006/main">
+  <p:cSld name="Slide 18">
+    <p:bg>
+      <p:bgPr>
+        <a:solidFill>
+          <a:srgbClr val="F7F8F9"/>
+        </a:solidFill>
+      </p:bgPr>
+    </p:bg>
+    <p:spTree>
+      <p:nvGrpSpPr>
+        <p:cNvPr id="1" name=""/>
+        <p:cNvGrpSpPr/>
+        <p:nvPr/>
+      </p:nvGrpSpPr>
+      <p:grpSpPr>
+        <a:xfrm>
+          <a:off x="0" y="0"/>
+          <a:ext cx="0" cy="0"/>
+          <a:chOff x="0" y="0"/>
+          <a:chExt cx="0" cy="0"/>
+        </a:xfrm>
+      </p:grpSpPr>
+      <p:sp>
+        <p:nvSpPr>
+          <p:cNvPr id="2" name="Text 0"/>
+          <p:cNvSpPr txBox="1"/>
+          <p:nvPr/>
+        </p:nvSpPr>
+        <p:spPr>
+          <a:xfrm>
+            <a:off x="548640" y="320040"/>
+            <a:ext cx="9144000" cy="292608"/>
+          </a:xfrm>
+          <a:prstGeom prst="rect">
+            <a:avLst/>
+          </a:prstGeom>
+          <a:noFill/>
+          <a:ln/>
+        </p:spPr>
+        <p:txBody>
+          <a:bodyPr wrap="square" rtlCol="0" anchor="ctr"/>
+          <a:lstStyle/>
+          <a:p>
+            <a:pPr algn="l" indent="0" marL="0">
+              <a:buNone/>
+            </a:pPr>
+            <a:r>
+              <a:rPr lang="en-US" sz="1200" b="1" dirty="0" spc="150" kern="0">
+                <a:solidFill>
+                  <a:srgbClr val="8B7FD9"/>
+                </a:solidFill>
+                <a:latin typeface="Calibri" pitchFamily="34" charset="0"/>
+                <a:ea typeface="Calibri" pitchFamily="34" charset="-122"/>
+                <a:cs typeface="Calibri" pitchFamily="34" charset="-120"/>
+              </a:rPr>
+              <a:t>DURABILITY, VIOLATED</a:t>
+            </a:r>
+            <a:endParaRPr lang="en-US" sz="1200" dirty="0"/>
+          </a:p>
+        </p:txBody>
+      </p:sp>
+      <p:sp>
+        <p:nvSpPr>
+          <p:cNvPr id="3" name="Text 1"/>
+          <p:cNvSpPr txBox="1"/>
+          <p:nvPr/>
+        </p:nvSpPr>
+        <p:spPr>
+          <a:xfrm>
+            <a:off x="548640" y="566928"/>
+            <a:ext cx="11064240" cy="640080"/>
+          </a:xfrm>
+          <a:prstGeom prst="rect">
+            <a:avLst/>
+          </a:prstGeom>
+          <a:noFill/>
+          <a:ln/>
+        </p:spPr>
+        <p:txBody>
+          <a:bodyPr wrap="square" rtlCol="0" anchor="ctr"/>
+          <a:lstStyle/>
+          <a:p>
+            <a:pPr algn="l" indent="0" marL="0">
+              <a:buNone/>
+            </a:pPr>
+            <a:r>
+              <a:rPr lang="en-US" sz="2500" b="1" dirty="0">
+                <a:solidFill>
+                  <a:srgbClr val="1F2429"/>
+                </a:solidFill>
+                <a:latin typeface="Calibri" pitchFamily="34" charset="0"/>
+                <a:ea typeface="Calibri" pitchFamily="34" charset="-122"/>
+                <a:cs typeface="Calibri" pitchFamily="34" charset="-120"/>
+              </a:rPr>
+              <a:t>Durability Violation: A Crash One Millisecond After Commit</a:t>
+            </a:r>
+            <a:endParaRPr lang="en-US" sz="1800" dirty="0"/>
+          </a:p>
+        </p:txBody>
+      </p:sp>
+      <p:sp>
+        <p:nvSpPr>
+          <p:cNvPr id="4" name="Text 2"/>
+          <p:cNvSpPr txBox="1"/>
+          <p:nvPr/>
+        </p:nvSpPr>
+        <p:spPr>
+          <a:xfrm>
+            <a:off x="9951415" y="6455664"/>
+            <a:ext cx="2011680" cy="292608"/>
+          </a:xfrm>
+          <a:prstGeom prst="rect">
+            <a:avLst/>
+          </a:prstGeom>
+          <a:noFill/>
+          <a:ln/>
+        </p:spPr>
+        <p:txBody>
+          <a:bodyPr wrap="square" rtlCol="0" anchor="ctr"/>
+          <a:lstStyle/>
+          <a:p>
+            <a:pPr algn="r" indent="0" marL="0">
+              <a:buNone/>
+            </a:pPr>
+            <a:r>
+              <a:rPr lang="en-US" sz="1200" u="sng" dirty="0">
+                <a:solidFill>
+                  <a:srgbClr val="8A939B"/>
+                </a:solidFill>
+                <a:latin typeface="Calibri" pitchFamily="34" charset="0"/>
+                <a:ea typeface="Calibri" pitchFamily="34" charset="-122"/>
+                <a:cs typeface="Calibri" pitchFamily="34" charset="-120"/>
+                <a:hlinkClick r:id="rId1" invalidUrl="" action="" tgtFrame="" tooltip="" history="1" highlightClick="0" endSnd="0">
+                  <a:extLst>
+                    <a:ext uri="{A12FA001-AC4F-418D-AE19-62706E023703}">
+                      <ahyp:hlinkClr xmlns:ahyp="http://schemas.microsoft.com/office/drawing/2018/hyperlinkcolor" val="tx"/>
+                    </a:ext>
+                  </a:extLst>
+                </a:hlinkClick>
+              </a:rPr>
+              <a:t>cuinotes.com</a:t>
+            </a:r>
+            <a:pPr algn="r" indent="0" marL="0">
+              <a:buNone/>
+            </a:pPr>
+            <a:r>
+              <a:rPr lang="en-US" sz="1200" dirty="0">
+                <a:solidFill>
+                  <a:srgbClr val="8A939B"/>
+                </a:solidFill>
+                <a:latin typeface="Calibri" pitchFamily="34" charset="0"/>
+                <a:ea typeface="Calibri" pitchFamily="34" charset="-122"/>
+                <a:cs typeface="Calibri" pitchFamily="34" charset="-120"/>
+              </a:rPr>
+              <a:t>  ·  14</a:t>
+            </a:r>
+            <a:endParaRPr lang="en-US" sz="1200" dirty="0"/>
+          </a:p>
+        </p:txBody>
+      </p:sp>
+      <p:sp>
+        <p:nvSpPr>
+          <p:cNvPr id="5" name="Text"/>
+          <p:cNvSpPr txBox="1"/>
+          <p:nvPr/>
+        </p:nvSpPr>
+        <p:spPr>
+          <a:xfrm>
+            <a:off x="548640" y="1240000"/>
+            <a:ext cx="11064240" cy="1000000"/>
+          </a:xfrm>
+          <a:prstGeom prst="rect">
+            <a:avLst/>
+          </a:prstGeom>
+          <a:noFill/>
+          <a:ln/>
+        </p:spPr>
+        <p:txBody>
+          <a:bodyPr wrap="square" rtlCol="0" anchor="t"/>
+          <a:lstStyle/>
+          <a:p>
+            <a:pPr algn="l" indent="0" marL="0">
+              <a:lnSpc>
+                <a:spcPct val="125000"/>
+              </a:lnSpc>
+              <a:buNone/>
+            </a:pPr>
+            <a:r>
+              <a:rPr lang="en-US" sz="1800" dirty="0">
+                <a:solidFill>
+                  <a:srgbClr val="1F2429"/>
+                </a:solidFill>
+                <a:latin typeface="Calibri" pitchFamily="34" charset="0"/>
+                <a:ea typeface="Calibri" pitchFamily="34" charset="-122"/>
+                <a:cs typeface="Calibri" pitchFamily="34" charset="-120"/>
+              </a:rPr>
+              <a:t>T1 (the 50,000 / 20,000 → 10,000 transfer) reaches COMMIT; the log record for both writes is flushed to stable storage and the DBMS acknowledges the commit. One millisecond later, the system crashes — before the in-memory data pages themselves are fully flushed to disk.</a:t>
+            </a:r>
+            <a:endParaRPr lang="en-US" sz="1800" dirty="0"/>
+          </a:p>
+        </p:txBody>
+      </p:sp>
+      <p:sp>
+        <p:nvSpPr>
+          <p:cNvPr id="6" name="Shape"/>
+          <p:cNvSpPr/>
+          <p:nvPr/>
+        </p:nvSpPr>
+        <p:spPr>
+          <a:xfrm>
+            <a:off x="548640" y="2400000"/>
+            <a:ext cx="5372100" cy="2700000"/>
+          </a:xfrm>
+          <a:prstGeom prst="roundRect">
+            <a:avLst>
+              <a:gd name="adj" fmla="val 3200"/>
+            </a:avLst>
+          </a:prstGeom>
+          <a:solidFill>
+            <a:srgbClr val="FFFFFF"/>
+          </a:solidFill>
+          <a:ln w="22225">
+            <a:solidFill>
+              <a:srgbClr val="E8A33D"/>
+            </a:solidFill>
+            <a:prstDash val="solid"/>
+          </a:ln>
+          <a:effectLst>
+            <a:outerShdw sx="100000" sy="100000" kx="0" ky="0" algn="bl" rotWithShape="0" blurRad="63500" dist="25400" dir="5400000">
+              <a:srgbClr val="1F2429">
+                <a:alpha val="15000"/>
+              </a:srgbClr>
+            </a:outerShdw>
+          </a:effectLst>
+        </p:spPr>
+      </p:sp>
+      <p:sp>
+        <p:nvSpPr>
+          <p:cNvPr id="7" name="Shape"/>
+          <p:cNvSpPr/>
+          <p:nvPr/>
+        </p:nvSpPr>
+        <p:spPr>
+          <a:xfrm>
+            <a:off x="713232" y="2546304"/>
+            <a:ext cx="201168" cy="201168"/>
+          </a:xfrm>
+          <a:prstGeom prst="ellipse">
+            <a:avLst/>
+          </a:prstGeom>
+          <a:solidFill>
+            <a:srgbClr val="E8A33D"/>
+          </a:solidFill>
+          <a:ln/>
+        </p:spPr>
+      </p:sp>
+      <p:sp>
+        <p:nvSpPr>
+          <p:cNvPr id="8" name="Text"/>
+          <p:cNvSpPr txBox="1"/>
+          <p:nvPr/>
+        </p:nvSpPr>
+        <p:spPr>
+          <a:xfrm>
+            <a:off x="1005840" y="2491440"/>
+            <a:ext cx="4732020" cy="365760"/>
+          </a:xfrm>
+          <a:prstGeom prst="rect">
+            <a:avLst/>
+          </a:prstGeom>
+          <a:noFill/>
+          <a:ln/>
+        </p:spPr>
+        <p:txBody>
+          <a:bodyPr wrap="square" rtlCol="0" anchor="t"/>
+          <a:lstStyle/>
+          <a:p>
+            <a:pPr algn="l" indent="0" marL="0">
+              <a:buNone/>
+            </a:pPr>
+            <a:r>
+              <a:rPr lang="en-US" sz="2000" b="1" dirty="0">
+                <a:solidFill>
+                  <a:srgbClr val="1F2429"/>
+                </a:solidFill>
+                <a:latin typeface="Calibri" pitchFamily="34" charset="0"/>
+                <a:ea typeface="Calibri" pitchFamily="34" charset="-122"/>
+                <a:cs typeface="Calibri" pitchFamily="34" charset="-120"/>
+              </a:rPr>
+              <a:t>Without Durability</a:t>
+            </a:r>
+            <a:endParaRPr lang="en-US" sz="2000" dirty="0"/>
+          </a:p>
+        </p:txBody>
+      </p:sp>
+      <p:sp>
+        <p:nvSpPr>
+          <p:cNvPr id="9" name="Text"/>
+          <p:cNvSpPr txBox="1"/>
+          <p:nvPr/>
+        </p:nvSpPr>
+        <p:spPr>
+          <a:xfrm>
+            <a:off x="749808" y="2902920"/>
+            <a:ext cx="4969764" cy="2105640"/>
+          </a:xfrm>
+          <a:prstGeom prst="rect">
+            <a:avLst/>
+          </a:prstGeom>
+          <a:noFill/>
+          <a:ln/>
+        </p:spPr>
+        <p:txBody>
+          <a:bodyPr wrap="square" rtlCol="0" anchor="t"/>
+          <a:lstStyle/>
+          <a:p>
+            <a:pPr algn="l" indent="0" marL="0">
+              <a:lnSpc>
+                <a:spcPct val="112000"/>
+              </a:lnSpc>
+              <a:buNone/>
+            </a:pPr>
+            <a:r>
+              <a:rPr lang="en-US" sz="1800" dirty="0">
+                <a:solidFill>
+                  <a:srgbClr val="6B7480"/>
+                </a:solidFill>
+                <a:latin typeface="Calibri" pitchFamily="34" charset="0"/>
+                <a:ea typeface="Calibri" pitchFamily="34" charset="-122"/>
+                <a:cs typeface="Calibri" pitchFamily="34" charset="-120"/>
+              </a:rPr>
+              <a:t>On restart, the data files still show the pre-transfer balances — the 40,000 debit may or may not have reached disk, and the 20,000 → 30,000 credit never did. The committed transfer the customer was told succeeded has silently reverted.</a:t>
+            </a:r>
+            <a:endParaRPr lang="en-US" sz="1800" dirty="0"/>
+          </a:p>
+        </p:txBody>
+      </p:sp>
+      <p:sp>
+        <p:nvSpPr>
+          <p:cNvPr id="10" name="Shape"/>
+          <p:cNvSpPr/>
+          <p:nvPr/>
+        </p:nvSpPr>
+        <p:spPr>
+          <a:xfrm>
+            <a:off x="6240780" y="2400000"/>
+            <a:ext cx="5372100" cy="2700000"/>
+          </a:xfrm>
+          <a:prstGeom prst="roundRect">
+            <a:avLst>
+              <a:gd name="adj" fmla="val 3200"/>
+            </a:avLst>
+          </a:prstGeom>
+          <a:solidFill>
+            <a:srgbClr val="FFFFFF"/>
+          </a:solidFill>
+          <a:ln w="22225">
+            <a:solidFill>
+              <a:srgbClr val="2FE6C4"/>
+            </a:solidFill>
+            <a:prstDash val="solid"/>
+          </a:ln>
+          <a:effectLst>
+            <a:outerShdw sx="100000" sy="100000" kx="0" ky="0" algn="bl" rotWithShape="0" blurRad="63500" dist="25400" dir="5400000">
+              <a:srgbClr val="1F2429">
+                <a:alpha val="15000"/>
+              </a:srgbClr>
+            </a:outerShdw>
+          </a:effectLst>
+        </p:spPr>
+      </p:sp>
+      <p:sp>
+        <p:nvSpPr>
+          <p:cNvPr id="11" name="Shape"/>
+          <p:cNvSpPr/>
+          <p:nvPr/>
+        </p:nvSpPr>
+        <p:spPr>
+          <a:xfrm>
+            <a:off x="6405372" y="2546304"/>
+            <a:ext cx="201168" cy="201168"/>
+          </a:xfrm>
+          <a:prstGeom prst="ellipse">
+            <a:avLst/>
+          </a:prstGeom>
+          <a:solidFill>
+            <a:srgbClr val="2FE6C4"/>
+          </a:solidFill>
+          <a:ln/>
+        </p:spPr>
+      </p:sp>
+      <p:sp>
+        <p:nvSpPr>
+          <p:cNvPr id="12" name="Text"/>
+          <p:cNvSpPr txBox="1"/>
+          <p:nvPr/>
+        </p:nvSpPr>
+        <p:spPr>
+          <a:xfrm>
+            <a:off x="6697980" y="2491440"/>
+            <a:ext cx="4732020" cy="365760"/>
+          </a:xfrm>
+          <a:prstGeom prst="rect">
+            <a:avLst/>
+          </a:prstGeom>
+          <a:noFill/>
+          <a:ln/>
+        </p:spPr>
+        <p:txBody>
+          <a:bodyPr wrap="square" rtlCol="0" anchor="t"/>
+          <a:lstStyle/>
+          <a:p>
+            <a:pPr algn="l" indent="0" marL="0">
+              <a:buNone/>
+            </a:pPr>
+            <a:r>
+              <a:rPr lang="en-US" sz="2000" b="1" dirty="0">
+                <a:solidFill>
+                  <a:srgbClr val="1F2429"/>
+                </a:solidFill>
+                <a:latin typeface="Calibri" pitchFamily="34" charset="0"/>
+                <a:ea typeface="Calibri" pitchFamily="34" charset="-122"/>
+                <a:cs typeface="Calibri" pitchFamily="34" charset="-120"/>
+              </a:rPr>
+              <a:t>With Durability (WAL + Redo)</a:t>
+            </a:r>
+            <a:endParaRPr lang="en-US" sz="2000" dirty="0"/>
+          </a:p>
+        </p:txBody>
+      </p:sp>
+      <p:sp>
+        <p:nvSpPr>
+          <p:cNvPr id="13" name="Text"/>
+          <p:cNvSpPr txBox="1"/>
+          <p:nvPr/>
+        </p:nvSpPr>
+        <p:spPr>
+          <a:xfrm>
+            <a:off x="6441948" y="2902920"/>
+            <a:ext cx="4969764" cy="2105640"/>
+          </a:xfrm>
+          <a:prstGeom prst="rect">
+            <a:avLst/>
+          </a:prstGeom>
+          <a:noFill/>
+          <a:ln/>
+        </p:spPr>
+        <p:txBody>
+          <a:bodyPr wrap="square" rtlCol="0" anchor="t"/>
+          <a:lstStyle/>
+          <a:p>
+            <a:pPr algn="l" indent="0" marL="0">
+              <a:lnSpc>
+                <a:spcPct val="112000"/>
+              </a:lnSpc>
+              <a:buNone/>
+            </a:pPr>
+            <a:r>
+              <a:rPr lang="en-US" sz="1800" dirty="0">
+                <a:solidFill>
+                  <a:srgbClr val="6B7480"/>
+                </a:solidFill>
+                <a:latin typeface="Calibri" pitchFamily="34" charset="0"/>
+                <a:ea typeface="Calibri" pitchFamily="34" charset="-122"/>
+                <a:cs typeface="Calibri" pitchFamily="34" charset="-120"/>
+              </a:rPr>
+              <a:t>Because the log record reached stable storage before the commit was acknowledged, recovery replays it on restart and reapplies both writes. The committed transfer is guaranteed present no matter when the crash happened. Full mechanics: Lecture 31.</a:t>
+            </a:r>
+            <a:endParaRPr lang="en-US" sz="1800" dirty="0"/>
+          </a:p>
+        </p:txBody>
+      </p:sp>
+      <p:sp>
+        <p:nvSpPr>
+          <p:cNvPr id="14" name="Shape"/>
+          <p:cNvSpPr/>
+          <p:nvPr/>
+        </p:nvSpPr>
+        <p:spPr>
+          <a:xfrm>
+            <a:off x="548640" y="5250000"/>
+            <a:ext cx="11064240" cy="1000000"/>
+          </a:xfrm>
+          <a:prstGeom prst="roundRect">
+            <a:avLst>
+              <a:gd name="adj" fmla="val 5333"/>
+            </a:avLst>
+          </a:prstGeom>
+          <a:solidFill>
+            <a:srgbClr val="FFF7EA"/>
+          </a:solidFill>
+          <a:ln w="12700">
+            <a:solidFill>
+              <a:srgbClr val="E8A33D"/>
+            </a:solidFill>
+            <a:prstDash val="solid"/>
+          </a:ln>
+        </p:spPr>
+      </p:sp>
+      <p:sp>
+        <p:nvSpPr>
+          <p:cNvPr id="15" name="Text"/>
+          <p:cNvSpPr txBox="1"/>
+          <p:nvPr/>
+        </p:nvSpPr>
+        <p:spPr>
+          <a:xfrm>
+            <a:off x="822960" y="5387160"/>
+            <a:ext cx="10515600" cy="725680"/>
+          </a:xfrm>
+          <a:prstGeom prst="rect">
+            <a:avLst/>
+          </a:prstGeom>
+          <a:noFill/>
+          <a:ln/>
+        </p:spPr>
+        <p:txBody>
+          <a:bodyPr wrap="square" rtlCol="0" anchor="t"/>
+          <a:lstStyle/>
+          <a:p>
+            <a:pPr algn="l" indent="0" marL="0">
+              <a:lnSpc>
+                <a:spcPct val="120000"/>
+              </a:lnSpc>
+              <a:buNone/>
+            </a:pPr>
+            <a:r>
+              <a:rPr lang="en-US" sz="1800" b="1" dirty="0">
+                <a:solidFill>
+                  <a:srgbClr val="1F2429"/>
+                </a:solidFill>
+                <a:latin typeface="Calibri" pitchFamily="34" charset="0"/>
+                <a:ea typeface="Calibri" pitchFamily="34" charset="-122"/>
+                <a:cs typeface="Calibri" pitchFamily="34" charset="-120"/>
+              </a:rPr>
+              <a:t>Durability is about WHEN data becomes safe, not just THAT it's saved: </a:t>
+            </a:r>
+            <a:r>
+              <a:rPr lang="en-US" sz="1800" dirty="0">
+                <a:solidFill>
+                  <a:srgbClr val="1F2429"/>
+                </a:solidFill>
+                <a:latin typeface="Calibri" pitchFamily="34" charset="0"/>
+                <a:ea typeface="Calibri" pitchFamily="34" charset="-122"/>
+                <a:cs typeface="Calibri" pitchFamily="34" charset="-120"/>
+              </a:rPr>
+              <a:t>once the DBMS says ‘committed,’ the log — not yet the data pages — already holds everything recovery needs to redo it.</a:t>
+            </a:r>
+            <a:endParaRPr lang="en-US" sz="1800" dirty="0"/>
+          </a:p>
+        </p:txBody>
+      </p:sp>
+    </p:spTree>
+  </p:cSld>
+  <p:clrMapOvr>
+    <a:masterClrMapping/>
+  </p:clrMapOvr>
+</p:sld>
+</file>
+
+<file path=ppt/slides/slide19.xml><?xml version="1.0" encoding="utf-8"?>
+<p:sld xmlns:a="http://schemas.openxmlformats.org/drawingml/2006/main" xmlns:r="http://schemas.openxmlformats.org/officeDocument/2006/relationships" xmlns:p="http://schemas.openxmlformats.org/presentationml/2006/main">
+  <p:cSld name="Slide 19">
+    <p:bg>
+      <p:bgPr>
+        <a:solidFill>
+          <a:srgbClr val="F7F8F9"/>
+        </a:solidFill>
+      </p:bgPr>
+    </p:bg>
+    <p:spTree>
+      <p:nvGrpSpPr>
+        <p:cNvPr id="1" name=""/>
+        <p:cNvGrpSpPr/>
+        <p:nvPr/>
+      </p:nvGrpSpPr>
+      <p:grpSpPr>
+        <a:xfrm>
+          <a:off x="0" y="0"/>
+          <a:ext cx="0" cy="0"/>
+          <a:chOff x="0" y="0"/>
+          <a:chExt cx="0" cy="0"/>
+        </a:xfrm>
+      </p:grpSpPr>
+      <p:sp>
+        <p:nvSpPr>
+          <p:cNvPr id="2" name="Text 0"/>
+          <p:cNvSpPr txBox="1"/>
+          <p:nvPr/>
+        </p:nvSpPr>
+        <p:spPr>
+          <a:xfrm>
+            <a:off x="548640" y="320040"/>
+            <a:ext cx="9144000" cy="292608"/>
+          </a:xfrm>
+          <a:prstGeom prst="rect">
+            <a:avLst/>
+          </a:prstGeom>
+          <a:noFill/>
+          <a:ln/>
+        </p:spPr>
+        <p:txBody>
+          <a:bodyPr wrap="square" rtlCol="0" anchor="ctr"/>
+          <a:lstStyle/>
+          <a:p>
+            <a:pPr algn="l" indent="0" marL="0">
+              <a:buNone/>
+            </a:pPr>
+            <a:r>
+              <a:rPr lang="en-US" sz="1200" b="1" dirty="0" spc="150" kern="0">
+                <a:solidFill>
+                  <a:srgbClr val="8B7FD9"/>
+                </a:solidFill>
+                <a:latin typeface="Calibri" pitchFamily="34" charset="0"/>
+                <a:ea typeface="Calibri" pitchFamily="34" charset="-122"/>
+                <a:cs typeface="Calibri" pitchFamily="34" charset="-120"/>
+              </a:rPr>
+              <a:t>ALL FOUR, TOGETHER</a:t>
+            </a:r>
+            <a:endParaRPr lang="en-US" sz="1200" dirty="0"/>
+          </a:p>
+        </p:txBody>
+      </p:sp>
+      <p:sp>
+        <p:nvSpPr>
+          <p:cNvPr id="3" name="Text 1"/>
+          <p:cNvSpPr txBox="1"/>
+          <p:nvPr/>
+        </p:nvSpPr>
+        <p:spPr>
+          <a:xfrm>
+            <a:off x="548640" y="566928"/>
+            <a:ext cx="11064240" cy="640080"/>
+          </a:xfrm>
+          <a:prstGeom prst="rect">
+            <a:avLst/>
+          </a:prstGeom>
+          <a:noFill/>
+          <a:ln/>
+        </p:spPr>
+        <p:txBody>
+          <a:bodyPr wrap="square" rtlCol="0" anchor="ctr"/>
+          <a:lstStyle/>
+          <a:p>
+            <a:pPr algn="l" indent="0" marL="0">
+              <a:buNone/>
+            </a:pPr>
+            <a:r>
+              <a:rPr lang="en-US" sz="2500" b="1" dirty="0">
+                <a:solidFill>
+                  <a:srgbClr val="1F2429"/>
+                </a:solidFill>
+                <a:latin typeface="Calibri" pitchFamily="34" charset="0"/>
+                <a:ea typeface="Calibri" pitchFamily="34" charset="-122"/>
+                <a:cs typeface="Calibri" pitchFamily="34" charset="-120"/>
+              </a:rPr>
+              <a:t>All Four Properties, Side by Side</a:t>
+            </a:r>
+            <a:endParaRPr lang="en-US" sz="2000" dirty="0"/>
+          </a:p>
+        </p:txBody>
+      </p:sp>
+      <p:sp>
+        <p:nvSpPr>
+          <p:cNvPr id="4" name="Text 2"/>
+          <p:cNvSpPr txBox="1"/>
+          <p:nvPr/>
+        </p:nvSpPr>
+        <p:spPr>
+          <a:xfrm>
+            <a:off x="9951415" y="6455664"/>
+            <a:ext cx="2011680" cy="292608"/>
+          </a:xfrm>
+          <a:prstGeom prst="rect">
+            <a:avLst/>
+          </a:prstGeom>
+          <a:noFill/>
+          <a:ln/>
+        </p:spPr>
+        <p:txBody>
+          <a:bodyPr wrap="square" rtlCol="0" anchor="ctr"/>
+          <a:lstStyle/>
+          <a:p>
+            <a:pPr algn="r" indent="0" marL="0">
+              <a:buNone/>
+            </a:pPr>
+            <a:r>
+              <a:rPr lang="en-US" sz="1200" u="sng" dirty="0">
+                <a:solidFill>
+                  <a:srgbClr val="8A939B"/>
+                </a:solidFill>
+                <a:latin typeface="Calibri" pitchFamily="34" charset="0"/>
+                <a:ea typeface="Calibri" pitchFamily="34" charset="-122"/>
+                <a:cs typeface="Calibri" pitchFamily="34" charset="-120"/>
+                <a:hlinkClick r:id="rId1" invalidUrl="" action="" tgtFrame="" tooltip="" history="1" highlightClick="0" endSnd="0">
+                  <a:extLst>
+                    <a:ext uri="{A12FA001-AC4F-418D-AE19-62706E023703}">
+                      <ahyp:hlinkClr xmlns:ahyp="http://schemas.microsoft.com/office/drawing/2018/hyperlinkcolor" val="tx"/>
+                    </a:ext>
+                  </a:extLst>
+                </a:hlinkClick>
+              </a:rPr>
+              <a:t>cuinotes.com</a:t>
+            </a:r>
+            <a:pPr algn="r" indent="0" marL="0">
+              <a:buNone/>
+            </a:pPr>
+            <a:r>
+              <a:rPr lang="en-US" sz="1200" dirty="0">
+                <a:solidFill>
+                  <a:srgbClr val="8A939B"/>
+                </a:solidFill>
+                <a:latin typeface="Calibri" pitchFamily="34" charset="0"/>
+                <a:ea typeface="Calibri" pitchFamily="34" charset="-122"/>
+                <a:cs typeface="Calibri" pitchFamily="34" charset="-120"/>
+              </a:rPr>
+              <a:t>  ·  18</a:t>
+            </a:r>
+            <a:endParaRPr lang="en-US" sz="1200" dirty="0"/>
+          </a:p>
+        </p:txBody>
+      </p:sp>
+      <p:sp>
+        <p:nvSpPr>
+          <p:cNvPr id="5" name="Shape"/>
+          <p:cNvSpPr/>
+          <p:nvPr/>
+        </p:nvSpPr>
+        <p:spPr>
+          <a:xfrm>
+            <a:off x="548640" y="1463040"/>
+            <a:ext cx="5372100" cy="2103120"/>
+          </a:xfrm>
+          <a:prstGeom prst="roundRect">
+            <a:avLst>
+              <a:gd name="adj" fmla="val 3200"/>
+            </a:avLst>
+          </a:prstGeom>
+          <a:solidFill>
+            <a:srgbClr val="FFFFFF"/>
+          </a:solidFill>
+          <a:ln w="22225">
+            <a:solidFill>
+              <a:srgbClr val="2FE6C4"/>
+            </a:solidFill>
+            <a:prstDash val="solid"/>
+          </a:ln>
+          <a:effectLst>
+            <a:outerShdw sx="100000" sy="100000" kx="0" ky="0" algn="bl" rotWithShape="0" blurRad="63500" dist="25400" dir="5400000">
+              <a:srgbClr val="1F2429">
+                <a:alpha val="15000"/>
+              </a:srgbClr>
+            </a:outerShdw>
+          </a:effectLst>
+        </p:spPr>
+      </p:sp>
+      <p:sp>
+        <p:nvSpPr>
+          <p:cNvPr id="6" name="Shape"/>
+          <p:cNvSpPr/>
+          <p:nvPr/>
+        </p:nvSpPr>
+        <p:spPr>
+          <a:xfrm>
+            <a:off x="713232" y="1609344"/>
+            <a:ext cx="201168" cy="201168"/>
+          </a:xfrm>
+          <a:prstGeom prst="ellipse">
+            <a:avLst/>
+          </a:prstGeom>
+          <a:solidFill>
+            <a:srgbClr val="2FE6C4"/>
+          </a:solidFill>
+          <a:ln/>
+        </p:spPr>
+      </p:sp>
+      <p:sp>
+        <p:nvSpPr>
+          <p:cNvPr id="7" name="Text"/>
+          <p:cNvSpPr txBox="1"/>
+          <p:nvPr/>
+        </p:nvSpPr>
+        <p:spPr>
+          <a:xfrm>
+            <a:off x="1005840" y="1554480"/>
+            <a:ext cx="4732020" cy="365760"/>
+          </a:xfrm>
+          <a:prstGeom prst="rect">
+            <a:avLst/>
+          </a:prstGeom>
+          <a:noFill/>
+          <a:ln/>
+        </p:spPr>
+        <p:txBody>
+          <a:bodyPr wrap="square" rtlCol="0" anchor="t"/>
+          <a:lstStyle/>
+          <a:p>
+            <a:pPr algn="l" indent="0" marL="0">
+              <a:buNone/>
+            </a:pPr>
+            <a:r>
+              <a:rPr lang="en-US" sz="2000" b="1" dirty="0">
+                <a:solidFill>
+                  <a:srgbClr val="1F2429"/>
+                </a:solidFill>
+                <a:latin typeface="Calibri" pitchFamily="34" charset="0"/>
+                <a:ea typeface="Calibri" pitchFamily="34" charset="-122"/>
+                <a:cs typeface="Calibri" pitchFamily="34" charset="-120"/>
+              </a:rPr>
+              <a:t>Atomicity</a:t>
+            </a:r>
+            <a:endParaRPr lang="en-US" sz="2000" dirty="0"/>
+          </a:p>
+        </p:txBody>
+      </p:sp>
+      <p:sp>
+        <p:nvSpPr>
+          <p:cNvPr id="8" name="Text"/>
+          <p:cNvSpPr txBox="1"/>
+          <p:nvPr/>
+        </p:nvSpPr>
+        <p:spPr>
+          <a:xfrm>
+            <a:off x="749808" y="1965960"/>
+            <a:ext cx="4969764" cy="1508760"/>
+          </a:xfrm>
+          <a:prstGeom prst="rect">
+            <a:avLst/>
+          </a:prstGeom>
+          <a:noFill/>
+          <a:ln/>
+        </p:spPr>
+        <p:txBody>
+          <a:bodyPr wrap="square" rtlCol="0" anchor="t"/>
+          <a:lstStyle/>
+          <a:p>
+            <a:pPr algn="l" indent="0" marL="0">
+              <a:lnSpc>
+                <a:spcPct val="112000"/>
+              </a:lnSpc>
+              <a:buNone/>
+            </a:pPr>
+            <a:r>
+              <a:rPr lang="en-US" sz="1800" dirty="0">
+                <a:solidFill>
+                  <a:srgbClr val="6B7480"/>
+                </a:solidFill>
+                <a:latin typeface="Calibri" pitchFamily="34" charset="0"/>
+                <a:ea typeface="Calibri" pitchFamily="34" charset="-122"/>
+                <a:cs typeface="Calibri" pitchFamily="34" charset="-120"/>
+              </a:rPr>
+              <a:t>Without it: PKR 10,000 vanishes between the debit and the credit — gone, with no record.</a:t>
+            </a:r>
+            <a:endParaRPr lang="en-US" sz="1800" dirty="0"/>
+          </a:p>
+        </p:txBody>
+      </p:sp>
+      <p:sp>
+        <p:nvSpPr>
+          <p:cNvPr id="9" name="Shape"/>
+          <p:cNvSpPr/>
+          <p:nvPr/>
+        </p:nvSpPr>
+        <p:spPr>
+          <a:xfrm>
+            <a:off x="6240780" y="1463040"/>
+            <a:ext cx="5372100" cy="2103120"/>
+          </a:xfrm>
+          <a:prstGeom prst="roundRect">
+            <a:avLst>
+              <a:gd name="adj" fmla="val 3200"/>
+            </a:avLst>
+          </a:prstGeom>
+          <a:solidFill>
+            <a:srgbClr val="FFFFFF"/>
+          </a:solidFill>
+          <a:ln w="22225">
+            <a:solidFill>
+              <a:srgbClr val="8B7FD9"/>
+            </a:solidFill>
+            <a:prstDash val="solid"/>
+          </a:ln>
+          <a:effectLst>
+            <a:outerShdw sx="100000" sy="100000" kx="0" ky="0" algn="bl" rotWithShape="0" blurRad="63500" dist="25400" dir="5400000">
+              <a:srgbClr val="1F2429">
+                <a:alpha val="15000"/>
+              </a:srgbClr>
+            </a:outerShdw>
+          </a:effectLst>
+        </p:spPr>
+      </p:sp>
+      <p:sp>
+        <p:nvSpPr>
+          <p:cNvPr id="10" name="Shape"/>
+          <p:cNvSpPr/>
+          <p:nvPr/>
+        </p:nvSpPr>
+        <p:spPr>
+          <a:xfrm>
+            <a:off x="6405372" y="1609344"/>
+            <a:ext cx="201168" cy="201168"/>
+          </a:xfrm>
+          <a:prstGeom prst="ellipse">
+            <a:avLst/>
+          </a:prstGeom>
+          <a:solidFill>
+            <a:srgbClr val="8B7FD9"/>
+          </a:solidFill>
+          <a:ln/>
+        </p:spPr>
+      </p:sp>
+      <p:sp>
+        <p:nvSpPr>
+          <p:cNvPr id="11" name="Text"/>
+          <p:cNvSpPr txBox="1"/>
+          <p:nvPr/>
+        </p:nvSpPr>
+        <p:spPr>
+          <a:xfrm>
+            <a:off x="6697980" y="1554480"/>
+            <a:ext cx="4732020" cy="365760"/>
+          </a:xfrm>
+          <a:prstGeom prst="rect">
+            <a:avLst/>
+          </a:prstGeom>
+          <a:noFill/>
+          <a:ln/>
+        </p:spPr>
+        <p:txBody>
+          <a:bodyPr wrap="square" rtlCol="0" anchor="t"/>
+          <a:lstStyle/>
+          <a:p>
+            <a:pPr algn="l" indent="0" marL="0">
+              <a:buNone/>
+            </a:pPr>
+            <a:r>
+              <a:rPr lang="en-US" sz="2000" b="1" dirty="0">
+                <a:solidFill>
+                  <a:srgbClr val="1F2429"/>
+                </a:solidFill>
+                <a:latin typeface="Calibri" pitchFamily="34" charset="0"/>
+                <a:ea typeface="Calibri" pitchFamily="34" charset="-122"/>
+                <a:cs typeface="Calibri" pitchFamily="34" charset="-120"/>
+              </a:rPr>
+              <a:t>Consistency</a:t>
+            </a:r>
+            <a:endParaRPr lang="en-US" sz="2000" dirty="0"/>
+          </a:p>
+        </p:txBody>
+      </p:sp>
+      <p:sp>
+        <p:nvSpPr>
+          <p:cNvPr id="12" name="Text"/>
+          <p:cNvSpPr txBox="1"/>
+          <p:nvPr/>
+        </p:nvSpPr>
+        <p:spPr>
+          <a:xfrm>
+            <a:off x="6441948" y="1965960"/>
+            <a:ext cx="4969764" cy="1508760"/>
+          </a:xfrm>
+          <a:prstGeom prst="rect">
+            <a:avLst/>
+          </a:prstGeom>
+          <a:noFill/>
+          <a:ln/>
+        </p:spPr>
+        <p:txBody>
+          <a:bodyPr wrap="square" rtlCol="0" anchor="t"/>
+          <a:lstStyle/>
+          <a:p>
+            <a:pPr algn="l" indent="0" marL="0">
+              <a:lnSpc>
+                <a:spcPct val="112000"/>
+              </a:lnSpc>
+              <a:buNone/>
+            </a:pPr>
+            <a:r>
+              <a:rPr lang="en-US" sz="1800" dirty="0">
+                <a:solidFill>
+                  <a:srgbClr val="6B7480"/>
+                </a:solidFill>
+                <a:latin typeface="Calibri" pitchFamily="34" charset="0"/>
+                <a:ea typeface="Calibri" pitchFamily="34" charset="-122"/>
+                <a:cs typeface="Calibri" pitchFamily="34" charset="-120"/>
+              </a:rPr>
+              <a:t>Without it: a balance goes to −3,000, or a debit/credit mismatch slips through with no error anywhere.</a:t>
+            </a:r>
+            <a:endParaRPr lang="en-US" sz="1800" dirty="0"/>
+          </a:p>
+        </p:txBody>
+      </p:sp>
+      <p:sp>
+        <p:nvSpPr>
+          <p:cNvPr id="13" name="Shape"/>
+          <p:cNvSpPr/>
+          <p:nvPr/>
+        </p:nvSpPr>
+        <p:spPr>
+          <a:xfrm>
+            <a:off x="548640" y="3840480"/>
+            <a:ext cx="5372100" cy="2103120"/>
+          </a:xfrm>
+          <a:prstGeom prst="roundRect">
+            <a:avLst>
+              <a:gd name="adj" fmla="val 3200"/>
+            </a:avLst>
+          </a:prstGeom>
+          <a:solidFill>
+            <a:srgbClr val="FFFFFF"/>
+          </a:solidFill>
+          <a:ln w="22225">
+            <a:solidFill>
+              <a:srgbClr val="E8A33D"/>
+            </a:solidFill>
+            <a:prstDash val="solid"/>
+          </a:ln>
+          <a:effectLst>
+            <a:outerShdw sx="100000" sy="100000" kx="0" ky="0" algn="bl" rotWithShape="0" blurRad="63500" dist="25400" dir="5400000">
+              <a:srgbClr val="1F2429">
+                <a:alpha val="15000"/>
+              </a:srgbClr>
+            </a:outerShdw>
+          </a:effectLst>
+        </p:spPr>
+      </p:sp>
+      <p:sp>
+        <p:nvSpPr>
+          <p:cNvPr id="14" name="Shape"/>
+          <p:cNvSpPr/>
+          <p:nvPr/>
+        </p:nvSpPr>
+        <p:spPr>
+          <a:xfrm>
+            <a:off x="713232" y="3986784"/>
+            <a:ext cx="201168" cy="201168"/>
+          </a:xfrm>
+          <a:prstGeom prst="ellipse">
+            <a:avLst/>
+          </a:prstGeom>
+          <a:solidFill>
+            <a:srgbClr val="E8A33D"/>
+          </a:solidFill>
+          <a:ln/>
+        </p:spPr>
+      </p:sp>
+      <p:sp>
+        <p:nvSpPr>
+          <p:cNvPr id="15" name="Text"/>
+          <p:cNvSpPr txBox="1"/>
+          <p:nvPr/>
+        </p:nvSpPr>
+        <p:spPr>
+          <a:xfrm>
+            <a:off x="1005840" y="3931920"/>
+            <a:ext cx="4732020" cy="365760"/>
+          </a:xfrm>
+          <a:prstGeom prst="rect">
+            <a:avLst/>
+          </a:prstGeom>
+          <a:noFill/>
+          <a:ln/>
+        </p:spPr>
+        <p:txBody>
+          <a:bodyPr wrap="square" rtlCol="0" anchor="t"/>
+          <a:lstStyle/>
+          <a:p>
+            <a:pPr algn="l" indent="0" marL="0">
+              <a:buNone/>
+            </a:pPr>
+            <a:r>
+              <a:rPr lang="en-US" sz="2000" b="1" dirty="0">
+                <a:solidFill>
+                  <a:srgbClr val="1F2429"/>
+                </a:solidFill>
+                <a:latin typeface="Calibri" pitchFamily="34" charset="0"/>
+                <a:ea typeface="Calibri" pitchFamily="34" charset="-122"/>
+                <a:cs typeface="Calibri" pitchFamily="34" charset="-120"/>
+              </a:rPr>
+              <a:t>Isolation</a:t>
+            </a:r>
+            <a:endParaRPr lang="en-US" sz="2000" dirty="0"/>
+          </a:p>
+        </p:txBody>
+      </p:sp>
+      <p:sp>
+        <p:nvSpPr>
+          <p:cNvPr id="16" name="Text"/>
+          <p:cNvSpPr txBox="1"/>
+          <p:nvPr/>
+        </p:nvSpPr>
+        <p:spPr>
+          <a:xfrm>
+            <a:off x="749808" y="4343400"/>
+            <a:ext cx="4969764" cy="1508760"/>
+          </a:xfrm>
+          <a:prstGeom prst="rect">
+            <a:avLst/>
+          </a:prstGeom>
+          <a:noFill/>
+          <a:ln/>
+        </p:spPr>
+        <p:txBody>
+          <a:bodyPr wrap="square" rtlCol="0" anchor="t"/>
+          <a:lstStyle/>
+          <a:p>
+            <a:pPr algn="l" indent="0" marL="0">
+              <a:lnSpc>
+                <a:spcPct val="112000"/>
+              </a:lnSpc>
+              <a:buNone/>
+            </a:pPr>
+            <a:r>
+              <a:rPr lang="en-US" sz="1800" dirty="0">
+                <a:solidFill>
+                  <a:srgbClr val="6B7480"/>
+                </a:solidFill>
+                <a:latin typeface="Calibri" pitchFamily="34" charset="0"/>
+                <a:ea typeface="Calibri" pitchFamily="34" charset="-122"/>
+                <a:cs typeface="Calibri" pitchFamily="34" charset="-120"/>
+              </a:rPr>
+              <a:t>Without it: T2's committed +50 deposit is silently lost — the balance lands on 1100, not 1150.</a:t>
+            </a:r>
+            <a:endParaRPr lang="en-US" sz="1800" dirty="0"/>
+          </a:p>
+        </p:txBody>
+      </p:sp>
+      <p:sp>
+        <p:nvSpPr>
+          <p:cNvPr id="17" name="Shape"/>
+          <p:cNvSpPr/>
+          <p:nvPr/>
+        </p:nvSpPr>
+        <p:spPr>
+          <a:xfrm>
+            <a:off x="6240780" y="3840480"/>
+            <a:ext cx="5372100" cy="2103120"/>
+          </a:xfrm>
+          <a:prstGeom prst="roundRect">
+            <a:avLst>
+              <a:gd name="adj" fmla="val 3200"/>
+            </a:avLst>
+          </a:prstGeom>
+          <a:solidFill>
+            <a:srgbClr val="FFFFFF"/>
+          </a:solidFill>
+          <a:ln w="22225">
+            <a:solidFill>
+              <a:srgbClr val="2FE6C4"/>
+            </a:solidFill>
+            <a:prstDash val="solid"/>
+          </a:ln>
+          <a:effectLst>
+            <a:outerShdw sx="100000" sy="100000" kx="0" ky="0" algn="bl" rotWithShape="0" blurRad="63500" dist="25400" dir="5400000">
+              <a:srgbClr val="1F2429">
+                <a:alpha val="15000"/>
+              </a:srgbClr>
+            </a:outerShdw>
+          </a:effectLst>
+        </p:spPr>
+      </p:sp>
+      <p:sp>
+        <p:nvSpPr>
+          <p:cNvPr id="18" name="Shape"/>
+          <p:cNvSpPr/>
+          <p:nvPr/>
+        </p:nvSpPr>
+        <p:spPr>
+          <a:xfrm>
+            <a:off x="6405372" y="3986784"/>
+            <a:ext cx="201168" cy="201168"/>
+          </a:xfrm>
+          <a:prstGeom prst="ellipse">
+            <a:avLst/>
+          </a:prstGeom>
+          <a:solidFill>
+            <a:srgbClr val="2FE6C4"/>
+          </a:solidFill>
+          <a:ln/>
+        </p:spPr>
+      </p:sp>
+      <p:sp>
+        <p:nvSpPr>
+          <p:cNvPr id="19" name="Text"/>
+          <p:cNvSpPr txBox="1"/>
+          <p:nvPr/>
+        </p:nvSpPr>
+        <p:spPr>
+          <a:xfrm>
+            <a:off x="6697980" y="3931920"/>
+            <a:ext cx="4732020" cy="365760"/>
+          </a:xfrm>
+          <a:prstGeom prst="rect">
+            <a:avLst/>
+          </a:prstGeom>
+          <a:noFill/>
+          <a:ln/>
+        </p:spPr>
+        <p:txBody>
+          <a:bodyPr wrap="square" rtlCol="0" anchor="t"/>
+          <a:lstStyle/>
+          <a:p>
+            <a:pPr algn="l" indent="0" marL="0">
+              <a:buNone/>
+            </a:pPr>
+            <a:r>
+              <a:rPr lang="en-US" sz="2000" b="1" dirty="0">
+                <a:solidFill>
+                  <a:srgbClr val="1F2429"/>
+                </a:solidFill>
+                <a:latin typeface="Calibri" pitchFamily="34" charset="0"/>
+                <a:ea typeface="Calibri" pitchFamily="34" charset="-122"/>
+                <a:cs typeface="Calibri" pitchFamily="34" charset="-120"/>
+              </a:rPr>
+              <a:t>Durability</a:t>
+            </a:r>
+            <a:endParaRPr lang="en-US" sz="2000" dirty="0"/>
+          </a:p>
+        </p:txBody>
+      </p:sp>
+      <p:sp>
+        <p:nvSpPr>
+          <p:cNvPr id="20" name="Text"/>
+          <p:cNvSpPr txBox="1"/>
+          <p:nvPr/>
+        </p:nvSpPr>
+        <p:spPr>
+          <a:xfrm>
+            <a:off x="6441948" y="4343400"/>
+            <a:ext cx="4969764" cy="1508760"/>
+          </a:xfrm>
+          <a:prstGeom prst="rect">
+            <a:avLst/>
+          </a:prstGeom>
+          <a:noFill/>
+          <a:ln/>
+        </p:spPr>
+        <p:txBody>
+          <a:bodyPr wrap="square" rtlCol="0" anchor="t"/>
+          <a:lstStyle/>
+          <a:p>
+            <a:pPr algn="l" indent="0" marL="0">
+              <a:lnSpc>
+                <a:spcPct val="112000"/>
+              </a:lnSpc>
+              <a:buNone/>
+            </a:pPr>
+            <a:r>
+              <a:rPr lang="en-US" sz="1800" dirty="0">
+                <a:solidFill>
+                  <a:srgbClr val="6B7480"/>
+                </a:solidFill>
+                <a:latin typeface="Calibri" pitchFamily="34" charset="0"/>
+                <a:ea typeface="Calibri" pitchFamily="34" charset="-122"/>
+                <a:cs typeface="Calibri" pitchFamily="34" charset="-120"/>
+              </a:rPr>
+              <a:t>Without it: a committed transfer reverts after a crash — even though the customer was told it succeeded.</a:t>
+            </a:r>
+            <a:endParaRPr lang="en-US" sz="1800" dirty="0"/>
           </a:p>
         </p:txBody>
       </p:sp>
@@ -6762,7 +12865,7 @@
               <a:buNone/>
             </a:pPr>
             <a:r>
-              <a:rPr lang="en-US" sz="1500" b="1" dirty="0">
+              <a:rPr lang="en-US" sz="2000" b="1" dirty="0">
                 <a:solidFill>
                   <a:srgbClr val="14181C"/>
                 </a:solidFill>
@@ -6772,7 +12875,7 @@
               </a:rPr>
               <a:t>1</a:t>
             </a:r>
-            <a:endParaRPr lang="en-US" sz="1500" dirty="0"/>
+            <a:endParaRPr lang="en-US" sz="2000" dirty="0"/>
           </a:p>
         </p:txBody>
       </p:sp>
@@ -6801,7 +12904,7 @@
               <a:buNone/>
             </a:pPr>
             <a:r>
-              <a:rPr lang="en-US" sz="1450" dirty="0">
+              <a:rPr lang="en-US" sz="1800" dirty="0">
                 <a:solidFill>
                   <a:srgbClr val="1F2429"/>
                 </a:solidFill>
@@ -6811,7 +12914,7 @@
               </a:rPr>
               <a:t>What is a database transaction?</a:t>
             </a:r>
-            <a:endParaRPr lang="en-US" sz="1450" dirty="0"/>
+            <a:endParaRPr lang="en-US" sz="1800" dirty="0"/>
           </a:p>
         </p:txBody>
       </p:sp>
@@ -6860,7 +12963,7 @@
               <a:buNone/>
             </a:pPr>
             <a:r>
-              <a:rPr lang="en-US" sz="1500" b="1" dirty="0">
+              <a:rPr lang="en-US" sz="2000" b="1" dirty="0">
                 <a:solidFill>
                   <a:srgbClr val="14181C"/>
                 </a:solidFill>
@@ -6870,7 +12973,7 @@
               </a:rPr>
               <a:t>2</a:t>
             </a:r>
-            <a:endParaRPr lang="en-US" sz="1500" dirty="0"/>
+            <a:endParaRPr lang="en-US" sz="2000" dirty="0"/>
           </a:p>
         </p:txBody>
       </p:sp>
@@ -6899,7 +13002,7 @@
               <a:buNone/>
             </a:pPr>
             <a:r>
-              <a:rPr lang="en-US" sz="1450" dirty="0">
+              <a:rPr lang="en-US" sz="1800" dirty="0">
                 <a:solidFill>
                   <a:srgbClr val="1F2429"/>
                 </a:solidFill>
@@ -6909,7 +13012,7 @@
               </a:rPr>
               <a:t>Transaction processing: commit vs. abort</a:t>
             </a:r>
-            <a:endParaRPr lang="en-US" sz="1450" dirty="0"/>
+            <a:endParaRPr lang="en-US" sz="1800" dirty="0"/>
           </a:p>
         </p:txBody>
       </p:sp>
@@ -6958,7 +13061,7 @@
               <a:buNone/>
             </a:pPr>
             <a:r>
-              <a:rPr lang="en-US" sz="1500" b="1" dirty="0">
+              <a:rPr lang="en-US" sz="2000" b="1" dirty="0">
                 <a:solidFill>
                   <a:srgbClr val="14181C"/>
                 </a:solidFill>
@@ -6968,7 +13071,7 @@
               </a:rPr>
               <a:t>3</a:t>
             </a:r>
-            <a:endParaRPr lang="en-US" sz="1500" dirty="0"/>
+            <a:endParaRPr lang="en-US" sz="2000" dirty="0"/>
           </a:p>
         </p:txBody>
       </p:sp>
@@ -6997,7 +13100,7 @@
               <a:buNone/>
             </a:pPr>
             <a:r>
-              <a:rPr lang="en-US" sz="1450" dirty="0">
+              <a:rPr lang="en-US" sz="1800" dirty="0">
                 <a:solidFill>
                   <a:srgbClr val="1F2429"/>
                 </a:solidFill>
@@ -7007,7 +13110,7 @@
               </a:rPr>
               <a:t>Transaction states — the full state diagram</a:t>
             </a:r>
-            <a:endParaRPr lang="en-US" sz="1450" dirty="0"/>
+            <a:endParaRPr lang="en-US" sz="1800" dirty="0"/>
           </a:p>
         </p:txBody>
       </p:sp>
@@ -7056,7 +13159,7 @@
               <a:buNone/>
             </a:pPr>
             <a:r>
-              <a:rPr lang="en-US" sz="1500" b="1" dirty="0">
+              <a:rPr lang="en-US" sz="2000" b="1" dirty="0">
                 <a:solidFill>
                   <a:srgbClr val="14181C"/>
                 </a:solidFill>
@@ -7066,7 +13169,7 @@
               </a:rPr>
               <a:t>4</a:t>
             </a:r>
-            <a:endParaRPr lang="en-US" sz="1500" dirty="0"/>
+            <a:endParaRPr lang="en-US" sz="2000" dirty="0"/>
           </a:p>
         </p:txBody>
       </p:sp>
@@ -7095,7 +13198,7 @@
               <a:buNone/>
             </a:pPr>
             <a:r>
-              <a:rPr lang="en-US" sz="1450" dirty="0">
+              <a:rPr lang="en-US" sz="1800" dirty="0">
                 <a:solidFill>
                   <a:srgbClr val="1F2429"/>
                 </a:solidFill>
@@ -7105,7 +13208,7 @@
               </a:rPr>
               <a:t>The four ACID properties</a:t>
             </a:r>
-            <a:endParaRPr lang="en-US" sz="1450" dirty="0"/>
+            <a:endParaRPr lang="en-US" sz="1800" dirty="0"/>
           </a:p>
         </p:txBody>
       </p:sp>
@@ -7154,7 +13257,7 @@
               <a:buNone/>
             </a:pPr>
             <a:r>
-              <a:rPr lang="en-US" sz="1500" b="1" dirty="0">
+              <a:rPr lang="en-US" sz="2000" b="1" dirty="0">
                 <a:solidFill>
                   <a:srgbClr val="14181C"/>
                 </a:solidFill>
@@ -7164,7 +13267,7 @@
               </a:rPr>
               <a:t>5</a:t>
             </a:r>
-            <a:endParaRPr lang="en-US" sz="1500" dirty="0"/>
+            <a:endParaRPr lang="en-US" sz="2000" dirty="0"/>
           </a:p>
         </p:txBody>
       </p:sp>
@@ -7193,7 +13296,7 @@
               <a:buNone/>
             </a:pPr>
             <a:r>
-              <a:rPr lang="en-US" sz="1450" dirty="0">
+              <a:rPr lang="en-US" sz="1800" dirty="0">
                 <a:solidFill>
                   <a:srgbClr val="1F2429"/>
                 </a:solidFill>
@@ -7201,9 +13304,9 @@
                 <a:ea typeface="Calibri" pitchFamily="34" charset="-122"/>
                 <a:cs typeface="Calibri" pitchFamily="34" charset="-120"/>
               </a:rPr>
-              <a:t>Bank transfer, traced: with and without atomicity</a:t>
-            </a:r>
-            <a:endParaRPr lang="en-US" sz="1450" dirty="0"/>
+              <a:t>Four worked ACID violations: what breaks without each property</a:t>
+            </a:r>
+            <a:endParaRPr lang="en-US" sz="1800" dirty="0"/>
           </a:p>
         </p:txBody>
       </p:sp>
@@ -7252,7 +13355,7 @@
               <a:buNone/>
             </a:pPr>
             <a:r>
-              <a:rPr lang="en-US" sz="1500" b="1" dirty="0">
+              <a:rPr lang="en-US" sz="2000" b="1" dirty="0">
                 <a:solidFill>
                   <a:srgbClr val="14181C"/>
                 </a:solidFill>
@@ -7262,7 +13365,7 @@
               </a:rPr>
               <a:t>6</a:t>
             </a:r>
-            <a:endParaRPr lang="en-US" sz="1500" dirty="0"/>
+            <a:endParaRPr lang="en-US" sz="2000" dirty="0"/>
           </a:p>
         </p:txBody>
       </p:sp>
@@ -7291,7 +13394,7 @@
               <a:buNone/>
             </a:pPr>
             <a:r>
-              <a:rPr lang="en-US" sz="1450" dirty="0">
+              <a:rPr lang="en-US" sz="1800" dirty="0">
                 <a:solidFill>
                   <a:srgbClr val="1F2429"/>
                 </a:solidFill>
@@ -7301,7 +13404,7 @@
               </a:rPr>
               <a:t>Transaction management in the DBMS</a:t>
             </a:r>
-            <a:endParaRPr lang="en-US" sz="1450" dirty="0"/>
+            <a:endParaRPr lang="en-US" sz="1800" dirty="0"/>
           </a:p>
         </p:txBody>
       </p:sp>
@@ -7330,7 +13433,7 @@
               <a:buNone/>
             </a:pPr>
             <a:r>
-              <a:rPr lang="en-US" sz="1000" u="sng" dirty="0">
+              <a:rPr lang="en-US" sz="1200" u="sng" dirty="0">
                 <a:solidFill>
                   <a:srgbClr val="8A939B"/>
                 </a:solidFill>
@@ -7351,7 +13454,7 @@
               <a:buNone/>
             </a:pPr>
             <a:r>
-              <a:rPr lang="en-US" sz="1000" dirty="0">
+              <a:rPr lang="en-US" sz="1200" dirty="0">
                 <a:solidFill>
                   <a:srgbClr val="8A939B"/>
                 </a:solidFill>
@@ -7361,7 +13464,7 @@
               </a:rPr>
               <a:t>  ·  2</a:t>
             </a:r>
-            <a:endParaRPr lang="en-US" sz="1000" dirty="0"/>
+            <a:endParaRPr lang="en-US" sz="1200" dirty="0"/>
           </a:p>
         </p:txBody>
       </p:sp>
@@ -7500,7 +13603,7 @@
               <a:buNone/>
             </a:pPr>
             <a:r>
-              <a:rPr lang="en-US" sz="1000" u="sng" dirty="0">
+              <a:rPr lang="en-US" sz="1200" u="sng" dirty="0">
                 <a:solidFill>
                   <a:srgbClr val="8A939B"/>
                 </a:solidFill>
@@ -7521,7 +13624,7 @@
               <a:buNone/>
             </a:pPr>
             <a:r>
-              <a:rPr lang="en-US" sz="1000" dirty="0">
+              <a:rPr lang="en-US" sz="1200" dirty="0">
                 <a:solidFill>
                   <a:srgbClr val="8A939B"/>
                 </a:solidFill>
@@ -7531,7 +13634,7 @@
               </a:rPr>
               <a:t>  ·  3</a:t>
             </a:r>
-            <a:endParaRPr lang="en-US" sz="1000" dirty="0"/>
+            <a:endParaRPr lang="en-US" sz="1200" dirty="0"/>
           </a:p>
         </p:txBody>
       </p:sp>
@@ -7563,7 +13666,7 @@
               <a:buNone/>
             </a:pPr>
             <a:r>
-              <a:rPr lang="en-US" sz="1450" dirty="0">
+              <a:rPr lang="en-US" sz="1800" dirty="0">
                 <a:solidFill>
                   <a:srgbClr val="1F2429"/>
                 </a:solidFill>
@@ -7580,7 +13683,7 @@
               <a:buNone/>
             </a:pPr>
             <a:r>
-              <a:rPr lang="en-US" sz="1450" b="1" dirty="0">
+              <a:rPr lang="en-US" sz="1800" b="1" dirty="0">
                 <a:solidFill>
                   <a:srgbClr val="8B7FD9"/>
                 </a:solidFill>
@@ -7597,7 +13700,7 @@
               <a:buNone/>
             </a:pPr>
             <a:r>
-              <a:rPr lang="en-US" sz="1450" dirty="0">
+              <a:rPr lang="en-US" sz="1800" dirty="0">
                 <a:solidFill>
                   <a:srgbClr val="1F2429"/>
                 </a:solidFill>
@@ -7607,7 +13710,7 @@
               </a:rPr>
               <a:t> is a logical unit of work — one or more read/write operations that must be treated as a single, indivisible action. Either every operation completes and is recorded permanently, or none of them are.</a:t>
             </a:r>
-            <a:endParaRPr lang="en-US" sz="1450" dirty="0"/>
+            <a:endParaRPr lang="en-US" sz="1800" dirty="0"/>
           </a:p>
         </p:txBody>
       </p:sp>
@@ -7636,7 +13739,7 @@
               <a:buNone/>
             </a:pPr>
             <a:r>
-              <a:rPr lang="en-US" sz="1300" i="1" dirty="0">
+              <a:rPr lang="en-US" sz="1800" i="1" dirty="0">
                 <a:solidFill>
                   <a:srgbClr val="6B7480"/>
                 </a:solidFill>
@@ -7646,7 +13749,7 @@
               </a:rPr>
               <a:t>There is no valid outcome where the database ends up “half-updated.”</a:t>
             </a:r>
-            <a:endParaRPr lang="en-US" sz="1300" dirty="0"/>
+            <a:endParaRPr lang="en-US" sz="1800" dirty="0"/>
           </a:p>
         </p:txBody>
       </p:sp>
@@ -7659,7 +13762,7 @@
         <p:spPr>
           <a:xfrm>
             <a:off x="6583680" y="1371600"/>
-            <a:ext cx="5029200" cy="3657600"/>
+            <a:ext cx="5029200" cy="4480560"/>
           </a:xfrm>
           <a:prstGeom prst="roundRect">
             <a:avLst>
@@ -7697,7 +13800,7 @@
               <a:buNone/>
             </a:pPr>
             <a:r>
-              <a:rPr lang="en-US" sz="1100" b="1" spc="100" kern="0" dirty="0">
+              <a:rPr lang="en-US" sz="2000" b="1" spc="100" kern="0" dirty="0">
                 <a:solidFill>
                   <a:srgbClr val="2FE6C4"/>
                 </a:solidFill>
@@ -7707,7 +13810,7 @@
               </a:rPr>
               <a:t>PKR 10,000 TRANSFER: A101 → A205</a:t>
             </a:r>
-            <a:endParaRPr lang="en-US" sz="1100" dirty="0"/>
+            <a:endParaRPr lang="en-US" sz="2000" dirty="0"/>
           </a:p>
         </p:txBody>
       </p:sp>
@@ -7720,7 +13823,7 @@
         <p:spPr>
           <a:xfrm>
             <a:off x="6858000" y="1965960"/>
-            <a:ext cx="4480560" cy="2834640"/>
+            <a:ext cx="4480560" cy="3840000"/>
           </a:xfrm>
           <a:prstGeom prst="rect">
             <a:avLst/>
@@ -7739,7 +13842,7 @@
               <a:buNone/>
             </a:pPr>
             <a:r>
-              <a:rPr lang="en-US" sz="1250" dirty="0">
+              <a:rPr lang="en-US" sz="1800" dirty="0">
                 <a:solidFill>
                   <a:srgbClr val="FFFFFF"/>
                 </a:solidFill>
@@ -7749,7 +13852,7 @@
               </a:rPr>
               <a:t>BEGIN TRANSACTION;</a:t>
             </a:r>
-            <a:endParaRPr lang="en-US" sz="1250" dirty="0"/>
+            <a:endParaRPr lang="en-US" sz="1800" dirty="0"/>
           </a:p>
           <a:p>
             <a:pPr indent="0" marL="0">
@@ -7758,7 +13861,7 @@
               </a:lnSpc>
               <a:buNone/>
             </a:pPr>
-            <a:endParaRPr lang="en-US" sz="1250" dirty="0"/>
+            <a:endParaRPr lang="en-US" sz="1800" dirty="0"/>
           </a:p>
           <a:p>
             <a:pPr indent="0" marL="0">
@@ -7768,7 +13871,7 @@
               <a:buNone/>
             </a:pPr>
             <a:r>
-              <a:rPr lang="en-US" sz="1250" dirty="0">
+              <a:rPr lang="en-US" sz="1800" dirty="0">
                 <a:solidFill>
                   <a:srgbClr val="FFFFFF"/>
                 </a:solidFill>
@@ -7778,7 +13881,7 @@
               </a:rPr>
               <a:t>  UPDATE Account</a:t>
             </a:r>
-            <a:endParaRPr lang="en-US" sz="1250" dirty="0"/>
+            <a:endParaRPr lang="en-US" sz="1800" dirty="0"/>
           </a:p>
           <a:p>
             <a:pPr indent="0" marL="0">
@@ -7788,7 +13891,7 @@
               <a:buNone/>
             </a:pPr>
             <a:r>
-              <a:rPr lang="en-US" sz="1250" dirty="0">
+              <a:rPr lang="en-US" sz="1800" dirty="0">
                 <a:solidFill>
                   <a:srgbClr val="FFFFFF"/>
                 </a:solidFill>
@@ -7798,7 +13901,7 @@
               </a:rPr>
               <a:t>  SET balance = balance - 10000</a:t>
             </a:r>
-            <a:endParaRPr lang="en-US" sz="1250" dirty="0"/>
+            <a:endParaRPr lang="en-US" sz="1800" dirty="0"/>
           </a:p>
           <a:p>
             <a:pPr indent="0" marL="0">
@@ -7808,7 +13911,7 @@
               <a:buNone/>
             </a:pPr>
             <a:r>
-              <a:rPr lang="en-US" sz="1250" dirty="0">
+              <a:rPr lang="en-US" sz="1800" dirty="0">
                 <a:solidFill>
                   <a:srgbClr val="FFFFFF"/>
                 </a:solidFill>
@@ -7818,7 +13921,7 @@
               </a:rPr>
               <a:t>  WHERE accountNo = 'A101';</a:t>
             </a:r>
-            <a:endParaRPr lang="en-US" sz="1250" dirty="0"/>
+            <a:endParaRPr lang="en-US" sz="1800" dirty="0"/>
           </a:p>
           <a:p>
             <a:pPr indent="0" marL="0">
@@ -7827,7 +13930,7 @@
               </a:lnSpc>
               <a:buNone/>
             </a:pPr>
-            <a:endParaRPr lang="en-US" sz="1250" dirty="0"/>
+            <a:endParaRPr lang="en-US" sz="1800" dirty="0"/>
           </a:p>
           <a:p>
             <a:pPr indent="0" marL="0">
@@ -7837,7 +13940,7 @@
               <a:buNone/>
             </a:pPr>
             <a:r>
-              <a:rPr lang="en-US" sz="1250" dirty="0">
+              <a:rPr lang="en-US" sz="1800" dirty="0">
                 <a:solidFill>
                   <a:srgbClr val="FFFFFF"/>
                 </a:solidFill>
@@ -7847,7 +13950,7 @@
               </a:rPr>
               <a:t>  UPDATE Account</a:t>
             </a:r>
-            <a:endParaRPr lang="en-US" sz="1250" dirty="0"/>
+            <a:endParaRPr lang="en-US" sz="1800" dirty="0"/>
           </a:p>
           <a:p>
             <a:pPr indent="0" marL="0">
@@ -7857,7 +13960,7 @@
               <a:buNone/>
             </a:pPr>
             <a:r>
-              <a:rPr lang="en-US" sz="1250" dirty="0">
+              <a:rPr lang="en-US" sz="1800" dirty="0">
                 <a:solidFill>
                   <a:srgbClr val="FFFFFF"/>
                 </a:solidFill>
@@ -7867,7 +13970,7 @@
               </a:rPr>
               <a:t>  SET balance = balance + 10000</a:t>
             </a:r>
-            <a:endParaRPr lang="en-US" sz="1250" dirty="0"/>
+            <a:endParaRPr lang="en-US" sz="1800" dirty="0"/>
           </a:p>
           <a:p>
             <a:pPr indent="0" marL="0">
@@ -7877,7 +13980,7 @@
               <a:buNone/>
             </a:pPr>
             <a:r>
-              <a:rPr lang="en-US" sz="1250" dirty="0">
+              <a:rPr lang="en-US" sz="1800" dirty="0">
                 <a:solidFill>
                   <a:srgbClr val="FFFFFF"/>
                 </a:solidFill>
@@ -7887,7 +13990,7 @@
               </a:rPr>
               <a:t>  WHERE accountNo = 'A205';</a:t>
             </a:r>
-            <a:endParaRPr lang="en-US" sz="1250" dirty="0"/>
+            <a:endParaRPr lang="en-US" sz="1800" dirty="0"/>
           </a:p>
           <a:p>
             <a:pPr indent="0" marL="0">
@@ -7896,7 +13999,7 @@
               </a:lnSpc>
               <a:buNone/>
             </a:pPr>
-            <a:endParaRPr lang="en-US" sz="1250" dirty="0"/>
+            <a:endParaRPr lang="en-US" sz="1800" dirty="0"/>
           </a:p>
           <a:p>
             <a:pPr indent="0" marL="0">
@@ -7906,7 +14009,7 @@
               <a:buNone/>
             </a:pPr>
             <a:r>
-              <a:rPr lang="en-US" sz="1250" dirty="0">
+              <a:rPr lang="en-US" sz="1800" dirty="0">
                 <a:solidFill>
                   <a:srgbClr val="FFFFFF"/>
                 </a:solidFill>
@@ -7916,7 +14019,7 @@
               </a:rPr>
               <a:t>COMMIT;</a:t>
             </a:r>
-            <a:endParaRPr lang="en-US" sz="1250" dirty="0"/>
+            <a:endParaRPr lang="en-US" sz="1800" dirty="0"/>
           </a:p>
         </p:txBody>
       </p:sp>
@@ -8055,7 +14158,7 @@
               <a:buNone/>
             </a:pPr>
             <a:r>
-              <a:rPr lang="en-US" sz="1000" u="sng" dirty="0">
+              <a:rPr lang="en-US" sz="1200" u="sng" dirty="0">
                 <a:solidFill>
                   <a:srgbClr val="8A939B"/>
                 </a:solidFill>
@@ -8076,7 +14179,7 @@
               <a:buNone/>
             </a:pPr>
             <a:r>
-              <a:rPr lang="en-US" sz="1000" dirty="0">
+              <a:rPr lang="en-US" sz="1200" dirty="0">
                 <a:solidFill>
                   <a:srgbClr val="8A939B"/>
                 </a:solidFill>
@@ -8086,7 +14189,7 @@
               </a:rPr>
               <a:t>  ·  4</a:t>
             </a:r>
-            <a:endParaRPr lang="en-US" sz="1000" dirty="0"/>
+            <a:endParaRPr lang="en-US" sz="1200" dirty="0"/>
           </a:p>
         </p:txBody>
       </p:sp>
@@ -8118,7 +14221,7 @@
               <a:buNone/>
             </a:pPr>
             <a:r>
-              <a:rPr lang="en-US" sz="1450" dirty="0">
+              <a:rPr lang="en-US" sz="1800" dirty="0">
                 <a:solidFill>
                   <a:srgbClr val="1F2429"/>
                 </a:solidFill>
@@ -8128,7 +14231,7 @@
               </a:rPr>
               <a:t>Transaction processing guarantees that each transaction's effect on the database is exactly as if it had run alone — even with hundreds of others executing at the same instant, and even if hardware fails mid-transaction.</a:t>
             </a:r>
-            <a:endParaRPr lang="en-US" sz="1450" dirty="0"/>
+            <a:endParaRPr lang="en-US" sz="1800" dirty="0"/>
           </a:p>
         </p:txBody>
       </p:sp>
@@ -8211,7 +14314,7 @@
               <a:buNone/>
             </a:pPr>
             <a:r>
-              <a:rPr lang="en-US" sz="1350" b="1" dirty="0">
+              <a:rPr lang="en-US" sz="2000" b="1" dirty="0">
                 <a:solidFill>
                   <a:srgbClr val="1F2429"/>
                 </a:solidFill>
@@ -8221,7 +14324,7 @@
               </a:rPr>
               <a:t>Commit</a:t>
             </a:r>
-            <a:endParaRPr lang="en-US" sz="1350" dirty="0"/>
+            <a:endParaRPr lang="en-US" sz="2000" dirty="0"/>
           </a:p>
         </p:txBody>
       </p:sp>
@@ -8253,7 +14356,7 @@
               <a:buNone/>
             </a:pPr>
             <a:r>
-              <a:rPr lang="en-US" sz="1050" dirty="0">
+              <a:rPr lang="en-US" sz="1800" dirty="0">
                 <a:solidFill>
                   <a:srgbClr val="6B7480"/>
                 </a:solidFill>
@@ -8263,7 +14366,7 @@
               </a:rPr>
               <a:t>Every operation succeeded. The DBMS makes all of the transaction's changes permanent.</a:t>
             </a:r>
-            <a:endParaRPr lang="en-US" sz="1050" dirty="0"/>
+            <a:endParaRPr lang="en-US" sz="1800" dirty="0"/>
           </a:p>
         </p:txBody>
       </p:sp>
@@ -8346,7 +14449,7 @@
               <a:buNone/>
             </a:pPr>
             <a:r>
-              <a:rPr lang="en-US" sz="1350" b="1" dirty="0">
+              <a:rPr lang="en-US" sz="2000" b="1" dirty="0">
                 <a:solidFill>
                   <a:srgbClr val="1F2429"/>
                 </a:solidFill>
@@ -8356,7 +14459,7 @@
               </a:rPr>
               <a:t>Abort (Rollback)</a:t>
             </a:r>
-            <a:endParaRPr lang="en-US" sz="1350" dirty="0"/>
+            <a:endParaRPr lang="en-US" sz="2000" dirty="0"/>
           </a:p>
         </p:txBody>
       </p:sp>
@@ -8388,7 +14491,7 @@
               <a:buNone/>
             </a:pPr>
             <a:r>
-              <a:rPr lang="en-US" sz="1050" dirty="0">
+              <a:rPr lang="en-US" sz="1800" dirty="0">
                 <a:solidFill>
                   <a:srgbClr val="6B7480"/>
                 </a:solidFill>
@@ -8398,7 +14501,7 @@
               </a:rPr>
               <a:t>Something prevented completion. The DBMS undoes any partial changes, returning the database to its pre-transaction state.</a:t>
             </a:r>
-            <a:endParaRPr lang="en-US" sz="1050" dirty="0"/>
+            <a:endParaRPr lang="en-US" sz="1800" dirty="0"/>
           </a:p>
         </p:txBody>
       </p:sp>
@@ -8537,7 +14640,7 @@
               <a:buNone/>
             </a:pPr>
             <a:r>
-              <a:rPr lang="en-US" sz="1000" u="sng" dirty="0">
+              <a:rPr lang="en-US" sz="1200" u="sng" dirty="0">
                 <a:solidFill>
                   <a:srgbClr val="8A939B"/>
                 </a:solidFill>
@@ -8558,7 +14661,7 @@
               <a:buNone/>
             </a:pPr>
             <a:r>
-              <a:rPr lang="en-US" sz="1000" dirty="0">
+              <a:rPr lang="en-US" sz="1200" dirty="0">
                 <a:solidFill>
                   <a:srgbClr val="8A939B"/>
                 </a:solidFill>
@@ -8568,7 +14671,7 @@
               </a:rPr>
               <a:t>  ·  5</a:t>
             </a:r>
-            <a:endParaRPr lang="en-US" sz="1000" dirty="0"/>
+            <a:endParaRPr lang="en-US" sz="1200" dirty="0"/>
           </a:p>
         </p:txBody>
       </p:sp>
@@ -8651,7 +14754,7 @@
               <a:buNone/>
             </a:pPr>
             <a:r>
-              <a:rPr lang="en-US" sz="1350" b="1" dirty="0">
+              <a:rPr lang="en-US" sz="2000" b="1" dirty="0">
                 <a:solidFill>
                   <a:srgbClr val="1F2429"/>
                 </a:solidFill>
@@ -8661,7 +14764,7 @@
               </a:rPr>
               <a:t>Active</a:t>
             </a:r>
-            <a:endParaRPr lang="en-US" sz="1350" dirty="0"/>
+            <a:endParaRPr lang="en-US" sz="2000" dirty="0"/>
           </a:p>
         </p:txBody>
       </p:sp>
@@ -8693,7 +14796,7 @@
               <a:buNone/>
             </a:pPr>
             <a:r>
-              <a:rPr lang="en-US" sz="1050" dirty="0">
+              <a:rPr lang="en-US" sz="1800" dirty="0">
                 <a:solidFill>
                   <a:srgbClr val="6B7480"/>
                 </a:solidFill>
@@ -8703,7 +14806,7 @@
               </a:rPr>
               <a:t>Executing its read/write operations.</a:t>
             </a:r>
-            <a:endParaRPr lang="en-US" sz="1050" dirty="0"/>
+            <a:endParaRPr lang="en-US" sz="1800" dirty="0"/>
           </a:p>
         </p:txBody>
       </p:sp>
@@ -8810,7 +14913,7 @@
               <a:buNone/>
             </a:pPr>
             <a:r>
-              <a:rPr lang="en-US" sz="1350" b="1" dirty="0">
+              <a:rPr lang="en-US" sz="2000" b="1" dirty="0">
                 <a:solidFill>
                   <a:srgbClr val="1F2429"/>
                 </a:solidFill>
@@ -8820,7 +14923,7 @@
               </a:rPr>
               <a:t>Partially Committed</a:t>
             </a:r>
-            <a:endParaRPr lang="en-US" sz="1350" dirty="0"/>
+            <a:endParaRPr lang="en-US" sz="2000" dirty="0"/>
           </a:p>
         </p:txBody>
       </p:sp>
@@ -8852,7 +14955,7 @@
               <a:buNone/>
             </a:pPr>
             <a:r>
-              <a:rPr lang="en-US" sz="1050" dirty="0">
+              <a:rPr lang="en-US" sz="1800" dirty="0">
                 <a:solidFill>
                   <a:srgbClr val="6B7480"/>
                 </a:solidFill>
@@ -8862,7 +14965,7 @@
               </a:rPr>
               <a:t>Final operation executed; not yet made durable.</a:t>
             </a:r>
-            <a:endParaRPr lang="en-US" sz="1050" dirty="0"/>
+            <a:endParaRPr lang="en-US" sz="1800" dirty="0"/>
           </a:p>
         </p:txBody>
       </p:sp>
@@ -8969,7 +15072,7 @@
               <a:buNone/>
             </a:pPr>
             <a:r>
-              <a:rPr lang="en-US" sz="1350" b="1" dirty="0">
+              <a:rPr lang="en-US" sz="2000" b="1" dirty="0">
                 <a:solidFill>
                   <a:srgbClr val="1F2429"/>
                 </a:solidFill>
@@ -8979,7 +15082,7 @@
               </a:rPr>
               <a:t>Committed</a:t>
             </a:r>
-            <a:endParaRPr lang="en-US" sz="1350" dirty="0"/>
+            <a:endParaRPr lang="en-US" sz="2000" dirty="0"/>
           </a:p>
         </p:txBody>
       </p:sp>
@@ -9011,7 +15114,7 @@
               <a:buNone/>
             </a:pPr>
             <a:r>
-              <a:rPr lang="en-US" sz="1050" dirty="0">
+              <a:rPr lang="en-US" sz="1800" dirty="0">
                 <a:solidFill>
                   <a:srgbClr val="6B7480"/>
                 </a:solidFill>
@@ -9021,7 +15124,7 @@
               </a:rPr>
               <a:t>Effects permanently recorded — durable, visible to others.</a:t>
             </a:r>
-            <a:endParaRPr lang="en-US" sz="1050" dirty="0"/>
+            <a:endParaRPr lang="en-US" sz="1800" dirty="0"/>
           </a:p>
         </p:txBody>
       </p:sp>
@@ -9053,7 +15156,7 @@
               <a:buNone/>
             </a:pPr>
             <a:r>
-              <a:rPr lang="en-US" sz="1400" b="1" dirty="0">
+              <a:rPr lang="en-US" sz="1800" b="1" dirty="0">
                 <a:solidFill>
                   <a:srgbClr val="1F2429"/>
                 </a:solidFill>
@@ -9070,7 +15173,7 @@
               <a:buNone/>
             </a:pPr>
             <a:r>
-              <a:rPr lang="en-US" sz="1400" dirty="0">
+              <a:rPr lang="en-US" sz="1800" dirty="0">
                 <a:solidFill>
                   <a:srgbClr val="1F2429"/>
                 </a:solidFill>
@@ -9080,7 +15183,7 @@
               </a:rPr>
               <a:t>Once a transaction commits, nothing — not even a later crash — is allowed to undo it. That guarantee is Durability.</a:t>
             </a:r>
-            <a:endParaRPr lang="en-US" sz="1400" dirty="0"/>
+            <a:endParaRPr lang="en-US" sz="1800" dirty="0"/>
           </a:p>
         </p:txBody>
       </p:sp>
@@ -9219,7 +15322,7 @@
               <a:buNone/>
             </a:pPr>
             <a:r>
-              <a:rPr lang="en-US" sz="1000" u="sng" dirty="0">
+              <a:rPr lang="en-US" sz="1200" u="sng" dirty="0">
                 <a:solidFill>
                   <a:srgbClr val="8A939B"/>
                 </a:solidFill>
@@ -9240,7 +15343,7 @@
               <a:buNone/>
             </a:pPr>
             <a:r>
-              <a:rPr lang="en-US" sz="1000" dirty="0">
+              <a:rPr lang="en-US" sz="1200" dirty="0">
                 <a:solidFill>
                   <a:srgbClr val="8A939B"/>
                 </a:solidFill>
@@ -9250,7 +15353,7 @@
               </a:rPr>
               <a:t>  ·  6</a:t>
             </a:r>
-            <a:endParaRPr lang="en-US" sz="1000" dirty="0"/>
+            <a:endParaRPr lang="en-US" sz="1200" dirty="0"/>
           </a:p>
         </p:txBody>
       </p:sp>
@@ -9262,8 +15365,8 @@
         </p:nvSpPr>
         <p:spPr>
           <a:xfrm>
-            <a:off x="548640" y="1554480"/>
-            <a:ext cx="3413760" cy="1737360"/>
+            <a:off x="548640" y="1371600"/>
+            <a:ext cx="3413760" cy="2103120"/>
           </a:xfrm>
           <a:prstGeom prst="roundRect">
             <a:avLst>
@@ -9296,7 +15399,7 @@
         </p:nvSpPr>
         <p:spPr>
           <a:xfrm>
-            <a:off x="694944" y="1682496"/>
+            <a:off x="694944" y="1499616"/>
             <a:ext cx="310896" cy="91440"/>
           </a:xfrm>
           <a:prstGeom prst="rect">
@@ -9316,7 +15419,7 @@
         </p:nvSpPr>
         <p:spPr>
           <a:xfrm>
-            <a:off x="694944" y="1828800"/>
+            <a:off x="694944" y="1645920"/>
             <a:ext cx="3121152" cy="694944"/>
           </a:xfrm>
           <a:prstGeom prst="rect">
@@ -9333,7 +15436,7 @@
               <a:buNone/>
             </a:pPr>
             <a:r>
-              <a:rPr lang="en-US" sz="1350" b="1" dirty="0">
+              <a:rPr lang="en-US" sz="2000" b="1" dirty="0">
                 <a:solidFill>
                   <a:srgbClr val="1F2429"/>
                 </a:solidFill>
@@ -9343,7 +15446,7 @@
               </a:rPr>
               <a:t>Active</a:t>
             </a:r>
-            <a:endParaRPr lang="en-US" sz="1350" dirty="0"/>
+            <a:endParaRPr lang="en-US" sz="2000" dirty="0"/>
           </a:p>
         </p:txBody>
       </p:sp>
@@ -9355,7 +15458,7 @@
         </p:nvSpPr>
         <p:spPr>
           <a:xfrm>
-            <a:off x="694944" y="2488997"/>
+            <a:off x="694944" y="2306117"/>
             <a:ext cx="3121152" cy="693115"/>
           </a:xfrm>
           <a:prstGeom prst="rect">
@@ -9375,7 +15478,7 @@
               <a:buNone/>
             </a:pPr>
             <a:r>
-              <a:rPr lang="en-US" sz="1050" dirty="0">
+              <a:rPr lang="en-US" sz="1800" dirty="0">
                 <a:solidFill>
                   <a:srgbClr val="6B7480"/>
                 </a:solidFill>
@@ -9385,7 +15488,7 @@
               </a:rPr>
               <a:t>Executing its read/write operations.</a:t>
             </a:r>
-            <a:endParaRPr lang="en-US" sz="1050" dirty="0"/>
+            <a:endParaRPr lang="en-US" sz="1800" dirty="0"/>
           </a:p>
         </p:txBody>
       </p:sp>
@@ -9421,8 +15524,8 @@
         </p:nvSpPr>
         <p:spPr>
           <a:xfrm>
-            <a:off x="4373880" y="1554480"/>
-            <a:ext cx="3413760" cy="1737360"/>
+            <a:off x="4373880" y="1371600"/>
+            <a:ext cx="3413760" cy="2103120"/>
           </a:xfrm>
           <a:prstGeom prst="roundRect">
             <a:avLst>
@@ -9455,7 +15558,7 @@
         </p:nvSpPr>
         <p:spPr>
           <a:xfrm>
-            <a:off x="4520184" y="1682496"/>
+            <a:off x="4520184" y="1499616"/>
             <a:ext cx="310896" cy="91440"/>
           </a:xfrm>
           <a:prstGeom prst="rect">
@@ -9475,7 +15578,7 @@
         </p:nvSpPr>
         <p:spPr>
           <a:xfrm>
-            <a:off x="4520184" y="1828800"/>
+            <a:off x="4520184" y="1645920"/>
             <a:ext cx="3121152" cy="694944"/>
           </a:xfrm>
           <a:prstGeom prst="rect">
@@ -9492,7 +15595,7 @@
               <a:buNone/>
             </a:pPr>
             <a:r>
-              <a:rPr lang="en-US" sz="1350" b="1" dirty="0">
+              <a:rPr lang="en-US" sz="2000" b="1" dirty="0">
                 <a:solidFill>
                   <a:srgbClr val="1F2429"/>
                 </a:solidFill>
@@ -9502,7 +15605,7 @@
               </a:rPr>
               <a:t>Failed</a:t>
             </a:r>
-            <a:endParaRPr lang="en-US" sz="1350" dirty="0"/>
+            <a:endParaRPr lang="en-US" sz="2000" dirty="0"/>
           </a:p>
         </p:txBody>
       </p:sp>
@@ -9514,7 +15617,7 @@
         </p:nvSpPr>
         <p:spPr>
           <a:xfrm>
-            <a:off x="4520184" y="2488997"/>
+            <a:off x="4520184" y="2306117"/>
             <a:ext cx="3121152" cy="693115"/>
           </a:xfrm>
           <a:prstGeom prst="rect">
@@ -9534,7 +15637,7 @@
               <a:buNone/>
             </a:pPr>
             <a:r>
-              <a:rPr lang="en-US" sz="1050" dirty="0">
+              <a:rPr lang="en-US" sz="1800" dirty="0">
                 <a:solidFill>
                   <a:srgbClr val="6B7480"/>
                 </a:solidFill>
@@ -9544,7 +15647,7 @@
               </a:rPr>
               <a:t>Normal execution can no longer proceed — constraint violation, deadlock, or crash.</a:t>
             </a:r>
-            <a:endParaRPr lang="en-US" sz="1050" dirty="0"/>
+            <a:endParaRPr lang="en-US" sz="1800" dirty="0"/>
           </a:p>
         </p:txBody>
       </p:sp>
@@ -9580,8 +15683,8 @@
         </p:nvSpPr>
         <p:spPr>
           <a:xfrm>
-            <a:off x="8199120" y="1554480"/>
-            <a:ext cx="3413760" cy="1737360"/>
+            <a:off x="8199120" y="1371600"/>
+            <a:ext cx="3413760" cy="2103120"/>
           </a:xfrm>
           <a:prstGeom prst="roundRect">
             <a:avLst>
@@ -9614,7 +15717,7 @@
         </p:nvSpPr>
         <p:spPr>
           <a:xfrm>
-            <a:off x="8345424" y="1682496"/>
+            <a:off x="8345424" y="1499616"/>
             <a:ext cx="310896" cy="91440"/>
           </a:xfrm>
           <a:prstGeom prst="rect">
@@ -9634,7 +15737,7 @@
         </p:nvSpPr>
         <p:spPr>
           <a:xfrm>
-            <a:off x="8345424" y="1828800"/>
+            <a:off x="8345424" y="1645920"/>
             <a:ext cx="3121152" cy="694944"/>
           </a:xfrm>
           <a:prstGeom prst="rect">
@@ -9651,7 +15754,7 @@
               <a:buNone/>
             </a:pPr>
             <a:r>
-              <a:rPr lang="en-US" sz="1350" b="1" dirty="0">
+              <a:rPr lang="en-US" sz="2000" b="1" dirty="0">
                 <a:solidFill>
                   <a:srgbClr val="1F2429"/>
                 </a:solidFill>
@@ -9661,7 +15764,7 @@
               </a:rPr>
               <a:t>Aborted (Terminated)</a:t>
             </a:r>
-            <a:endParaRPr lang="en-US" sz="1350" dirty="0"/>
+            <a:endParaRPr lang="en-US" sz="2000" dirty="0"/>
           </a:p>
         </p:txBody>
       </p:sp>
@@ -9673,7 +15776,7 @@
         </p:nvSpPr>
         <p:spPr>
           <a:xfrm>
-            <a:off x="8345424" y="2488997"/>
+            <a:off x="8345424" y="2306117"/>
             <a:ext cx="3121152" cy="693115"/>
           </a:xfrm>
           <a:prstGeom prst="rect">
@@ -9693,7 +15796,7 @@
               <a:buNone/>
             </a:pPr>
             <a:r>
-              <a:rPr lang="en-US" sz="1050" dirty="0">
+              <a:rPr lang="en-US" sz="1800" dirty="0">
                 <a:solidFill>
                   <a:srgbClr val="6B7480"/>
                 </a:solidFill>
@@ -9703,7 +15806,7 @@
               </a:rPr>
               <a:t>DBMS has rolled back every effect; database restored to its pre-transaction state.</a:t>
             </a:r>
-            <a:endParaRPr lang="en-US" sz="1050" dirty="0"/>
+            <a:endParaRPr lang="en-US" sz="1800" dirty="0"/>
           </a:p>
         </p:txBody>
       </p:sp>
@@ -9735,7 +15838,7 @@
               <a:buNone/>
             </a:pPr>
             <a:r>
-              <a:rPr lang="en-US" sz="1350" b="1" dirty="0">
+              <a:rPr lang="en-US" sz="1800" b="1" dirty="0">
                 <a:solidFill>
                   <a:srgbClr val="8B7FD9"/>
                 </a:solidFill>
@@ -9752,7 +15855,7 @@
               <a:buNone/>
             </a:pPr>
             <a:r>
-              <a:rPr lang="en-US" sz="1350" dirty="0">
+              <a:rPr lang="en-US" sz="1800" dirty="0">
                 <a:solidFill>
                   <a:srgbClr val="1F2429"/>
                 </a:solidFill>
@@ -9762,7 +15865,7 @@
               </a:rPr>
               <a:t>Partially Committed can also transition to Failed — if the DBMS discovers, while finalizing, that it cannot guarantee durability, it moves to Failed and then Aborted instead.</a:t>
             </a:r>
-            <a:endParaRPr lang="en-US" sz="1350" dirty="0"/>
+            <a:endParaRPr lang="en-US" sz="1800" dirty="0"/>
           </a:p>
         </p:txBody>
       </p:sp>
@@ -9901,7 +16004,7 @@
               <a:buNone/>
             </a:pPr>
             <a:r>
-              <a:rPr lang="en-US" sz="1000" u="sng" dirty="0">
+              <a:rPr lang="en-US" sz="1200" u="sng" dirty="0">
                 <a:solidFill>
                   <a:srgbClr val="8A939B"/>
                 </a:solidFill>
@@ -9922,7 +16025,7 @@
               <a:buNone/>
             </a:pPr>
             <a:r>
-              <a:rPr lang="en-US" sz="1000" dirty="0">
+              <a:rPr lang="en-US" sz="1200" dirty="0">
                 <a:solidFill>
                   <a:srgbClr val="8A939B"/>
                 </a:solidFill>
@@ -9932,7 +16035,7 @@
               </a:rPr>
               <a:t>  ·  7</a:t>
             </a:r>
-            <a:endParaRPr lang="en-US" sz="1000" dirty="0"/>
+            <a:endParaRPr lang="en-US" sz="1200" dirty="0"/>
           </a:p>
         </p:txBody>
       </p:sp>
@@ -10015,7 +16118,7 @@
               <a:buNone/>
             </a:pPr>
             <a:r>
-              <a:rPr lang="en-US" sz="1350" b="1" dirty="0">
+              <a:rPr lang="en-US" sz="2000" b="1" dirty="0">
                 <a:solidFill>
                   <a:srgbClr val="1F2429"/>
                 </a:solidFill>
@@ -10025,7 +16128,7 @@
               </a:rPr>
               <a:t>Atomicity</a:t>
             </a:r>
-            <a:endParaRPr lang="en-US" sz="1350" dirty="0"/>
+            <a:endParaRPr lang="en-US" sz="2000" dirty="0"/>
           </a:p>
         </p:txBody>
       </p:sp>
@@ -10057,7 +16160,7 @@
               <a:buNone/>
             </a:pPr>
             <a:r>
-              <a:rPr lang="en-US" sz="1050" dirty="0">
+              <a:rPr lang="en-US" sz="1800" dirty="0">
                 <a:solidFill>
                   <a:srgbClr val="6B7480"/>
                 </a:solidFill>
@@ -10067,7 +16170,7 @@
               </a:rPr>
               <a:t>All of a transaction's operations happen, or none do — no partial effect is ever left behind.</a:t>
             </a:r>
-            <a:endParaRPr lang="en-US" sz="1050" dirty="0"/>
+            <a:endParaRPr lang="en-US" sz="1800" dirty="0"/>
           </a:p>
         </p:txBody>
       </p:sp>
@@ -10150,7 +16253,7 @@
               <a:buNone/>
             </a:pPr>
             <a:r>
-              <a:rPr lang="en-US" sz="1350" b="1" dirty="0">
+              <a:rPr lang="en-US" sz="2000" b="1" dirty="0">
                 <a:solidFill>
                   <a:srgbClr val="1F2429"/>
                 </a:solidFill>
@@ -10160,7 +16263,7 @@
               </a:rPr>
               <a:t>Consistency</a:t>
             </a:r>
-            <a:endParaRPr lang="en-US" sz="1350" dirty="0"/>
+            <a:endParaRPr lang="en-US" sz="2000" dirty="0"/>
           </a:p>
         </p:txBody>
       </p:sp>
@@ -10192,7 +16295,7 @@
               <a:buNone/>
             </a:pPr>
             <a:r>
-              <a:rPr lang="en-US" sz="1050" dirty="0">
+              <a:rPr lang="en-US" sz="1800" dirty="0">
                 <a:solidFill>
                   <a:srgbClr val="6B7480"/>
                 </a:solidFill>
@@ -10202,7 +16305,7 @@
               </a:rPr>
               <a:t>A transaction takes the database from one valid state to another, never violating an integrity constraint.</a:t>
             </a:r>
-            <a:endParaRPr lang="en-US" sz="1050" dirty="0"/>
+            <a:endParaRPr lang="en-US" sz="1800" dirty="0"/>
           </a:p>
         </p:txBody>
       </p:sp>
@@ -10285,7 +16388,7 @@
               <a:buNone/>
             </a:pPr>
             <a:r>
-              <a:rPr lang="en-US" sz="1350" b="1" dirty="0">
+              <a:rPr lang="en-US" sz="2000" b="1" dirty="0">
                 <a:solidFill>
                   <a:srgbClr val="1F2429"/>
                 </a:solidFill>
@@ -10295,7 +16398,7 @@
               </a:rPr>
               <a:t>Isolation</a:t>
             </a:r>
-            <a:endParaRPr lang="en-US" sz="1350" dirty="0"/>
+            <a:endParaRPr lang="en-US" sz="2000" dirty="0"/>
           </a:p>
         </p:txBody>
       </p:sp>
@@ -10327,7 +16430,7 @@
               <a:buNone/>
             </a:pPr>
             <a:r>
-              <a:rPr lang="en-US" sz="1050" dirty="0">
+              <a:rPr lang="en-US" sz="1800" dirty="0">
                 <a:solidFill>
                   <a:srgbClr val="6B7480"/>
                 </a:solidFill>
@@ -10337,7 +16440,7 @@
               </a:rPr>
               <a:t>Concurrent transactions don't see each other's incomplete, in-progress effects.</a:t>
             </a:r>
-            <a:endParaRPr lang="en-US" sz="1050" dirty="0"/>
+            <a:endParaRPr lang="en-US" sz="1800" dirty="0"/>
           </a:p>
         </p:txBody>
       </p:sp>
@@ -10420,7 +16523,7 @@
               <a:buNone/>
             </a:pPr>
             <a:r>
-              <a:rPr lang="en-US" sz="1350" b="1" dirty="0">
+              <a:rPr lang="en-US" sz="2000" b="1" dirty="0">
                 <a:solidFill>
                   <a:srgbClr val="1F2429"/>
                 </a:solidFill>
@@ -10430,7 +16533,7 @@
               </a:rPr>
               <a:t>Durability</a:t>
             </a:r>
-            <a:endParaRPr lang="en-US" sz="1350" dirty="0"/>
+            <a:endParaRPr lang="en-US" sz="2000" dirty="0"/>
           </a:p>
         </p:txBody>
       </p:sp>
@@ -10462,7 +16565,7 @@
               <a:buNone/>
             </a:pPr>
             <a:r>
-              <a:rPr lang="en-US" sz="1050" dirty="0">
+              <a:rPr lang="en-US" sz="1800" dirty="0">
                 <a:solidFill>
                   <a:srgbClr val="6B7480"/>
                 </a:solidFill>
@@ -10472,7 +16575,7 @@
               </a:rPr>
               <a:t>Once committed, a transaction's effects survive any later crash.</a:t>
             </a:r>
-            <a:endParaRPr lang="en-US" sz="1050" dirty="0"/>
+            <a:endParaRPr lang="en-US" sz="1800" dirty="0"/>
           </a:p>
         </p:txBody>
       </p:sp>
@@ -10611,7 +16714,7 @@
               <a:buNone/>
             </a:pPr>
             <a:r>
-              <a:rPr lang="en-US" sz="1000" u="sng" dirty="0">
+              <a:rPr lang="en-US" sz="1200" u="sng" dirty="0">
                 <a:solidFill>
                   <a:srgbClr val="8A939B"/>
                 </a:solidFill>
@@ -10632,7 +16735,7 @@
               <a:buNone/>
             </a:pPr>
             <a:r>
-              <a:rPr lang="en-US" sz="1000" dirty="0">
+              <a:rPr lang="en-US" sz="1200" dirty="0">
                 <a:solidFill>
                   <a:srgbClr val="8A939B"/>
                 </a:solidFill>
@@ -10642,7 +16745,7 @@
               </a:rPr>
               <a:t>  ·  8</a:t>
             </a:r>
-            <a:endParaRPr lang="en-US" sz="1000" dirty="0"/>
+            <a:endParaRPr lang="en-US" sz="1200" dirty="0"/>
           </a:p>
         </p:txBody>
       </p:sp>
@@ -10671,7 +16774,7 @@
               <a:buNone/>
             </a:pPr>
             <a:r>
-              <a:rPr lang="en-US" sz="1250" b="1" dirty="0">
+              <a:rPr lang="en-US" sz="2000" b="1" dirty="0">
                 <a:solidFill>
                   <a:srgbClr val="2FE6C4"/>
                 </a:solidFill>
@@ -10681,7 +16784,7 @@
               </a:rPr>
               <a:t>Atomicity</a:t>
             </a:r>
-            <a:endParaRPr lang="en-US" sz="1250" dirty="0"/>
+            <a:endParaRPr lang="en-US" sz="2000" dirty="0"/>
           </a:p>
         </p:txBody>
       </p:sp>
@@ -10740,7 +16843,7 @@
               <a:buNone/>
             </a:pPr>
             <a:r>
-              <a:rPr lang="en-US" sz="1300" dirty="0">
+              <a:rPr lang="en-US" sz="1800" dirty="0">
                 <a:solidFill>
                   <a:srgbClr val="1F2429"/>
                 </a:solidFill>
@@ -10750,7 +16853,7 @@
               </a:rPr>
               <a:t>The “all-or-nothing” property: a transaction's operations are treated as a single, indivisible unit. If any operation cannot complete, the DBMS undoes every operation that did already run — as if the transaction never started.</a:t>
             </a:r>
-            <a:endParaRPr lang="en-US" sz="1300" dirty="0"/>
+            <a:endParaRPr lang="en-US" sz="1800" dirty="0"/>
           </a:p>
         </p:txBody>
       </p:sp>
@@ -10779,7 +16882,7 @@
               <a:buNone/>
             </a:pPr>
             <a:r>
-              <a:rPr lang="en-US" sz="1250" b="1" dirty="0">
+              <a:rPr lang="en-US" sz="2000" b="1" dirty="0">
                 <a:solidFill>
                   <a:srgbClr val="8B7FD9"/>
                 </a:solidFill>
@@ -10789,7 +16892,7 @@
               </a:rPr>
               <a:t>Consistency</a:t>
             </a:r>
-            <a:endParaRPr lang="en-US" sz="1250" dirty="0"/>
+            <a:endParaRPr lang="en-US" sz="2000" dirty="0"/>
           </a:p>
         </p:txBody>
       </p:sp>
@@ -10848,7 +16951,7 @@
               <a:buNone/>
             </a:pPr>
             <a:r>
-              <a:rPr lang="en-US" sz="1250" dirty="0">
+              <a:rPr lang="en-US" sz="1800" dirty="0">
                 <a:solidFill>
                   <a:srgbClr val="1F2429"/>
                 </a:solidFill>
@@ -10858,7 +16961,7 @@
               </a:rPr>
               <a:t>A transaction, run to completion, takes the database from one valid state to another — never violating a domain, entity, referential, or general constraint. A DBMS enforces the constraints it knows about; encoding the business rule itself (e.g. “a transfer must debit exactly what it credits”) is the application's job.</a:t>
             </a:r>
-            <a:endParaRPr lang="en-US" sz="1250" dirty="0"/>
+            <a:endParaRPr lang="en-US" sz="1800" dirty="0"/>
           </a:p>
         </p:txBody>
       </p:sp>
@@ -10997,7 +17100,7 @@
               <a:buNone/>
             </a:pPr>
             <a:r>
-              <a:rPr lang="en-US" sz="1000" u="sng" dirty="0">
+              <a:rPr lang="en-US" sz="1200" u="sng" dirty="0">
                 <a:solidFill>
                   <a:srgbClr val="8A939B"/>
                 </a:solidFill>
@@ -11018,7 +17121,7 @@
               <a:buNone/>
             </a:pPr>
             <a:r>
-              <a:rPr lang="en-US" sz="1000" dirty="0">
+              <a:rPr lang="en-US" sz="1200" dirty="0">
                 <a:solidFill>
                   <a:srgbClr val="8A939B"/>
                 </a:solidFill>
@@ -11028,7 +17131,7 @@
               </a:rPr>
               <a:t>  ·  9</a:t>
             </a:r>
-            <a:endParaRPr lang="en-US" sz="1000" dirty="0"/>
+            <a:endParaRPr lang="en-US" sz="1200" dirty="0"/>
           </a:p>
         </p:txBody>
       </p:sp>
@@ -11057,7 +17160,7 @@
               <a:buNone/>
             </a:pPr>
             <a:r>
-              <a:rPr lang="en-US" sz="1250" b="1" dirty="0">
+              <a:rPr lang="en-US" sz="2000" b="1" dirty="0">
                 <a:solidFill>
                   <a:srgbClr val="E8A33D"/>
                 </a:solidFill>
@@ -11067,7 +17170,7 @@
               </a:rPr>
               <a:t>Isolation</a:t>
             </a:r>
-            <a:endParaRPr lang="en-US" sz="1250" dirty="0"/>
+            <a:endParaRPr lang="en-US" sz="2000" dirty="0"/>
           </a:p>
         </p:txBody>
       </p:sp>
@@ -11126,7 +17229,7 @@
               <a:buNone/>
             </a:pPr>
             <a:r>
-              <a:rPr lang="en-US" sz="1300" dirty="0">
+              <a:rPr lang="en-US" sz="1800" dirty="0">
                 <a:solidFill>
                   <a:srgbClr val="1F2429"/>
                 </a:solidFill>
@@ -11136,7 +17239,7 @@
               </a:rPr>
               <a:t>Concurrently executing transactions do not interfere with one another — each behaves as though it were the only one running. Without isolation, one transaction could read another's half-finished work. This is a large enough topic to get its own full lecture next.</a:t>
             </a:r>
-            <a:endParaRPr lang="en-US" sz="1300" dirty="0"/>
+            <a:endParaRPr lang="en-US" sz="1800" dirty="0"/>
           </a:p>
         </p:txBody>
       </p:sp>
@@ -11165,7 +17268,7 @@
               <a:buNone/>
             </a:pPr>
             <a:r>
-              <a:rPr lang="en-US" sz="1250" b="1" dirty="0">
+              <a:rPr lang="en-US" sz="2000" b="1" dirty="0">
                 <a:solidFill>
                   <a:srgbClr val="2FE6C4"/>
                 </a:solidFill>
@@ -11175,7 +17278,7 @@
               </a:rPr>
               <a:t>Durability</a:t>
             </a:r>
-            <a:endParaRPr lang="en-US" sz="1250" dirty="0"/>
+            <a:endParaRPr lang="en-US" sz="2000" dirty="0"/>
           </a:p>
         </p:txBody>
       </p:sp>
@@ -11234,7 +17337,7 @@
               <a:buNone/>
             </a:pPr>
             <a:r>
-              <a:rPr lang="en-US" sz="1250" dirty="0">
+              <a:rPr lang="en-US" sz="1800" dirty="0">
                 <a:solidFill>
                   <a:srgbClr val="1F2429"/>
                 </a:solidFill>
@@ -11244,7 +17347,7 @@
               </a:rPr>
               <a:t>Once a transaction commits, its effects are permanent — they survive any subsequent failure. Delivered by writing a log of every change to stable storage before confirming the commit, so even a total loss of memory can be recovered from. The mechanics are Lecture 31's subject in full.</a:t>
             </a:r>
-            <a:endParaRPr lang="en-US" sz="1250" dirty="0"/>
+            <a:endParaRPr lang="en-US" sz="1800" dirty="0"/>
           </a:p>
         </p:txBody>
       </p:sp>
